--- a/fig/chapter1/论文框架图.pptx
+++ b/fig/chapter1/论文框架图.pptx
@@ -2,18 +2,21 @@
 <file path=ppt/presentation.xml><?xml version="1.0" encoding="utf-8"?>
 <p:presentation xmlns:a="http://schemas.openxmlformats.org/drawingml/2006/main" xmlns:r="http://schemas.openxmlformats.org/officeDocument/2006/relationships" xmlns:p="http://schemas.openxmlformats.org/presentationml/2006/main" saveSubsetFonts="1">
   <p:sldMasterIdLst>
-    <p:sldMasterId id="2147483648" r:id="rId1"/>
+    <p:sldMasterId id="2147483720" r:id="rId1"/>
   </p:sldMasterIdLst>
+  <p:notesMasterIdLst>
+    <p:notesMasterId r:id="rId3"/>
+  </p:notesMasterIdLst>
   <p:sldIdLst>
     <p:sldId id="256" r:id="rId2"/>
   </p:sldIdLst>
-  <p:sldSz cx="12192000" cy="6858000"/>
+  <p:sldSz cx="9144000" cy="8999538"/>
   <p:notesSz cx="6858000" cy="9144000"/>
   <p:defaultTextStyle>
     <a:defPPr>
-      <a:defRPr lang="zh-CN"/>
+      <a:defRPr lang="en-US"/>
     </a:defPPr>
-    <a:lvl1pPr marL="0" algn="l" defTabSz="914400" rtl="0" eaLnBrk="1" latinLnBrk="0" hangingPunct="1">
+    <a:lvl1pPr marL="0" algn="l" defTabSz="457200" rtl="0" eaLnBrk="1" latinLnBrk="0" hangingPunct="1">
       <a:defRPr sz="1800" kern="1200">
         <a:solidFill>
           <a:schemeClr val="tx1"/>
@@ -23,7 +26,7 @@
         <a:cs typeface="+mn-cs"/>
       </a:defRPr>
     </a:lvl1pPr>
-    <a:lvl2pPr marL="457200" algn="l" defTabSz="914400" rtl="0" eaLnBrk="1" latinLnBrk="0" hangingPunct="1">
+    <a:lvl2pPr marL="457200" algn="l" defTabSz="457200" rtl="0" eaLnBrk="1" latinLnBrk="0" hangingPunct="1">
       <a:defRPr sz="1800" kern="1200">
         <a:solidFill>
           <a:schemeClr val="tx1"/>
@@ -33,7 +36,7 @@
         <a:cs typeface="+mn-cs"/>
       </a:defRPr>
     </a:lvl2pPr>
-    <a:lvl3pPr marL="914400" algn="l" defTabSz="914400" rtl="0" eaLnBrk="1" latinLnBrk="0" hangingPunct="1">
+    <a:lvl3pPr marL="914400" algn="l" defTabSz="457200" rtl="0" eaLnBrk="1" latinLnBrk="0" hangingPunct="1">
       <a:defRPr sz="1800" kern="1200">
         <a:solidFill>
           <a:schemeClr val="tx1"/>
@@ -43,7 +46,7 @@
         <a:cs typeface="+mn-cs"/>
       </a:defRPr>
     </a:lvl3pPr>
-    <a:lvl4pPr marL="1371600" algn="l" defTabSz="914400" rtl="0" eaLnBrk="1" latinLnBrk="0" hangingPunct="1">
+    <a:lvl4pPr marL="1371600" algn="l" defTabSz="457200" rtl="0" eaLnBrk="1" latinLnBrk="0" hangingPunct="1">
       <a:defRPr sz="1800" kern="1200">
         <a:solidFill>
           <a:schemeClr val="tx1"/>
@@ -53,7 +56,7 @@
         <a:cs typeface="+mn-cs"/>
       </a:defRPr>
     </a:lvl4pPr>
-    <a:lvl5pPr marL="1828800" algn="l" defTabSz="914400" rtl="0" eaLnBrk="1" latinLnBrk="0" hangingPunct="1">
+    <a:lvl5pPr marL="1828800" algn="l" defTabSz="457200" rtl="0" eaLnBrk="1" latinLnBrk="0" hangingPunct="1">
       <a:defRPr sz="1800" kern="1200">
         <a:solidFill>
           <a:schemeClr val="tx1"/>
@@ -63,7 +66,7 @@
         <a:cs typeface="+mn-cs"/>
       </a:defRPr>
     </a:lvl5pPr>
-    <a:lvl6pPr marL="2286000" algn="l" defTabSz="914400" rtl="0" eaLnBrk="1" latinLnBrk="0" hangingPunct="1">
+    <a:lvl6pPr marL="2286000" algn="l" defTabSz="457200" rtl="0" eaLnBrk="1" latinLnBrk="0" hangingPunct="1">
       <a:defRPr sz="1800" kern="1200">
         <a:solidFill>
           <a:schemeClr val="tx1"/>
@@ -73,7 +76,7 @@
         <a:cs typeface="+mn-cs"/>
       </a:defRPr>
     </a:lvl6pPr>
-    <a:lvl7pPr marL="2743200" algn="l" defTabSz="914400" rtl="0" eaLnBrk="1" latinLnBrk="0" hangingPunct="1">
+    <a:lvl7pPr marL="2743200" algn="l" defTabSz="457200" rtl="0" eaLnBrk="1" latinLnBrk="0" hangingPunct="1">
       <a:defRPr sz="1800" kern="1200">
         <a:solidFill>
           <a:schemeClr val="tx1"/>
@@ -83,7 +86,7 @@
         <a:cs typeface="+mn-cs"/>
       </a:defRPr>
     </a:lvl7pPr>
-    <a:lvl8pPr marL="3200400" algn="l" defTabSz="914400" rtl="0" eaLnBrk="1" latinLnBrk="0" hangingPunct="1">
+    <a:lvl8pPr marL="3200400" algn="l" defTabSz="457200" rtl="0" eaLnBrk="1" latinLnBrk="0" hangingPunct="1">
       <a:defRPr sz="1800" kern="1200">
         <a:solidFill>
           <a:schemeClr val="tx1"/>
@@ -93,7 +96,7 @@
         <a:cs typeface="+mn-cs"/>
       </a:defRPr>
     </a:lvl8pPr>
-    <a:lvl9pPr marL="3657600" algn="l" defTabSz="914400" rtl="0" eaLnBrk="1" latinLnBrk="0" hangingPunct="1">
+    <a:lvl9pPr marL="3657600" algn="l" defTabSz="457200" rtl="0" eaLnBrk="1" latinLnBrk="0" hangingPunct="1">
       <a:defRPr sz="1800" kern="1200">
         <a:solidFill>
           <a:schemeClr val="tx1"/>
@@ -104,7 +107,361 @@
       </a:defRPr>
     </a:lvl9pPr>
   </p:defaultTextStyle>
+  <p:extLst>
+    <p:ext uri="{EFAFB233-063F-42B5-8137-9DF3F51BA10A}">
+      <p15:sldGuideLst xmlns:p15="http://schemas.microsoft.com/office/powerpoint/2012/main"/>
+    </p:ext>
+  </p:extLst>
 </p:presentation>
+</file>
+
+<file path=ppt/notesMasters/notesMaster1.xml><?xml version="1.0" encoding="utf-8"?>
+<p:notesMaster xmlns:a="http://schemas.openxmlformats.org/drawingml/2006/main" xmlns:r="http://schemas.openxmlformats.org/officeDocument/2006/relationships" xmlns:p="http://schemas.openxmlformats.org/presentationml/2006/main">
+  <p:cSld>
+    <p:bg>
+      <p:bgRef idx="1001">
+        <a:schemeClr val="bg1"/>
+      </p:bgRef>
+    </p:bg>
+    <p:spTree>
+      <p:nvGrpSpPr>
+        <p:cNvPr id="1" name=""/>
+        <p:cNvGrpSpPr/>
+        <p:nvPr/>
+      </p:nvGrpSpPr>
+      <p:grpSpPr>
+        <a:xfrm>
+          <a:off x="0" y="0"/>
+          <a:ext cx="0" cy="0"/>
+          <a:chOff x="0" y="0"/>
+          <a:chExt cx="0" cy="0"/>
+        </a:xfrm>
+      </p:grpSpPr>
+      <p:sp>
+        <p:nvSpPr>
+          <p:cNvPr id="2" name="页眉占位符 1"/>
+          <p:cNvSpPr>
+            <a:spLocks noGrp="1"/>
+          </p:cNvSpPr>
+          <p:nvPr>
+            <p:ph type="hdr" sz="quarter"/>
+          </p:nvPr>
+        </p:nvSpPr>
+        <p:spPr>
+          <a:xfrm>
+            <a:off x="0" y="0"/>
+            <a:ext cx="2971800" cy="458788"/>
+          </a:xfrm>
+          <a:prstGeom prst="rect">
+            <a:avLst/>
+          </a:prstGeom>
+        </p:spPr>
+        <p:txBody>
+          <a:bodyPr vert="horz" lIns="91440" tIns="45720" rIns="91440" bIns="45720" rtlCol="0"/>
+          <a:lstStyle>
+            <a:lvl1pPr algn="l">
+              <a:defRPr sz="1200"/>
+            </a:lvl1pPr>
+          </a:lstStyle>
+          <a:p>
+            <a:endParaRPr lang="zh-CN" altLang="en-US"/>
+          </a:p>
+        </p:txBody>
+      </p:sp>
+      <p:sp>
+        <p:nvSpPr>
+          <p:cNvPr id="3" name="日期占位符 2"/>
+          <p:cNvSpPr>
+            <a:spLocks noGrp="1"/>
+          </p:cNvSpPr>
+          <p:nvPr>
+            <p:ph type="dt" idx="1"/>
+          </p:nvPr>
+        </p:nvSpPr>
+        <p:spPr>
+          <a:xfrm>
+            <a:off x="3884613" y="0"/>
+            <a:ext cx="2971800" cy="458788"/>
+          </a:xfrm>
+          <a:prstGeom prst="rect">
+            <a:avLst/>
+          </a:prstGeom>
+        </p:spPr>
+        <p:txBody>
+          <a:bodyPr vert="horz" lIns="91440" tIns="45720" rIns="91440" bIns="45720" rtlCol="0"/>
+          <a:lstStyle>
+            <a:lvl1pPr algn="r">
+              <a:defRPr sz="1200"/>
+            </a:lvl1pPr>
+          </a:lstStyle>
+          <a:p>
+            <a:fld id="{D1E122CD-7235-4C74-830E-1A10A953F795}" type="datetimeFigureOut">
+              <a:rPr lang="zh-CN" altLang="en-US" smtClean="0"/>
+              <a:t>2026/3/19</a:t>
+            </a:fld>
+            <a:endParaRPr lang="zh-CN" altLang="en-US"/>
+          </a:p>
+        </p:txBody>
+      </p:sp>
+      <p:sp>
+        <p:nvSpPr>
+          <p:cNvPr id="4" name="幻灯片图像占位符 3"/>
+          <p:cNvSpPr>
+            <a:spLocks noGrp="1" noRot="1" noChangeAspect="1"/>
+          </p:cNvSpPr>
+          <p:nvPr>
+            <p:ph type="sldImg" idx="2"/>
+          </p:nvPr>
+        </p:nvSpPr>
+        <p:spPr>
+          <a:xfrm>
+            <a:off x="1862138" y="1143000"/>
+            <a:ext cx="3133725" cy="3086100"/>
+          </a:xfrm>
+          <a:prstGeom prst="rect">
+            <a:avLst/>
+          </a:prstGeom>
+          <a:noFill/>
+          <a:ln w="12700">
+            <a:solidFill>
+              <a:prstClr val="black"/>
+            </a:solidFill>
+          </a:ln>
+        </p:spPr>
+        <p:txBody>
+          <a:bodyPr vert="horz" lIns="91440" tIns="45720" rIns="91440" bIns="45720" rtlCol="0" anchor="ctr"/>
+          <a:lstStyle/>
+          <a:p>
+            <a:endParaRPr lang="zh-CN" altLang="en-US"/>
+          </a:p>
+        </p:txBody>
+      </p:sp>
+      <p:sp>
+        <p:nvSpPr>
+          <p:cNvPr id="5" name="备注占位符 4"/>
+          <p:cNvSpPr>
+            <a:spLocks noGrp="1"/>
+          </p:cNvSpPr>
+          <p:nvPr>
+            <p:ph type="body" sz="quarter" idx="3"/>
+          </p:nvPr>
+        </p:nvSpPr>
+        <p:spPr>
+          <a:xfrm>
+            <a:off x="685800" y="4400550"/>
+            <a:ext cx="5486400" cy="3600450"/>
+          </a:xfrm>
+          <a:prstGeom prst="rect">
+            <a:avLst/>
+          </a:prstGeom>
+        </p:spPr>
+        <p:txBody>
+          <a:bodyPr vert="horz" lIns="91440" tIns="45720" rIns="91440" bIns="45720" rtlCol="0"/>
+          <a:lstStyle/>
+          <a:p>
+            <a:pPr lvl="0"/>
+            <a:r>
+              <a:rPr lang="zh-CN" altLang="en-US"/>
+              <a:t>单击此处编辑母版文本样式</a:t>
+            </a:r>
+          </a:p>
+          <a:p>
+            <a:pPr lvl="1"/>
+            <a:r>
+              <a:rPr lang="zh-CN" altLang="en-US"/>
+              <a:t>二级</a:t>
+            </a:r>
+          </a:p>
+          <a:p>
+            <a:pPr lvl="2"/>
+            <a:r>
+              <a:rPr lang="zh-CN" altLang="en-US"/>
+              <a:t>三级</a:t>
+            </a:r>
+          </a:p>
+          <a:p>
+            <a:pPr lvl="3"/>
+            <a:r>
+              <a:rPr lang="zh-CN" altLang="en-US"/>
+              <a:t>四级</a:t>
+            </a:r>
+          </a:p>
+          <a:p>
+            <a:pPr lvl="4"/>
+            <a:r>
+              <a:rPr lang="zh-CN" altLang="en-US"/>
+              <a:t>五级</a:t>
+            </a:r>
+          </a:p>
+        </p:txBody>
+      </p:sp>
+      <p:sp>
+        <p:nvSpPr>
+          <p:cNvPr id="6" name="页脚占位符 5"/>
+          <p:cNvSpPr>
+            <a:spLocks noGrp="1"/>
+          </p:cNvSpPr>
+          <p:nvPr>
+            <p:ph type="ftr" sz="quarter" idx="4"/>
+          </p:nvPr>
+        </p:nvSpPr>
+        <p:spPr>
+          <a:xfrm>
+            <a:off x="0" y="8685213"/>
+            <a:ext cx="2971800" cy="458787"/>
+          </a:xfrm>
+          <a:prstGeom prst="rect">
+            <a:avLst/>
+          </a:prstGeom>
+        </p:spPr>
+        <p:txBody>
+          <a:bodyPr vert="horz" lIns="91440" tIns="45720" rIns="91440" bIns="45720" rtlCol="0" anchor="b"/>
+          <a:lstStyle>
+            <a:lvl1pPr algn="l">
+              <a:defRPr sz="1200"/>
+            </a:lvl1pPr>
+          </a:lstStyle>
+          <a:p>
+            <a:endParaRPr lang="zh-CN" altLang="en-US"/>
+          </a:p>
+        </p:txBody>
+      </p:sp>
+      <p:sp>
+        <p:nvSpPr>
+          <p:cNvPr id="7" name="灯片编号占位符 6"/>
+          <p:cNvSpPr>
+            <a:spLocks noGrp="1"/>
+          </p:cNvSpPr>
+          <p:nvPr>
+            <p:ph type="sldNum" sz="quarter" idx="5"/>
+          </p:nvPr>
+        </p:nvSpPr>
+        <p:spPr>
+          <a:xfrm>
+            <a:off x="3884613" y="8685213"/>
+            <a:ext cx="2971800" cy="458787"/>
+          </a:xfrm>
+          <a:prstGeom prst="rect">
+            <a:avLst/>
+          </a:prstGeom>
+        </p:spPr>
+        <p:txBody>
+          <a:bodyPr vert="horz" lIns="91440" tIns="45720" rIns="91440" bIns="45720" rtlCol="0" anchor="b"/>
+          <a:lstStyle>
+            <a:lvl1pPr algn="r">
+              <a:defRPr sz="1200"/>
+            </a:lvl1pPr>
+          </a:lstStyle>
+          <a:p>
+            <a:fld id="{38C8EE1F-7060-42F8-A743-6C412F3B1323}" type="slidenum">
+              <a:rPr lang="zh-CN" altLang="en-US" smtClean="0"/>
+              <a:t>‹#›</a:t>
+            </a:fld>
+            <a:endParaRPr lang="zh-CN" altLang="en-US"/>
+          </a:p>
+        </p:txBody>
+      </p:sp>
+    </p:spTree>
+    <p:extLst>
+      <p:ext uri="{BB962C8B-B14F-4D97-AF65-F5344CB8AC3E}">
+        <p14:creationId xmlns:p14="http://schemas.microsoft.com/office/powerpoint/2010/main" val="251115961"/>
+      </p:ext>
+    </p:extLst>
+  </p:cSld>
+  <p:clrMap bg1="lt1" tx1="dk1" bg2="lt2" tx2="dk2" accent1="accent1" accent2="accent2" accent3="accent3" accent4="accent4" accent5="accent5" accent6="accent6" hlink="hlink" folHlink="folHlink"/>
+  <p:notesStyle>
+    <a:lvl1pPr marL="0" algn="l" defTabSz="1036611" rtl="0" eaLnBrk="1" latinLnBrk="0" hangingPunct="1">
+      <a:defRPr sz="1361" kern="1200">
+        <a:solidFill>
+          <a:schemeClr val="tx1"/>
+        </a:solidFill>
+        <a:latin typeface="+mn-lt"/>
+        <a:ea typeface="+mn-ea"/>
+        <a:cs typeface="+mn-cs"/>
+      </a:defRPr>
+    </a:lvl1pPr>
+    <a:lvl2pPr marL="518305" algn="l" defTabSz="1036611" rtl="0" eaLnBrk="1" latinLnBrk="0" hangingPunct="1">
+      <a:defRPr sz="1361" kern="1200">
+        <a:solidFill>
+          <a:schemeClr val="tx1"/>
+        </a:solidFill>
+        <a:latin typeface="+mn-lt"/>
+        <a:ea typeface="+mn-ea"/>
+        <a:cs typeface="+mn-cs"/>
+      </a:defRPr>
+    </a:lvl2pPr>
+    <a:lvl3pPr marL="1036611" algn="l" defTabSz="1036611" rtl="0" eaLnBrk="1" latinLnBrk="0" hangingPunct="1">
+      <a:defRPr sz="1361" kern="1200">
+        <a:solidFill>
+          <a:schemeClr val="tx1"/>
+        </a:solidFill>
+        <a:latin typeface="+mn-lt"/>
+        <a:ea typeface="+mn-ea"/>
+        <a:cs typeface="+mn-cs"/>
+      </a:defRPr>
+    </a:lvl3pPr>
+    <a:lvl4pPr marL="1554914" algn="l" defTabSz="1036611" rtl="0" eaLnBrk="1" latinLnBrk="0" hangingPunct="1">
+      <a:defRPr sz="1361" kern="1200">
+        <a:solidFill>
+          <a:schemeClr val="tx1"/>
+        </a:solidFill>
+        <a:latin typeface="+mn-lt"/>
+        <a:ea typeface="+mn-ea"/>
+        <a:cs typeface="+mn-cs"/>
+      </a:defRPr>
+    </a:lvl4pPr>
+    <a:lvl5pPr marL="2073219" algn="l" defTabSz="1036611" rtl="0" eaLnBrk="1" latinLnBrk="0" hangingPunct="1">
+      <a:defRPr sz="1361" kern="1200">
+        <a:solidFill>
+          <a:schemeClr val="tx1"/>
+        </a:solidFill>
+        <a:latin typeface="+mn-lt"/>
+        <a:ea typeface="+mn-ea"/>
+        <a:cs typeface="+mn-cs"/>
+      </a:defRPr>
+    </a:lvl5pPr>
+    <a:lvl6pPr marL="2591524" algn="l" defTabSz="1036611" rtl="0" eaLnBrk="1" latinLnBrk="0" hangingPunct="1">
+      <a:defRPr sz="1361" kern="1200">
+        <a:solidFill>
+          <a:schemeClr val="tx1"/>
+        </a:solidFill>
+        <a:latin typeface="+mn-lt"/>
+        <a:ea typeface="+mn-ea"/>
+        <a:cs typeface="+mn-cs"/>
+      </a:defRPr>
+    </a:lvl6pPr>
+    <a:lvl7pPr marL="3109829" algn="l" defTabSz="1036611" rtl="0" eaLnBrk="1" latinLnBrk="0" hangingPunct="1">
+      <a:defRPr sz="1361" kern="1200">
+        <a:solidFill>
+          <a:schemeClr val="tx1"/>
+        </a:solidFill>
+        <a:latin typeface="+mn-lt"/>
+        <a:ea typeface="+mn-ea"/>
+        <a:cs typeface="+mn-cs"/>
+      </a:defRPr>
+    </a:lvl7pPr>
+    <a:lvl8pPr marL="3628135" algn="l" defTabSz="1036611" rtl="0" eaLnBrk="1" latinLnBrk="0" hangingPunct="1">
+      <a:defRPr sz="1361" kern="1200">
+        <a:solidFill>
+          <a:schemeClr val="tx1"/>
+        </a:solidFill>
+        <a:latin typeface="+mn-lt"/>
+        <a:ea typeface="+mn-ea"/>
+        <a:cs typeface="+mn-cs"/>
+      </a:defRPr>
+    </a:lvl8pPr>
+    <a:lvl9pPr marL="4146438" algn="l" defTabSz="1036611" rtl="0" eaLnBrk="1" latinLnBrk="0" hangingPunct="1">
+      <a:defRPr sz="1361" kern="1200">
+        <a:solidFill>
+          <a:schemeClr val="tx1"/>
+        </a:solidFill>
+        <a:latin typeface="+mn-lt"/>
+        <a:ea typeface="+mn-ea"/>
+        <a:cs typeface="+mn-cs"/>
+      </a:defRPr>
+    </a:lvl9pPr>
+  </p:notesStyle>
+</p:notesMaster>
 </file>
 
 <file path=ppt/slideLayouts/slideLayout1.xml><?xml version="1.0" encoding="utf-8"?>
@@ -126,13 +483,7 @@
       </p:grpSpPr>
       <p:sp>
         <p:nvSpPr>
-          <p:cNvPr id="2" name="标题 1">
-            <a:extLst>
-              <a:ext uri="{FF2B5EF4-FFF2-40B4-BE49-F238E27FC236}">
-                <a16:creationId xmlns:a16="http://schemas.microsoft.com/office/drawing/2014/main" id="{24EFED97-C086-4C56-8F45-BD12BAB5A5AB}"/>
-              </a:ext>
-            </a:extLst>
-          </p:cNvPr>
+          <p:cNvPr id="2" name="Title 1"/>
           <p:cNvSpPr>
             <a:spLocks noGrp="1"/>
           </p:cNvSpPr>
@@ -142,8 +493,8 @@
         </p:nvSpPr>
         <p:spPr>
           <a:xfrm>
-            <a:off x="1524000" y="1122363"/>
-            <a:ext cx="9144000" cy="2387600"/>
+            <a:off x="685800" y="1472842"/>
+            <a:ext cx="7772400" cy="3133172"/>
           </a:xfrm>
         </p:spPr>
         <p:txBody>
@@ -158,18 +509,13 @@
               <a:rPr lang="zh-CN" altLang="en-US"/>
               <a:t>单击此处编辑母版标题样式</a:t>
             </a:r>
+            <a:endParaRPr lang="en-US" dirty="0"/>
           </a:p>
         </p:txBody>
       </p:sp>
       <p:sp>
         <p:nvSpPr>
-          <p:cNvPr id="3" name="副标题 2">
-            <a:extLst>
-              <a:ext uri="{FF2B5EF4-FFF2-40B4-BE49-F238E27FC236}">
-                <a16:creationId xmlns:a16="http://schemas.microsoft.com/office/drawing/2014/main" id="{4FFC06DF-43AC-4676-A963-D771469AA77A}"/>
-              </a:ext>
-            </a:extLst>
-          </p:cNvPr>
+          <p:cNvPr id="3" name="Subtitle 2"/>
           <p:cNvSpPr>
             <a:spLocks noGrp="1"/>
           </p:cNvSpPr>
@@ -179,8 +525,8 @@
         </p:nvSpPr>
         <p:spPr>
           <a:xfrm>
-            <a:off x="1524000" y="3602038"/>
-            <a:ext cx="9144000" cy="1655762"/>
+            <a:off x="1143000" y="4726842"/>
+            <a:ext cx="6858000" cy="2172804"/>
           </a:xfrm>
         </p:spPr>
         <p:txBody>
@@ -228,18 +574,13 @@
               <a:rPr lang="zh-CN" altLang="en-US"/>
               <a:t>单击此处编辑母版副标题样式</a:t>
             </a:r>
+            <a:endParaRPr lang="en-US" dirty="0"/>
           </a:p>
         </p:txBody>
       </p:sp>
       <p:sp>
         <p:nvSpPr>
-          <p:cNvPr id="4" name="日期占位符 3">
-            <a:extLst>
-              <a:ext uri="{FF2B5EF4-FFF2-40B4-BE49-F238E27FC236}">
-                <a16:creationId xmlns:a16="http://schemas.microsoft.com/office/drawing/2014/main" id="{606D2B2C-EE76-48ED-9165-497957A6FC7D}"/>
-              </a:ext>
-            </a:extLst>
-          </p:cNvPr>
+          <p:cNvPr id="4" name="Date Placeholder 3"/>
           <p:cNvSpPr>
             <a:spLocks noGrp="1"/>
           </p:cNvSpPr>
@@ -254,7 +595,7 @@
           <a:p>
             <a:fld id="{ADCF388C-B51F-41E4-A743-B6B536218E4C}" type="datetimeFigureOut">
               <a:rPr lang="zh-CN" altLang="en-US" smtClean="0"/>
-              <a:t>2026/3/16</a:t>
+              <a:t>2026/3/19</a:t>
             </a:fld>
             <a:endParaRPr lang="zh-CN" altLang="en-US"/>
           </a:p>
@@ -262,13 +603,7 @@
       </p:sp>
       <p:sp>
         <p:nvSpPr>
-          <p:cNvPr id="5" name="页脚占位符 4">
-            <a:extLst>
-              <a:ext uri="{FF2B5EF4-FFF2-40B4-BE49-F238E27FC236}">
-                <a16:creationId xmlns:a16="http://schemas.microsoft.com/office/drawing/2014/main" id="{452D14D1-8A84-4071-B78C-E6AA9EA90FFE}"/>
-              </a:ext>
-            </a:extLst>
-          </p:cNvPr>
+          <p:cNvPr id="5" name="Footer Placeholder 4"/>
           <p:cNvSpPr>
             <a:spLocks noGrp="1"/>
           </p:cNvSpPr>
@@ -287,13 +622,7 @@
       </p:sp>
       <p:sp>
         <p:nvSpPr>
-          <p:cNvPr id="6" name="灯片编号占位符 5">
-            <a:extLst>
-              <a:ext uri="{FF2B5EF4-FFF2-40B4-BE49-F238E27FC236}">
-                <a16:creationId xmlns:a16="http://schemas.microsoft.com/office/drawing/2014/main" id="{D363C532-95D2-4888-82CB-E681D2960554}"/>
-              </a:ext>
-            </a:extLst>
-          </p:cNvPr>
+          <p:cNvPr id="6" name="Slide Number Placeholder 5"/>
           <p:cNvSpPr>
             <a:spLocks noGrp="1"/>
           </p:cNvSpPr>
@@ -317,7 +646,7 @@
     </p:spTree>
     <p:extLst>
       <p:ext uri="{BB962C8B-B14F-4D97-AF65-F5344CB8AC3E}">
-        <p14:creationId xmlns:p14="http://schemas.microsoft.com/office/powerpoint/2010/main" val="2219526061"/>
+        <p14:creationId xmlns:p14="http://schemas.microsoft.com/office/powerpoint/2010/main" val="435661016"/>
       </p:ext>
     </p:extLst>
   </p:cSld>
@@ -346,13 +675,7 @@
       </p:grpSpPr>
       <p:sp>
         <p:nvSpPr>
-          <p:cNvPr id="2" name="标题 1">
-            <a:extLst>
-              <a:ext uri="{FF2B5EF4-FFF2-40B4-BE49-F238E27FC236}">
-                <a16:creationId xmlns:a16="http://schemas.microsoft.com/office/drawing/2014/main" id="{738D70BD-928D-4AC9-8072-D8B767B0FA76}"/>
-              </a:ext>
-            </a:extLst>
-          </p:cNvPr>
+          <p:cNvPr id="2" name="Title 1"/>
           <p:cNvSpPr>
             <a:spLocks noGrp="1"/>
           </p:cNvSpPr>
@@ -369,18 +692,13 @@
               <a:rPr lang="zh-CN" altLang="en-US"/>
               <a:t>单击此处编辑母版标题样式</a:t>
             </a:r>
+            <a:endParaRPr lang="en-US" dirty="0"/>
           </a:p>
         </p:txBody>
       </p:sp>
       <p:sp>
         <p:nvSpPr>
-          <p:cNvPr id="3" name="竖排文字占位符 2">
-            <a:extLst>
-              <a:ext uri="{FF2B5EF4-FFF2-40B4-BE49-F238E27FC236}">
-                <a16:creationId xmlns:a16="http://schemas.microsoft.com/office/drawing/2014/main" id="{E45C6E49-0BE9-49FA-960B-7CE2DE300DB2}"/>
-              </a:ext>
-            </a:extLst>
-          </p:cNvPr>
+          <p:cNvPr id="3" name="Vertical Text Placeholder 2"/>
           <p:cNvSpPr>
             <a:spLocks noGrp="1"/>
           </p:cNvSpPr>
@@ -426,18 +744,13 @@
               <a:rPr lang="zh-CN" altLang="en-US"/>
               <a:t>五级</a:t>
             </a:r>
+            <a:endParaRPr lang="en-US" dirty="0"/>
           </a:p>
         </p:txBody>
       </p:sp>
       <p:sp>
         <p:nvSpPr>
-          <p:cNvPr id="4" name="日期占位符 3">
-            <a:extLst>
-              <a:ext uri="{FF2B5EF4-FFF2-40B4-BE49-F238E27FC236}">
-                <a16:creationId xmlns:a16="http://schemas.microsoft.com/office/drawing/2014/main" id="{03C24C40-5A65-4111-8435-1A55D645A300}"/>
-              </a:ext>
-            </a:extLst>
-          </p:cNvPr>
+          <p:cNvPr id="4" name="Date Placeholder 3"/>
           <p:cNvSpPr>
             <a:spLocks noGrp="1"/>
           </p:cNvSpPr>
@@ -452,7 +765,7 @@
           <a:p>
             <a:fld id="{ADCF388C-B51F-41E4-A743-B6B536218E4C}" type="datetimeFigureOut">
               <a:rPr lang="zh-CN" altLang="en-US" smtClean="0"/>
-              <a:t>2026/3/16</a:t>
+              <a:t>2026/3/19</a:t>
             </a:fld>
             <a:endParaRPr lang="zh-CN" altLang="en-US"/>
           </a:p>
@@ -460,13 +773,7 @@
       </p:sp>
       <p:sp>
         <p:nvSpPr>
-          <p:cNvPr id="5" name="页脚占位符 4">
-            <a:extLst>
-              <a:ext uri="{FF2B5EF4-FFF2-40B4-BE49-F238E27FC236}">
-                <a16:creationId xmlns:a16="http://schemas.microsoft.com/office/drawing/2014/main" id="{E6C0D390-52D1-4A05-9883-E27E8724C96A}"/>
-              </a:ext>
-            </a:extLst>
-          </p:cNvPr>
+          <p:cNvPr id="5" name="Footer Placeholder 4"/>
           <p:cNvSpPr>
             <a:spLocks noGrp="1"/>
           </p:cNvSpPr>
@@ -485,13 +792,7 @@
       </p:sp>
       <p:sp>
         <p:nvSpPr>
-          <p:cNvPr id="6" name="灯片编号占位符 5">
-            <a:extLst>
-              <a:ext uri="{FF2B5EF4-FFF2-40B4-BE49-F238E27FC236}">
-                <a16:creationId xmlns:a16="http://schemas.microsoft.com/office/drawing/2014/main" id="{58EA8EE6-DFF5-4BD8-AF13-5805B2BAE276}"/>
-              </a:ext>
-            </a:extLst>
-          </p:cNvPr>
+          <p:cNvPr id="6" name="Slide Number Placeholder 5"/>
           <p:cNvSpPr>
             <a:spLocks noGrp="1"/>
           </p:cNvSpPr>
@@ -515,7 +816,7 @@
     </p:spTree>
     <p:extLst>
       <p:ext uri="{BB962C8B-B14F-4D97-AF65-F5344CB8AC3E}">
-        <p14:creationId xmlns:p14="http://schemas.microsoft.com/office/powerpoint/2010/main" val="1464497792"/>
+        <p14:creationId xmlns:p14="http://schemas.microsoft.com/office/powerpoint/2010/main" val="3451147085"/>
       </p:ext>
     </p:extLst>
   </p:cSld>
@@ -544,13 +845,7 @@
       </p:grpSpPr>
       <p:sp>
         <p:nvSpPr>
-          <p:cNvPr id="2" name="竖排标题 1">
-            <a:extLst>
-              <a:ext uri="{FF2B5EF4-FFF2-40B4-BE49-F238E27FC236}">
-                <a16:creationId xmlns:a16="http://schemas.microsoft.com/office/drawing/2014/main" id="{85D66652-99AC-4D4F-B515-25D9305EB943}"/>
-              </a:ext>
-            </a:extLst>
-          </p:cNvPr>
+          <p:cNvPr id="2" name="Vertical Title 1"/>
           <p:cNvSpPr>
             <a:spLocks noGrp="1"/>
           </p:cNvSpPr>
@@ -560,8 +855,8 @@
         </p:nvSpPr>
         <p:spPr>
           <a:xfrm>
-            <a:off x="8724900" y="365125"/>
-            <a:ext cx="2628900" cy="5811838"/>
+            <a:off x="6543676" y="479142"/>
+            <a:ext cx="1971675" cy="7626692"/>
           </a:xfrm>
         </p:spPr>
         <p:txBody>
@@ -572,18 +867,13 @@
               <a:rPr lang="zh-CN" altLang="en-US"/>
               <a:t>单击此处编辑母版标题样式</a:t>
             </a:r>
+            <a:endParaRPr lang="en-US" dirty="0"/>
           </a:p>
         </p:txBody>
       </p:sp>
       <p:sp>
         <p:nvSpPr>
-          <p:cNvPr id="3" name="竖排文字占位符 2">
-            <a:extLst>
-              <a:ext uri="{FF2B5EF4-FFF2-40B4-BE49-F238E27FC236}">
-                <a16:creationId xmlns:a16="http://schemas.microsoft.com/office/drawing/2014/main" id="{E65665EC-2E22-4AD4-A86F-4C89F3C47090}"/>
-              </a:ext>
-            </a:extLst>
-          </p:cNvPr>
+          <p:cNvPr id="3" name="Vertical Text Placeholder 2"/>
           <p:cNvSpPr>
             <a:spLocks noGrp="1"/>
           </p:cNvSpPr>
@@ -593,8 +883,8 @@
         </p:nvSpPr>
         <p:spPr>
           <a:xfrm>
-            <a:off x="838200" y="365125"/>
-            <a:ext cx="7734300" cy="5811838"/>
+            <a:off x="628651" y="479142"/>
+            <a:ext cx="5800725" cy="7626692"/>
           </a:xfrm>
         </p:spPr>
         <p:txBody>
@@ -634,18 +924,13 @@
               <a:rPr lang="zh-CN" altLang="en-US"/>
               <a:t>五级</a:t>
             </a:r>
+            <a:endParaRPr lang="en-US" dirty="0"/>
           </a:p>
         </p:txBody>
       </p:sp>
       <p:sp>
         <p:nvSpPr>
-          <p:cNvPr id="4" name="日期占位符 3">
-            <a:extLst>
-              <a:ext uri="{FF2B5EF4-FFF2-40B4-BE49-F238E27FC236}">
-                <a16:creationId xmlns:a16="http://schemas.microsoft.com/office/drawing/2014/main" id="{57916EB2-4B64-49BF-B92D-65E6411E3ADC}"/>
-              </a:ext>
-            </a:extLst>
-          </p:cNvPr>
+          <p:cNvPr id="4" name="Date Placeholder 3"/>
           <p:cNvSpPr>
             <a:spLocks noGrp="1"/>
           </p:cNvSpPr>
@@ -660,7 +945,7 @@
           <a:p>
             <a:fld id="{ADCF388C-B51F-41E4-A743-B6B536218E4C}" type="datetimeFigureOut">
               <a:rPr lang="zh-CN" altLang="en-US" smtClean="0"/>
-              <a:t>2026/3/16</a:t>
+              <a:t>2026/3/19</a:t>
             </a:fld>
             <a:endParaRPr lang="zh-CN" altLang="en-US"/>
           </a:p>
@@ -668,13 +953,7 @@
       </p:sp>
       <p:sp>
         <p:nvSpPr>
-          <p:cNvPr id="5" name="页脚占位符 4">
-            <a:extLst>
-              <a:ext uri="{FF2B5EF4-FFF2-40B4-BE49-F238E27FC236}">
-                <a16:creationId xmlns:a16="http://schemas.microsoft.com/office/drawing/2014/main" id="{9CA321FB-7721-417C-B1EC-60BED01C1ACC}"/>
-              </a:ext>
-            </a:extLst>
-          </p:cNvPr>
+          <p:cNvPr id="5" name="Footer Placeholder 4"/>
           <p:cNvSpPr>
             <a:spLocks noGrp="1"/>
           </p:cNvSpPr>
@@ -693,13 +972,7 @@
       </p:sp>
       <p:sp>
         <p:nvSpPr>
-          <p:cNvPr id="6" name="灯片编号占位符 5">
-            <a:extLst>
-              <a:ext uri="{FF2B5EF4-FFF2-40B4-BE49-F238E27FC236}">
-                <a16:creationId xmlns:a16="http://schemas.microsoft.com/office/drawing/2014/main" id="{82F067EC-BF53-4FC9-8269-C2B4ADF9D47D}"/>
-              </a:ext>
-            </a:extLst>
-          </p:cNvPr>
+          <p:cNvPr id="6" name="Slide Number Placeholder 5"/>
           <p:cNvSpPr>
             <a:spLocks noGrp="1"/>
           </p:cNvSpPr>
@@ -723,7 +996,7 @@
     </p:spTree>
     <p:extLst>
       <p:ext uri="{BB962C8B-B14F-4D97-AF65-F5344CB8AC3E}">
-        <p14:creationId xmlns:p14="http://schemas.microsoft.com/office/powerpoint/2010/main" val="1162866792"/>
+        <p14:creationId xmlns:p14="http://schemas.microsoft.com/office/powerpoint/2010/main" val="3679050843"/>
       </p:ext>
     </p:extLst>
   </p:cSld>
@@ -752,13 +1025,7 @@
       </p:grpSpPr>
       <p:sp>
         <p:nvSpPr>
-          <p:cNvPr id="2" name="标题 1">
-            <a:extLst>
-              <a:ext uri="{FF2B5EF4-FFF2-40B4-BE49-F238E27FC236}">
-                <a16:creationId xmlns:a16="http://schemas.microsoft.com/office/drawing/2014/main" id="{F568A414-9D73-45C3-8D1D-31EF905F7EE7}"/>
-              </a:ext>
-            </a:extLst>
-          </p:cNvPr>
+          <p:cNvPr id="2" name="Title 1"/>
           <p:cNvSpPr>
             <a:spLocks noGrp="1"/>
           </p:cNvSpPr>
@@ -775,18 +1042,13 @@
               <a:rPr lang="zh-CN" altLang="en-US"/>
               <a:t>单击此处编辑母版标题样式</a:t>
             </a:r>
+            <a:endParaRPr lang="en-US" dirty="0"/>
           </a:p>
         </p:txBody>
       </p:sp>
       <p:sp>
         <p:nvSpPr>
-          <p:cNvPr id="3" name="内容占位符 2">
-            <a:extLst>
-              <a:ext uri="{FF2B5EF4-FFF2-40B4-BE49-F238E27FC236}">
-                <a16:creationId xmlns:a16="http://schemas.microsoft.com/office/drawing/2014/main" id="{9C6FB2B5-FC42-4053-9BA0-B417BA05D2EC}"/>
-              </a:ext>
-            </a:extLst>
-          </p:cNvPr>
+          <p:cNvPr id="3" name="Content Placeholder 2"/>
           <p:cNvSpPr>
             <a:spLocks noGrp="1"/>
           </p:cNvSpPr>
@@ -832,18 +1094,13 @@
               <a:rPr lang="zh-CN" altLang="en-US"/>
               <a:t>五级</a:t>
             </a:r>
+            <a:endParaRPr lang="en-US" dirty="0"/>
           </a:p>
         </p:txBody>
       </p:sp>
       <p:sp>
         <p:nvSpPr>
-          <p:cNvPr id="4" name="日期占位符 3">
-            <a:extLst>
-              <a:ext uri="{FF2B5EF4-FFF2-40B4-BE49-F238E27FC236}">
-                <a16:creationId xmlns:a16="http://schemas.microsoft.com/office/drawing/2014/main" id="{BAF1E5B7-83A2-470F-B062-26E83670AAFC}"/>
-              </a:ext>
-            </a:extLst>
-          </p:cNvPr>
+          <p:cNvPr id="4" name="Date Placeholder 3"/>
           <p:cNvSpPr>
             <a:spLocks noGrp="1"/>
           </p:cNvSpPr>
@@ -858,7 +1115,7 @@
           <a:p>
             <a:fld id="{ADCF388C-B51F-41E4-A743-B6B536218E4C}" type="datetimeFigureOut">
               <a:rPr lang="zh-CN" altLang="en-US" smtClean="0"/>
-              <a:t>2026/3/16</a:t>
+              <a:t>2026/3/19</a:t>
             </a:fld>
             <a:endParaRPr lang="zh-CN" altLang="en-US"/>
           </a:p>
@@ -866,13 +1123,7 @@
       </p:sp>
       <p:sp>
         <p:nvSpPr>
-          <p:cNvPr id="5" name="页脚占位符 4">
-            <a:extLst>
-              <a:ext uri="{FF2B5EF4-FFF2-40B4-BE49-F238E27FC236}">
-                <a16:creationId xmlns:a16="http://schemas.microsoft.com/office/drawing/2014/main" id="{DB6A78EA-F235-4195-9000-B0EF341D0E22}"/>
-              </a:ext>
-            </a:extLst>
-          </p:cNvPr>
+          <p:cNvPr id="5" name="Footer Placeholder 4"/>
           <p:cNvSpPr>
             <a:spLocks noGrp="1"/>
           </p:cNvSpPr>
@@ -891,13 +1142,7 @@
       </p:sp>
       <p:sp>
         <p:nvSpPr>
-          <p:cNvPr id="6" name="灯片编号占位符 5">
-            <a:extLst>
-              <a:ext uri="{FF2B5EF4-FFF2-40B4-BE49-F238E27FC236}">
-                <a16:creationId xmlns:a16="http://schemas.microsoft.com/office/drawing/2014/main" id="{E37B03AE-C02A-434F-9862-BEED1C8AAC9D}"/>
-              </a:ext>
-            </a:extLst>
-          </p:cNvPr>
+          <p:cNvPr id="6" name="Slide Number Placeholder 5"/>
           <p:cNvSpPr>
             <a:spLocks noGrp="1"/>
           </p:cNvSpPr>
@@ -921,7 +1166,7 @@
     </p:spTree>
     <p:extLst>
       <p:ext uri="{BB962C8B-B14F-4D97-AF65-F5344CB8AC3E}">
-        <p14:creationId xmlns:p14="http://schemas.microsoft.com/office/powerpoint/2010/main" val="4031599002"/>
+        <p14:creationId xmlns:p14="http://schemas.microsoft.com/office/powerpoint/2010/main" val="2999237228"/>
       </p:ext>
     </p:extLst>
   </p:cSld>
@@ -950,13 +1195,7 @@
       </p:grpSpPr>
       <p:sp>
         <p:nvSpPr>
-          <p:cNvPr id="2" name="标题 1">
-            <a:extLst>
-              <a:ext uri="{FF2B5EF4-FFF2-40B4-BE49-F238E27FC236}">
-                <a16:creationId xmlns:a16="http://schemas.microsoft.com/office/drawing/2014/main" id="{B05D6153-A729-4F2A-968B-396206AF7FBB}"/>
-              </a:ext>
-            </a:extLst>
-          </p:cNvPr>
+          <p:cNvPr id="2" name="Title 1"/>
           <p:cNvSpPr>
             <a:spLocks noGrp="1"/>
           </p:cNvSpPr>
@@ -966,8 +1205,8 @@
         </p:nvSpPr>
         <p:spPr>
           <a:xfrm>
-            <a:off x="831850" y="1709738"/>
-            <a:ext cx="10515600" cy="2852737"/>
+            <a:off x="623888" y="2243638"/>
+            <a:ext cx="7886700" cy="3743557"/>
           </a:xfrm>
         </p:spPr>
         <p:txBody>
@@ -982,18 +1221,13 @@
               <a:rPr lang="zh-CN" altLang="en-US"/>
               <a:t>单击此处编辑母版标题样式</a:t>
             </a:r>
+            <a:endParaRPr lang="en-US" dirty="0"/>
           </a:p>
         </p:txBody>
       </p:sp>
       <p:sp>
         <p:nvSpPr>
-          <p:cNvPr id="3" name="文本占位符 2">
-            <a:extLst>
-              <a:ext uri="{FF2B5EF4-FFF2-40B4-BE49-F238E27FC236}">
-                <a16:creationId xmlns:a16="http://schemas.microsoft.com/office/drawing/2014/main" id="{F265E69C-3ECF-400A-A2AF-151043223932}"/>
-              </a:ext>
-            </a:extLst>
-          </p:cNvPr>
+          <p:cNvPr id="3" name="Text Placeholder 2"/>
           <p:cNvSpPr>
             <a:spLocks noGrp="1"/>
           </p:cNvSpPr>
@@ -1003,8 +1237,8 @@
         </p:nvSpPr>
         <p:spPr>
           <a:xfrm>
-            <a:off x="831850" y="4589463"/>
-            <a:ext cx="10515600" cy="1500187"/>
+            <a:off x="623888" y="6022610"/>
+            <a:ext cx="7886700" cy="1968648"/>
           </a:xfrm>
         </p:spPr>
         <p:txBody>
@@ -1014,9 +1248,7 @@
               <a:buNone/>
               <a:defRPr sz="2400">
                 <a:solidFill>
-                  <a:schemeClr val="tx1">
-                    <a:tint val="75000"/>
-                  </a:schemeClr>
+                  <a:schemeClr val="tx1"/>
                 </a:solidFill>
               </a:defRPr>
             </a:lvl1pPr>
@@ -1112,13 +1344,7 @@
       </p:sp>
       <p:sp>
         <p:nvSpPr>
-          <p:cNvPr id="4" name="日期占位符 3">
-            <a:extLst>
-              <a:ext uri="{FF2B5EF4-FFF2-40B4-BE49-F238E27FC236}">
-                <a16:creationId xmlns:a16="http://schemas.microsoft.com/office/drawing/2014/main" id="{1855FA26-CE39-4BF7-B397-14CF6A750E25}"/>
-              </a:ext>
-            </a:extLst>
-          </p:cNvPr>
+          <p:cNvPr id="4" name="Date Placeholder 3"/>
           <p:cNvSpPr>
             <a:spLocks noGrp="1"/>
           </p:cNvSpPr>
@@ -1133,7 +1359,7 @@
           <a:p>
             <a:fld id="{ADCF388C-B51F-41E4-A743-B6B536218E4C}" type="datetimeFigureOut">
               <a:rPr lang="zh-CN" altLang="en-US" smtClean="0"/>
-              <a:t>2026/3/16</a:t>
+              <a:t>2026/3/19</a:t>
             </a:fld>
             <a:endParaRPr lang="zh-CN" altLang="en-US"/>
           </a:p>
@@ -1141,13 +1367,7 @@
       </p:sp>
       <p:sp>
         <p:nvSpPr>
-          <p:cNvPr id="5" name="页脚占位符 4">
-            <a:extLst>
-              <a:ext uri="{FF2B5EF4-FFF2-40B4-BE49-F238E27FC236}">
-                <a16:creationId xmlns:a16="http://schemas.microsoft.com/office/drawing/2014/main" id="{16C39761-9E43-4C0E-B0DA-3E9DF20698DD}"/>
-              </a:ext>
-            </a:extLst>
-          </p:cNvPr>
+          <p:cNvPr id="5" name="Footer Placeholder 4"/>
           <p:cNvSpPr>
             <a:spLocks noGrp="1"/>
           </p:cNvSpPr>
@@ -1166,13 +1386,7 @@
       </p:sp>
       <p:sp>
         <p:nvSpPr>
-          <p:cNvPr id="6" name="灯片编号占位符 5">
-            <a:extLst>
-              <a:ext uri="{FF2B5EF4-FFF2-40B4-BE49-F238E27FC236}">
-                <a16:creationId xmlns:a16="http://schemas.microsoft.com/office/drawing/2014/main" id="{58F7C3AD-268E-490B-A8D0-1A0EAA7390A3}"/>
-              </a:ext>
-            </a:extLst>
-          </p:cNvPr>
+          <p:cNvPr id="6" name="Slide Number Placeholder 5"/>
           <p:cNvSpPr>
             <a:spLocks noGrp="1"/>
           </p:cNvSpPr>
@@ -1196,7 +1410,7 @@
     </p:spTree>
     <p:extLst>
       <p:ext uri="{BB962C8B-B14F-4D97-AF65-F5344CB8AC3E}">
-        <p14:creationId xmlns:p14="http://schemas.microsoft.com/office/powerpoint/2010/main" val="2269471086"/>
+        <p14:creationId xmlns:p14="http://schemas.microsoft.com/office/powerpoint/2010/main" val="346704648"/>
       </p:ext>
     </p:extLst>
   </p:cSld>
@@ -1225,13 +1439,7 @@
       </p:grpSpPr>
       <p:sp>
         <p:nvSpPr>
-          <p:cNvPr id="2" name="标题 1">
-            <a:extLst>
-              <a:ext uri="{FF2B5EF4-FFF2-40B4-BE49-F238E27FC236}">
-                <a16:creationId xmlns:a16="http://schemas.microsoft.com/office/drawing/2014/main" id="{02E5BB44-211E-47E7-9032-AE80A3BB7149}"/>
-              </a:ext>
-            </a:extLst>
-          </p:cNvPr>
+          <p:cNvPr id="2" name="Title 1"/>
           <p:cNvSpPr>
             <a:spLocks noGrp="1"/>
           </p:cNvSpPr>
@@ -1248,18 +1456,13 @@
               <a:rPr lang="zh-CN" altLang="en-US"/>
               <a:t>单击此处编辑母版标题样式</a:t>
             </a:r>
+            <a:endParaRPr lang="en-US" dirty="0"/>
           </a:p>
         </p:txBody>
       </p:sp>
       <p:sp>
         <p:nvSpPr>
-          <p:cNvPr id="3" name="内容占位符 2">
-            <a:extLst>
-              <a:ext uri="{FF2B5EF4-FFF2-40B4-BE49-F238E27FC236}">
-                <a16:creationId xmlns:a16="http://schemas.microsoft.com/office/drawing/2014/main" id="{081D4E91-D601-471F-8FBD-946772B623C5}"/>
-              </a:ext>
-            </a:extLst>
-          </p:cNvPr>
+          <p:cNvPr id="3" name="Content Placeholder 2"/>
           <p:cNvSpPr>
             <a:spLocks noGrp="1"/>
           </p:cNvSpPr>
@@ -1269,8 +1472,8 @@
         </p:nvSpPr>
         <p:spPr>
           <a:xfrm>
-            <a:off x="838200" y="1825625"/>
-            <a:ext cx="5181600" cy="4351338"/>
+            <a:off x="628650" y="2395710"/>
+            <a:ext cx="3886200" cy="5710124"/>
           </a:xfrm>
         </p:spPr>
         <p:txBody>
@@ -1310,18 +1513,13 @@
               <a:rPr lang="zh-CN" altLang="en-US"/>
               <a:t>五级</a:t>
             </a:r>
+            <a:endParaRPr lang="en-US" dirty="0"/>
           </a:p>
         </p:txBody>
       </p:sp>
       <p:sp>
         <p:nvSpPr>
-          <p:cNvPr id="4" name="内容占位符 3">
-            <a:extLst>
-              <a:ext uri="{FF2B5EF4-FFF2-40B4-BE49-F238E27FC236}">
-                <a16:creationId xmlns:a16="http://schemas.microsoft.com/office/drawing/2014/main" id="{CA2165C8-5315-4DC4-8B25-B803E16B478C}"/>
-              </a:ext>
-            </a:extLst>
-          </p:cNvPr>
+          <p:cNvPr id="4" name="Content Placeholder 3"/>
           <p:cNvSpPr>
             <a:spLocks noGrp="1"/>
           </p:cNvSpPr>
@@ -1331,8 +1529,8 @@
         </p:nvSpPr>
         <p:spPr>
           <a:xfrm>
-            <a:off x="6172200" y="1825625"/>
-            <a:ext cx="5181600" cy="4351338"/>
+            <a:off x="4629150" y="2395710"/>
+            <a:ext cx="3886200" cy="5710124"/>
           </a:xfrm>
         </p:spPr>
         <p:txBody>
@@ -1372,18 +1570,13 @@
               <a:rPr lang="zh-CN" altLang="en-US"/>
               <a:t>五级</a:t>
             </a:r>
+            <a:endParaRPr lang="en-US" dirty="0"/>
           </a:p>
         </p:txBody>
       </p:sp>
       <p:sp>
         <p:nvSpPr>
-          <p:cNvPr id="5" name="日期占位符 4">
-            <a:extLst>
-              <a:ext uri="{FF2B5EF4-FFF2-40B4-BE49-F238E27FC236}">
-                <a16:creationId xmlns:a16="http://schemas.microsoft.com/office/drawing/2014/main" id="{501DB3DF-30B1-42A2-978E-69DEF116A679}"/>
-              </a:ext>
-            </a:extLst>
-          </p:cNvPr>
+          <p:cNvPr id="5" name="Date Placeholder 4"/>
           <p:cNvSpPr>
             <a:spLocks noGrp="1"/>
           </p:cNvSpPr>
@@ -1398,7 +1591,7 @@
           <a:p>
             <a:fld id="{ADCF388C-B51F-41E4-A743-B6B536218E4C}" type="datetimeFigureOut">
               <a:rPr lang="zh-CN" altLang="en-US" smtClean="0"/>
-              <a:t>2026/3/16</a:t>
+              <a:t>2026/3/19</a:t>
             </a:fld>
             <a:endParaRPr lang="zh-CN" altLang="en-US"/>
           </a:p>
@@ -1406,13 +1599,7 @@
       </p:sp>
       <p:sp>
         <p:nvSpPr>
-          <p:cNvPr id="6" name="页脚占位符 5">
-            <a:extLst>
-              <a:ext uri="{FF2B5EF4-FFF2-40B4-BE49-F238E27FC236}">
-                <a16:creationId xmlns:a16="http://schemas.microsoft.com/office/drawing/2014/main" id="{10BE4965-159F-4C4F-BC19-FF8A6EC02F7E}"/>
-              </a:ext>
-            </a:extLst>
-          </p:cNvPr>
+          <p:cNvPr id="6" name="Footer Placeholder 5"/>
           <p:cNvSpPr>
             <a:spLocks noGrp="1"/>
           </p:cNvSpPr>
@@ -1431,13 +1618,7 @@
       </p:sp>
       <p:sp>
         <p:nvSpPr>
-          <p:cNvPr id="7" name="灯片编号占位符 6">
-            <a:extLst>
-              <a:ext uri="{FF2B5EF4-FFF2-40B4-BE49-F238E27FC236}">
-                <a16:creationId xmlns:a16="http://schemas.microsoft.com/office/drawing/2014/main" id="{D19EB5DD-2485-442D-B922-857C5B79C1BF}"/>
-              </a:ext>
-            </a:extLst>
-          </p:cNvPr>
+          <p:cNvPr id="7" name="Slide Number Placeholder 6"/>
           <p:cNvSpPr>
             <a:spLocks noGrp="1"/>
           </p:cNvSpPr>
@@ -1461,7 +1642,7 @@
     </p:spTree>
     <p:extLst>
       <p:ext uri="{BB962C8B-B14F-4D97-AF65-F5344CB8AC3E}">
-        <p14:creationId xmlns:p14="http://schemas.microsoft.com/office/powerpoint/2010/main" val="1081777404"/>
+        <p14:creationId xmlns:p14="http://schemas.microsoft.com/office/powerpoint/2010/main" val="2670654739"/>
       </p:ext>
     </p:extLst>
   </p:cSld>
@@ -1490,13 +1671,7 @@
       </p:grpSpPr>
       <p:sp>
         <p:nvSpPr>
-          <p:cNvPr id="2" name="标题 1">
-            <a:extLst>
-              <a:ext uri="{FF2B5EF4-FFF2-40B4-BE49-F238E27FC236}">
-                <a16:creationId xmlns:a16="http://schemas.microsoft.com/office/drawing/2014/main" id="{479EB49A-27F2-49B2-8C24-301C86469F35}"/>
-              </a:ext>
-            </a:extLst>
-          </p:cNvPr>
+          <p:cNvPr id="2" name="Title 1"/>
           <p:cNvSpPr>
             <a:spLocks noGrp="1"/>
           </p:cNvSpPr>
@@ -1506,8 +1681,8 @@
         </p:nvSpPr>
         <p:spPr>
           <a:xfrm>
-            <a:off x="839788" y="365125"/>
-            <a:ext cx="10515600" cy="1325563"/>
+            <a:off x="629841" y="479144"/>
+            <a:ext cx="7886700" cy="1739495"/>
           </a:xfrm>
         </p:spPr>
         <p:txBody>
@@ -1518,18 +1693,13 @@
               <a:rPr lang="zh-CN" altLang="en-US"/>
               <a:t>单击此处编辑母版标题样式</a:t>
             </a:r>
+            <a:endParaRPr lang="en-US" dirty="0"/>
           </a:p>
         </p:txBody>
       </p:sp>
       <p:sp>
         <p:nvSpPr>
-          <p:cNvPr id="3" name="文本占位符 2">
-            <a:extLst>
-              <a:ext uri="{FF2B5EF4-FFF2-40B4-BE49-F238E27FC236}">
-                <a16:creationId xmlns:a16="http://schemas.microsoft.com/office/drawing/2014/main" id="{C1147291-C50C-485F-9870-CBF141DBD3D0}"/>
-              </a:ext>
-            </a:extLst>
-          </p:cNvPr>
+          <p:cNvPr id="3" name="Text Placeholder 2"/>
           <p:cNvSpPr>
             <a:spLocks noGrp="1"/>
           </p:cNvSpPr>
@@ -1539,8 +1709,8 @@
         </p:nvSpPr>
         <p:spPr>
           <a:xfrm>
-            <a:off x="839788" y="1681163"/>
-            <a:ext cx="5157787" cy="823912"/>
+            <a:off x="629842" y="2206137"/>
+            <a:ext cx="3868340" cy="1081194"/>
           </a:xfrm>
         </p:spPr>
         <p:txBody>
@@ -1594,13 +1764,7 @@
       </p:sp>
       <p:sp>
         <p:nvSpPr>
-          <p:cNvPr id="4" name="内容占位符 3">
-            <a:extLst>
-              <a:ext uri="{FF2B5EF4-FFF2-40B4-BE49-F238E27FC236}">
-                <a16:creationId xmlns:a16="http://schemas.microsoft.com/office/drawing/2014/main" id="{E41B2FCF-DB07-4E9D-BCD6-29258A76E668}"/>
-              </a:ext>
-            </a:extLst>
-          </p:cNvPr>
+          <p:cNvPr id="4" name="Content Placeholder 3"/>
           <p:cNvSpPr>
             <a:spLocks noGrp="1"/>
           </p:cNvSpPr>
@@ -1610,8 +1774,8 @@
         </p:nvSpPr>
         <p:spPr>
           <a:xfrm>
-            <a:off x="839788" y="2505075"/>
-            <a:ext cx="5157787" cy="3684588"/>
+            <a:off x="629842" y="3287331"/>
+            <a:ext cx="3868340" cy="4835169"/>
           </a:xfrm>
         </p:spPr>
         <p:txBody>
@@ -1651,18 +1815,13 @@
               <a:rPr lang="zh-CN" altLang="en-US"/>
               <a:t>五级</a:t>
             </a:r>
+            <a:endParaRPr lang="en-US" dirty="0"/>
           </a:p>
         </p:txBody>
       </p:sp>
       <p:sp>
         <p:nvSpPr>
-          <p:cNvPr id="5" name="文本占位符 4">
-            <a:extLst>
-              <a:ext uri="{FF2B5EF4-FFF2-40B4-BE49-F238E27FC236}">
-                <a16:creationId xmlns:a16="http://schemas.microsoft.com/office/drawing/2014/main" id="{4D8ADF63-4C52-4D00-8774-4DC63A06E9CB}"/>
-              </a:ext>
-            </a:extLst>
-          </p:cNvPr>
+          <p:cNvPr id="5" name="Text Placeholder 4"/>
           <p:cNvSpPr>
             <a:spLocks noGrp="1"/>
           </p:cNvSpPr>
@@ -1672,8 +1831,8 @@
         </p:nvSpPr>
         <p:spPr>
           <a:xfrm>
-            <a:off x="6172200" y="1681163"/>
-            <a:ext cx="5183188" cy="823912"/>
+            <a:off x="4629151" y="2206137"/>
+            <a:ext cx="3887391" cy="1081194"/>
           </a:xfrm>
         </p:spPr>
         <p:txBody>
@@ -1727,13 +1886,7 @@
       </p:sp>
       <p:sp>
         <p:nvSpPr>
-          <p:cNvPr id="6" name="内容占位符 5">
-            <a:extLst>
-              <a:ext uri="{FF2B5EF4-FFF2-40B4-BE49-F238E27FC236}">
-                <a16:creationId xmlns:a16="http://schemas.microsoft.com/office/drawing/2014/main" id="{A785FD62-91CA-490D-BB4C-8F843EF07A9D}"/>
-              </a:ext>
-            </a:extLst>
-          </p:cNvPr>
+          <p:cNvPr id="6" name="Content Placeholder 5"/>
           <p:cNvSpPr>
             <a:spLocks noGrp="1"/>
           </p:cNvSpPr>
@@ -1743,8 +1896,8 @@
         </p:nvSpPr>
         <p:spPr>
           <a:xfrm>
-            <a:off x="6172200" y="2505075"/>
-            <a:ext cx="5183188" cy="3684588"/>
+            <a:off x="4629151" y="3287331"/>
+            <a:ext cx="3887391" cy="4835169"/>
           </a:xfrm>
         </p:spPr>
         <p:txBody>
@@ -1784,18 +1937,13 @@
               <a:rPr lang="zh-CN" altLang="en-US"/>
               <a:t>五级</a:t>
             </a:r>
+            <a:endParaRPr lang="en-US" dirty="0"/>
           </a:p>
         </p:txBody>
       </p:sp>
       <p:sp>
         <p:nvSpPr>
-          <p:cNvPr id="7" name="日期占位符 6">
-            <a:extLst>
-              <a:ext uri="{FF2B5EF4-FFF2-40B4-BE49-F238E27FC236}">
-                <a16:creationId xmlns:a16="http://schemas.microsoft.com/office/drawing/2014/main" id="{88858CAD-24DD-458F-9AE1-631A1F060AA2}"/>
-              </a:ext>
-            </a:extLst>
-          </p:cNvPr>
+          <p:cNvPr id="7" name="Date Placeholder 6"/>
           <p:cNvSpPr>
             <a:spLocks noGrp="1"/>
           </p:cNvSpPr>
@@ -1810,7 +1958,7 @@
           <a:p>
             <a:fld id="{ADCF388C-B51F-41E4-A743-B6B536218E4C}" type="datetimeFigureOut">
               <a:rPr lang="zh-CN" altLang="en-US" smtClean="0"/>
-              <a:t>2026/3/16</a:t>
+              <a:t>2026/3/19</a:t>
             </a:fld>
             <a:endParaRPr lang="zh-CN" altLang="en-US"/>
           </a:p>
@@ -1818,13 +1966,7 @@
       </p:sp>
       <p:sp>
         <p:nvSpPr>
-          <p:cNvPr id="8" name="页脚占位符 7">
-            <a:extLst>
-              <a:ext uri="{FF2B5EF4-FFF2-40B4-BE49-F238E27FC236}">
-                <a16:creationId xmlns:a16="http://schemas.microsoft.com/office/drawing/2014/main" id="{78CD4BE6-56E0-4D5D-AA1D-30F3CA237786}"/>
-              </a:ext>
-            </a:extLst>
-          </p:cNvPr>
+          <p:cNvPr id="8" name="Footer Placeholder 7"/>
           <p:cNvSpPr>
             <a:spLocks noGrp="1"/>
           </p:cNvSpPr>
@@ -1843,13 +1985,7 @@
       </p:sp>
       <p:sp>
         <p:nvSpPr>
-          <p:cNvPr id="9" name="灯片编号占位符 8">
-            <a:extLst>
-              <a:ext uri="{FF2B5EF4-FFF2-40B4-BE49-F238E27FC236}">
-                <a16:creationId xmlns:a16="http://schemas.microsoft.com/office/drawing/2014/main" id="{861C0180-F664-42FD-BD6E-522717ED15CE}"/>
-              </a:ext>
-            </a:extLst>
-          </p:cNvPr>
+          <p:cNvPr id="9" name="Slide Number Placeholder 8"/>
           <p:cNvSpPr>
             <a:spLocks noGrp="1"/>
           </p:cNvSpPr>
@@ -1873,7 +2009,7 @@
     </p:spTree>
     <p:extLst>
       <p:ext uri="{BB962C8B-B14F-4D97-AF65-F5344CB8AC3E}">
-        <p14:creationId xmlns:p14="http://schemas.microsoft.com/office/powerpoint/2010/main" val="2673587143"/>
+        <p14:creationId xmlns:p14="http://schemas.microsoft.com/office/powerpoint/2010/main" val="687807541"/>
       </p:ext>
     </p:extLst>
   </p:cSld>
@@ -1902,13 +2038,7 @@
       </p:grpSpPr>
       <p:sp>
         <p:nvSpPr>
-          <p:cNvPr id="2" name="标题 1">
-            <a:extLst>
-              <a:ext uri="{FF2B5EF4-FFF2-40B4-BE49-F238E27FC236}">
-                <a16:creationId xmlns:a16="http://schemas.microsoft.com/office/drawing/2014/main" id="{69799D16-B932-4CCB-A151-A078ED57F258}"/>
-              </a:ext>
-            </a:extLst>
-          </p:cNvPr>
+          <p:cNvPr id="2" name="Title 1"/>
           <p:cNvSpPr>
             <a:spLocks noGrp="1"/>
           </p:cNvSpPr>
@@ -1925,18 +2055,13 @@
               <a:rPr lang="zh-CN" altLang="en-US"/>
               <a:t>单击此处编辑母版标题样式</a:t>
             </a:r>
+            <a:endParaRPr lang="en-US" dirty="0"/>
           </a:p>
         </p:txBody>
       </p:sp>
       <p:sp>
         <p:nvSpPr>
-          <p:cNvPr id="3" name="日期占位符 2">
-            <a:extLst>
-              <a:ext uri="{FF2B5EF4-FFF2-40B4-BE49-F238E27FC236}">
-                <a16:creationId xmlns:a16="http://schemas.microsoft.com/office/drawing/2014/main" id="{3A890CE9-F507-4F88-BEE6-3C9A9818DF77}"/>
-              </a:ext>
-            </a:extLst>
-          </p:cNvPr>
+          <p:cNvPr id="3" name="Date Placeholder 2"/>
           <p:cNvSpPr>
             <a:spLocks noGrp="1"/>
           </p:cNvSpPr>
@@ -1951,7 +2076,7 @@
           <a:p>
             <a:fld id="{ADCF388C-B51F-41E4-A743-B6B536218E4C}" type="datetimeFigureOut">
               <a:rPr lang="zh-CN" altLang="en-US" smtClean="0"/>
-              <a:t>2026/3/16</a:t>
+              <a:t>2026/3/19</a:t>
             </a:fld>
             <a:endParaRPr lang="zh-CN" altLang="en-US"/>
           </a:p>
@@ -1959,13 +2084,7 @@
       </p:sp>
       <p:sp>
         <p:nvSpPr>
-          <p:cNvPr id="4" name="页脚占位符 3">
-            <a:extLst>
-              <a:ext uri="{FF2B5EF4-FFF2-40B4-BE49-F238E27FC236}">
-                <a16:creationId xmlns:a16="http://schemas.microsoft.com/office/drawing/2014/main" id="{3BC98423-60F5-4F0B-971D-3F3C3ED0934E}"/>
-              </a:ext>
-            </a:extLst>
-          </p:cNvPr>
+          <p:cNvPr id="4" name="Footer Placeholder 3"/>
           <p:cNvSpPr>
             <a:spLocks noGrp="1"/>
           </p:cNvSpPr>
@@ -1984,13 +2103,7 @@
       </p:sp>
       <p:sp>
         <p:nvSpPr>
-          <p:cNvPr id="5" name="灯片编号占位符 4">
-            <a:extLst>
-              <a:ext uri="{FF2B5EF4-FFF2-40B4-BE49-F238E27FC236}">
-                <a16:creationId xmlns:a16="http://schemas.microsoft.com/office/drawing/2014/main" id="{90B26AAC-C788-4645-8FE7-D54E5F7EA099}"/>
-              </a:ext>
-            </a:extLst>
-          </p:cNvPr>
+          <p:cNvPr id="5" name="Slide Number Placeholder 4"/>
           <p:cNvSpPr>
             <a:spLocks noGrp="1"/>
           </p:cNvSpPr>
@@ -2014,7 +2127,7 @@
     </p:spTree>
     <p:extLst>
       <p:ext uri="{BB962C8B-B14F-4D97-AF65-F5344CB8AC3E}">
-        <p14:creationId xmlns:p14="http://schemas.microsoft.com/office/powerpoint/2010/main" val="3031428694"/>
+        <p14:creationId xmlns:p14="http://schemas.microsoft.com/office/powerpoint/2010/main" val="50814580"/>
       </p:ext>
     </p:extLst>
   </p:cSld>
@@ -2043,13 +2156,7 @@
       </p:grpSpPr>
       <p:sp>
         <p:nvSpPr>
-          <p:cNvPr id="2" name="日期占位符 1">
-            <a:extLst>
-              <a:ext uri="{FF2B5EF4-FFF2-40B4-BE49-F238E27FC236}">
-                <a16:creationId xmlns:a16="http://schemas.microsoft.com/office/drawing/2014/main" id="{C46759CA-EE96-4DD1-9139-6B4D4F65D81A}"/>
-              </a:ext>
-            </a:extLst>
-          </p:cNvPr>
+          <p:cNvPr id="2" name="Date Placeholder 1"/>
           <p:cNvSpPr>
             <a:spLocks noGrp="1"/>
           </p:cNvSpPr>
@@ -2064,7 +2171,7 @@
           <a:p>
             <a:fld id="{ADCF388C-B51F-41E4-A743-B6B536218E4C}" type="datetimeFigureOut">
               <a:rPr lang="zh-CN" altLang="en-US" smtClean="0"/>
-              <a:t>2026/3/16</a:t>
+              <a:t>2026/3/19</a:t>
             </a:fld>
             <a:endParaRPr lang="zh-CN" altLang="en-US"/>
           </a:p>
@@ -2072,13 +2179,7 @@
       </p:sp>
       <p:sp>
         <p:nvSpPr>
-          <p:cNvPr id="3" name="页脚占位符 2">
-            <a:extLst>
-              <a:ext uri="{FF2B5EF4-FFF2-40B4-BE49-F238E27FC236}">
-                <a16:creationId xmlns:a16="http://schemas.microsoft.com/office/drawing/2014/main" id="{8599A5FC-D584-439D-82DF-AAE0D99CBDBE}"/>
-              </a:ext>
-            </a:extLst>
-          </p:cNvPr>
+          <p:cNvPr id="3" name="Footer Placeholder 2"/>
           <p:cNvSpPr>
             <a:spLocks noGrp="1"/>
           </p:cNvSpPr>
@@ -2097,13 +2198,7 @@
       </p:sp>
       <p:sp>
         <p:nvSpPr>
-          <p:cNvPr id="4" name="灯片编号占位符 3">
-            <a:extLst>
-              <a:ext uri="{FF2B5EF4-FFF2-40B4-BE49-F238E27FC236}">
-                <a16:creationId xmlns:a16="http://schemas.microsoft.com/office/drawing/2014/main" id="{BC347EB2-B72C-4CEB-85BB-38DAE18E4375}"/>
-              </a:ext>
-            </a:extLst>
-          </p:cNvPr>
+          <p:cNvPr id="4" name="Slide Number Placeholder 3"/>
           <p:cNvSpPr>
             <a:spLocks noGrp="1"/>
           </p:cNvSpPr>
@@ -2127,7 +2222,7 @@
     </p:spTree>
     <p:extLst>
       <p:ext uri="{BB962C8B-B14F-4D97-AF65-F5344CB8AC3E}">
-        <p14:creationId xmlns:p14="http://schemas.microsoft.com/office/powerpoint/2010/main" val="1449372231"/>
+        <p14:creationId xmlns:p14="http://schemas.microsoft.com/office/powerpoint/2010/main" val="2830005033"/>
       </p:ext>
     </p:extLst>
   </p:cSld>
@@ -2156,13 +2251,7 @@
       </p:grpSpPr>
       <p:sp>
         <p:nvSpPr>
-          <p:cNvPr id="2" name="标题 1">
-            <a:extLst>
-              <a:ext uri="{FF2B5EF4-FFF2-40B4-BE49-F238E27FC236}">
-                <a16:creationId xmlns:a16="http://schemas.microsoft.com/office/drawing/2014/main" id="{B9BBD1CC-EF6B-424A-995D-EB3A4A99286D}"/>
-              </a:ext>
-            </a:extLst>
-          </p:cNvPr>
+          <p:cNvPr id="2" name="Title 1"/>
           <p:cNvSpPr>
             <a:spLocks noGrp="1"/>
           </p:cNvSpPr>
@@ -2172,8 +2261,8 @@
         </p:nvSpPr>
         <p:spPr>
           <a:xfrm>
-            <a:off x="839788" y="457200"/>
-            <a:ext cx="3932237" cy="1600200"/>
+            <a:off x="629841" y="599969"/>
+            <a:ext cx="2949178" cy="2099892"/>
           </a:xfrm>
         </p:spPr>
         <p:txBody>
@@ -2188,18 +2277,13 @@
               <a:rPr lang="zh-CN" altLang="en-US"/>
               <a:t>单击此处编辑母版标题样式</a:t>
             </a:r>
+            <a:endParaRPr lang="en-US" dirty="0"/>
           </a:p>
         </p:txBody>
       </p:sp>
       <p:sp>
         <p:nvSpPr>
-          <p:cNvPr id="3" name="内容占位符 2">
-            <a:extLst>
-              <a:ext uri="{FF2B5EF4-FFF2-40B4-BE49-F238E27FC236}">
-                <a16:creationId xmlns:a16="http://schemas.microsoft.com/office/drawing/2014/main" id="{EDFABCAB-8939-4CBE-B3E9-F7DB5CA0E204}"/>
-              </a:ext>
-            </a:extLst>
-          </p:cNvPr>
+          <p:cNvPr id="3" name="Content Placeholder 2"/>
           <p:cNvSpPr>
             <a:spLocks noGrp="1"/>
           </p:cNvSpPr>
@@ -2209,8 +2293,8 @@
         </p:nvSpPr>
         <p:spPr>
           <a:xfrm>
-            <a:off x="5183188" y="987425"/>
-            <a:ext cx="6172200" cy="4873625"/>
+            <a:off x="3887391" y="1295769"/>
+            <a:ext cx="4629150" cy="6395505"/>
           </a:xfrm>
         </p:spPr>
         <p:txBody>
@@ -2278,18 +2362,13 @@
               <a:rPr lang="zh-CN" altLang="en-US"/>
               <a:t>五级</a:t>
             </a:r>
+            <a:endParaRPr lang="en-US" dirty="0"/>
           </a:p>
         </p:txBody>
       </p:sp>
       <p:sp>
         <p:nvSpPr>
-          <p:cNvPr id="4" name="文本占位符 3">
-            <a:extLst>
-              <a:ext uri="{FF2B5EF4-FFF2-40B4-BE49-F238E27FC236}">
-                <a16:creationId xmlns:a16="http://schemas.microsoft.com/office/drawing/2014/main" id="{27C56C69-435E-4686-BC31-611AC16FA059}"/>
-              </a:ext>
-            </a:extLst>
-          </p:cNvPr>
+          <p:cNvPr id="4" name="Text Placeholder 3"/>
           <p:cNvSpPr>
             <a:spLocks noGrp="1"/>
           </p:cNvSpPr>
@@ -2299,8 +2378,8 @@
         </p:nvSpPr>
         <p:spPr>
           <a:xfrm>
-            <a:off x="839788" y="2057400"/>
-            <a:ext cx="3932237" cy="3811588"/>
+            <a:off x="629841" y="2699862"/>
+            <a:ext cx="2949178" cy="5001827"/>
           </a:xfrm>
         </p:spPr>
         <p:txBody>
@@ -2354,13 +2433,7 @@
       </p:sp>
       <p:sp>
         <p:nvSpPr>
-          <p:cNvPr id="5" name="日期占位符 4">
-            <a:extLst>
-              <a:ext uri="{FF2B5EF4-FFF2-40B4-BE49-F238E27FC236}">
-                <a16:creationId xmlns:a16="http://schemas.microsoft.com/office/drawing/2014/main" id="{BFE154EE-C7DC-4C7A-AD78-F07703ACA1BF}"/>
-              </a:ext>
-            </a:extLst>
-          </p:cNvPr>
+          <p:cNvPr id="5" name="Date Placeholder 4"/>
           <p:cNvSpPr>
             <a:spLocks noGrp="1"/>
           </p:cNvSpPr>
@@ -2375,7 +2448,7 @@
           <a:p>
             <a:fld id="{ADCF388C-B51F-41E4-A743-B6B536218E4C}" type="datetimeFigureOut">
               <a:rPr lang="zh-CN" altLang="en-US" smtClean="0"/>
-              <a:t>2026/3/16</a:t>
+              <a:t>2026/3/19</a:t>
             </a:fld>
             <a:endParaRPr lang="zh-CN" altLang="en-US"/>
           </a:p>
@@ -2383,13 +2456,7 @@
       </p:sp>
       <p:sp>
         <p:nvSpPr>
-          <p:cNvPr id="6" name="页脚占位符 5">
-            <a:extLst>
-              <a:ext uri="{FF2B5EF4-FFF2-40B4-BE49-F238E27FC236}">
-                <a16:creationId xmlns:a16="http://schemas.microsoft.com/office/drawing/2014/main" id="{B8A7672B-3501-4736-B720-EA6DC60555FD}"/>
-              </a:ext>
-            </a:extLst>
-          </p:cNvPr>
+          <p:cNvPr id="6" name="Footer Placeholder 5"/>
           <p:cNvSpPr>
             <a:spLocks noGrp="1"/>
           </p:cNvSpPr>
@@ -2408,13 +2475,7 @@
       </p:sp>
       <p:sp>
         <p:nvSpPr>
-          <p:cNvPr id="7" name="灯片编号占位符 6">
-            <a:extLst>
-              <a:ext uri="{FF2B5EF4-FFF2-40B4-BE49-F238E27FC236}">
-                <a16:creationId xmlns:a16="http://schemas.microsoft.com/office/drawing/2014/main" id="{B4F43A7D-450A-4C12-B48D-4B4B8384DED6}"/>
-              </a:ext>
-            </a:extLst>
-          </p:cNvPr>
+          <p:cNvPr id="7" name="Slide Number Placeholder 6"/>
           <p:cNvSpPr>
             <a:spLocks noGrp="1"/>
           </p:cNvSpPr>
@@ -2438,7 +2499,7 @@
     </p:spTree>
     <p:extLst>
       <p:ext uri="{BB962C8B-B14F-4D97-AF65-F5344CB8AC3E}">
-        <p14:creationId xmlns:p14="http://schemas.microsoft.com/office/powerpoint/2010/main" val="4007793434"/>
+        <p14:creationId xmlns:p14="http://schemas.microsoft.com/office/powerpoint/2010/main" val="1900785146"/>
       </p:ext>
     </p:extLst>
   </p:cSld>
@@ -2467,13 +2528,7 @@
       </p:grpSpPr>
       <p:sp>
         <p:nvSpPr>
-          <p:cNvPr id="2" name="标题 1">
-            <a:extLst>
-              <a:ext uri="{FF2B5EF4-FFF2-40B4-BE49-F238E27FC236}">
-                <a16:creationId xmlns:a16="http://schemas.microsoft.com/office/drawing/2014/main" id="{2612402F-3547-4FE4-8777-88A71A43C78A}"/>
-              </a:ext>
-            </a:extLst>
-          </p:cNvPr>
+          <p:cNvPr id="2" name="Title 1"/>
           <p:cNvSpPr>
             <a:spLocks noGrp="1"/>
           </p:cNvSpPr>
@@ -2483,8 +2538,8 @@
         </p:nvSpPr>
         <p:spPr>
           <a:xfrm>
-            <a:off x="839788" y="457200"/>
-            <a:ext cx="3932237" cy="1600200"/>
+            <a:off x="629841" y="599969"/>
+            <a:ext cx="2949178" cy="2099892"/>
           </a:xfrm>
         </p:spPr>
         <p:txBody>
@@ -2499,20 +2554,15 @@
               <a:rPr lang="zh-CN" altLang="en-US"/>
               <a:t>单击此处编辑母版标题样式</a:t>
             </a:r>
+            <a:endParaRPr lang="en-US" dirty="0"/>
           </a:p>
         </p:txBody>
       </p:sp>
       <p:sp>
         <p:nvSpPr>
-          <p:cNvPr id="3" name="图片占位符 2">
-            <a:extLst>
-              <a:ext uri="{FF2B5EF4-FFF2-40B4-BE49-F238E27FC236}">
-                <a16:creationId xmlns:a16="http://schemas.microsoft.com/office/drawing/2014/main" id="{33ED19A3-B303-4B50-BDC4-B7BD4A306EDE}"/>
-              </a:ext>
-            </a:extLst>
-          </p:cNvPr>
+          <p:cNvPr id="3" name="Picture Placeholder 2"/>
           <p:cNvSpPr>
-            <a:spLocks noGrp="1"/>
+            <a:spLocks noGrp="1" noChangeAspect="1"/>
           </p:cNvSpPr>
           <p:nvPr>
             <p:ph type="pic" idx="1"/>
@@ -2520,12 +2570,12 @@
         </p:nvSpPr>
         <p:spPr>
           <a:xfrm>
-            <a:off x="5183188" y="987425"/>
-            <a:ext cx="6172200" cy="4873625"/>
+            <a:off x="3887391" y="1295769"/>
+            <a:ext cx="4629150" cy="6395505"/>
           </a:xfrm>
         </p:spPr>
         <p:txBody>
-          <a:bodyPr/>
+          <a:bodyPr anchor="t"/>
           <a:lstStyle>
             <a:lvl1pPr marL="0" indent="0">
               <a:buNone/>
@@ -2565,19 +2615,17 @@
             </a:lvl9pPr>
           </a:lstStyle>
           <a:p>
-            <a:endParaRPr lang="zh-CN" altLang="en-US"/>
+            <a:r>
+              <a:rPr lang="zh-CN" altLang="en-US"/>
+              <a:t>单击图标添加图片</a:t>
+            </a:r>
+            <a:endParaRPr lang="en-US" dirty="0"/>
           </a:p>
         </p:txBody>
       </p:sp>
       <p:sp>
         <p:nvSpPr>
-          <p:cNvPr id="4" name="文本占位符 3">
-            <a:extLst>
-              <a:ext uri="{FF2B5EF4-FFF2-40B4-BE49-F238E27FC236}">
-                <a16:creationId xmlns:a16="http://schemas.microsoft.com/office/drawing/2014/main" id="{BD1A63AA-5F84-4985-9A30-D4477E88F446}"/>
-              </a:ext>
-            </a:extLst>
-          </p:cNvPr>
+          <p:cNvPr id="4" name="Text Placeholder 3"/>
           <p:cNvSpPr>
             <a:spLocks noGrp="1"/>
           </p:cNvSpPr>
@@ -2587,8 +2635,8 @@
         </p:nvSpPr>
         <p:spPr>
           <a:xfrm>
-            <a:off x="839788" y="2057400"/>
-            <a:ext cx="3932237" cy="3811588"/>
+            <a:off x="629841" y="2699862"/>
+            <a:ext cx="2949178" cy="5001827"/>
           </a:xfrm>
         </p:spPr>
         <p:txBody>
@@ -2642,13 +2690,7 @@
       </p:sp>
       <p:sp>
         <p:nvSpPr>
-          <p:cNvPr id="5" name="日期占位符 4">
-            <a:extLst>
-              <a:ext uri="{FF2B5EF4-FFF2-40B4-BE49-F238E27FC236}">
-                <a16:creationId xmlns:a16="http://schemas.microsoft.com/office/drawing/2014/main" id="{BD1DFF9F-A177-4F5E-8A4A-E9CDBDA7CF88}"/>
-              </a:ext>
-            </a:extLst>
-          </p:cNvPr>
+          <p:cNvPr id="5" name="Date Placeholder 4"/>
           <p:cNvSpPr>
             <a:spLocks noGrp="1"/>
           </p:cNvSpPr>
@@ -2663,7 +2705,7 @@
           <a:p>
             <a:fld id="{ADCF388C-B51F-41E4-A743-B6B536218E4C}" type="datetimeFigureOut">
               <a:rPr lang="zh-CN" altLang="en-US" smtClean="0"/>
-              <a:t>2026/3/16</a:t>
+              <a:t>2026/3/19</a:t>
             </a:fld>
             <a:endParaRPr lang="zh-CN" altLang="en-US"/>
           </a:p>
@@ -2671,13 +2713,7 @@
       </p:sp>
       <p:sp>
         <p:nvSpPr>
-          <p:cNvPr id="6" name="页脚占位符 5">
-            <a:extLst>
-              <a:ext uri="{FF2B5EF4-FFF2-40B4-BE49-F238E27FC236}">
-                <a16:creationId xmlns:a16="http://schemas.microsoft.com/office/drawing/2014/main" id="{A0973869-5FF2-4F6B-B728-AA943EAC881A}"/>
-              </a:ext>
-            </a:extLst>
-          </p:cNvPr>
+          <p:cNvPr id="6" name="Footer Placeholder 5"/>
           <p:cNvSpPr>
             <a:spLocks noGrp="1"/>
           </p:cNvSpPr>
@@ -2696,13 +2732,7 @@
       </p:sp>
       <p:sp>
         <p:nvSpPr>
-          <p:cNvPr id="7" name="灯片编号占位符 6">
-            <a:extLst>
-              <a:ext uri="{FF2B5EF4-FFF2-40B4-BE49-F238E27FC236}">
-                <a16:creationId xmlns:a16="http://schemas.microsoft.com/office/drawing/2014/main" id="{0FB0EF26-81E9-4F47-8E19-E8112F90E383}"/>
-              </a:ext>
-            </a:extLst>
-          </p:cNvPr>
+          <p:cNvPr id="7" name="Slide Number Placeholder 6"/>
           <p:cNvSpPr>
             <a:spLocks noGrp="1"/>
           </p:cNvSpPr>
@@ -2726,7 +2756,7 @@
     </p:spTree>
     <p:extLst>
       <p:ext uri="{BB962C8B-B14F-4D97-AF65-F5344CB8AC3E}">
-        <p14:creationId xmlns:p14="http://schemas.microsoft.com/office/powerpoint/2010/main" val="1641758723"/>
+        <p14:creationId xmlns:p14="http://schemas.microsoft.com/office/powerpoint/2010/main" val="119423058"/>
       </p:ext>
     </p:extLst>
   </p:cSld>
@@ -2760,13 +2790,7 @@
       </p:grpSpPr>
       <p:sp>
         <p:nvSpPr>
-          <p:cNvPr id="2" name="标题占位符 1">
-            <a:extLst>
-              <a:ext uri="{FF2B5EF4-FFF2-40B4-BE49-F238E27FC236}">
-                <a16:creationId xmlns:a16="http://schemas.microsoft.com/office/drawing/2014/main" id="{4BC70FAE-844A-4032-B386-62B81AA1A68B}"/>
-              </a:ext>
-            </a:extLst>
-          </p:cNvPr>
+          <p:cNvPr id="2" name="Title Placeholder 1"/>
           <p:cNvSpPr>
             <a:spLocks noGrp="1"/>
           </p:cNvSpPr>
@@ -2776,8 +2800,8 @@
         </p:nvSpPr>
         <p:spPr>
           <a:xfrm>
-            <a:off x="838200" y="365125"/>
-            <a:ext cx="10515600" cy="1325563"/>
+            <a:off x="628650" y="479144"/>
+            <a:ext cx="7886700" cy="1739495"/>
           </a:xfrm>
           <a:prstGeom prst="rect">
             <a:avLst/>
@@ -2793,18 +2817,13 @@
               <a:rPr lang="zh-CN" altLang="en-US"/>
               <a:t>单击此处编辑母版标题样式</a:t>
             </a:r>
+            <a:endParaRPr lang="en-US" dirty="0"/>
           </a:p>
         </p:txBody>
       </p:sp>
       <p:sp>
         <p:nvSpPr>
-          <p:cNvPr id="3" name="文本占位符 2">
-            <a:extLst>
-              <a:ext uri="{FF2B5EF4-FFF2-40B4-BE49-F238E27FC236}">
-                <a16:creationId xmlns:a16="http://schemas.microsoft.com/office/drawing/2014/main" id="{7D6223E2-36D6-4161-966E-799B3BF9FE31}"/>
-              </a:ext>
-            </a:extLst>
-          </p:cNvPr>
+          <p:cNvPr id="3" name="Text Placeholder 2"/>
           <p:cNvSpPr>
             <a:spLocks noGrp="1"/>
           </p:cNvSpPr>
@@ -2814,8 +2833,8 @@
         </p:nvSpPr>
         <p:spPr>
           <a:xfrm>
-            <a:off x="838200" y="1825625"/>
-            <a:ext cx="10515600" cy="4351338"/>
+            <a:off x="628650" y="2395710"/>
+            <a:ext cx="7886700" cy="5710124"/>
           </a:xfrm>
           <a:prstGeom prst="rect">
             <a:avLst/>
@@ -2860,18 +2879,13 @@
               <a:rPr lang="zh-CN" altLang="en-US"/>
               <a:t>五级</a:t>
             </a:r>
+            <a:endParaRPr lang="en-US" dirty="0"/>
           </a:p>
         </p:txBody>
       </p:sp>
       <p:sp>
         <p:nvSpPr>
-          <p:cNvPr id="4" name="日期占位符 3">
-            <a:extLst>
-              <a:ext uri="{FF2B5EF4-FFF2-40B4-BE49-F238E27FC236}">
-                <a16:creationId xmlns:a16="http://schemas.microsoft.com/office/drawing/2014/main" id="{900AD783-020C-4857-986C-B2F284A6B716}"/>
-              </a:ext>
-            </a:extLst>
-          </p:cNvPr>
+          <p:cNvPr id="4" name="Date Placeholder 3"/>
           <p:cNvSpPr>
             <a:spLocks noGrp="1"/>
           </p:cNvSpPr>
@@ -2881,8 +2895,8 @@
         </p:nvSpPr>
         <p:spPr>
           <a:xfrm>
-            <a:off x="838200" y="6356350"/>
-            <a:ext cx="2743200" cy="365125"/>
+            <a:off x="628650" y="8341240"/>
+            <a:ext cx="2057400" cy="479142"/>
           </a:xfrm>
           <a:prstGeom prst="rect">
             <a:avLst/>
@@ -2904,7 +2918,7 @@
           <a:p>
             <a:fld id="{ADCF388C-B51F-41E4-A743-B6B536218E4C}" type="datetimeFigureOut">
               <a:rPr lang="zh-CN" altLang="en-US" smtClean="0"/>
-              <a:t>2026/3/16</a:t>
+              <a:t>2026/3/19</a:t>
             </a:fld>
             <a:endParaRPr lang="zh-CN" altLang="en-US"/>
           </a:p>
@@ -2912,13 +2926,7 @@
       </p:sp>
       <p:sp>
         <p:nvSpPr>
-          <p:cNvPr id="5" name="页脚占位符 4">
-            <a:extLst>
-              <a:ext uri="{FF2B5EF4-FFF2-40B4-BE49-F238E27FC236}">
-                <a16:creationId xmlns:a16="http://schemas.microsoft.com/office/drawing/2014/main" id="{A0BAA60E-3ED9-4E05-B94B-D428BDC40DB3}"/>
-              </a:ext>
-            </a:extLst>
-          </p:cNvPr>
+          <p:cNvPr id="5" name="Footer Placeholder 4"/>
           <p:cNvSpPr>
             <a:spLocks noGrp="1"/>
           </p:cNvSpPr>
@@ -2928,8 +2936,8 @@
         </p:nvSpPr>
         <p:spPr>
           <a:xfrm>
-            <a:off x="4038600" y="6356350"/>
-            <a:ext cx="4114800" cy="365125"/>
+            <a:off x="3028950" y="8341240"/>
+            <a:ext cx="3086100" cy="479142"/>
           </a:xfrm>
           <a:prstGeom prst="rect">
             <a:avLst/>
@@ -2955,13 +2963,7 @@
       </p:sp>
       <p:sp>
         <p:nvSpPr>
-          <p:cNvPr id="6" name="灯片编号占位符 5">
-            <a:extLst>
-              <a:ext uri="{FF2B5EF4-FFF2-40B4-BE49-F238E27FC236}">
-                <a16:creationId xmlns:a16="http://schemas.microsoft.com/office/drawing/2014/main" id="{33A14238-F7A4-4F61-A431-CB9BDAC564F9}"/>
-              </a:ext>
-            </a:extLst>
-          </p:cNvPr>
+          <p:cNvPr id="6" name="Slide Number Placeholder 5"/>
           <p:cNvSpPr>
             <a:spLocks noGrp="1"/>
           </p:cNvSpPr>
@@ -2971,8 +2973,8 @@
         </p:nvSpPr>
         <p:spPr>
           <a:xfrm>
-            <a:off x="8610600" y="6356350"/>
-            <a:ext cx="2743200" cy="365125"/>
+            <a:off x="6457950" y="8341240"/>
+            <a:ext cx="2057400" cy="479142"/>
           </a:xfrm>
           <a:prstGeom prst="rect">
             <a:avLst/>
@@ -3003,23 +3005,23 @@
     </p:spTree>
     <p:extLst>
       <p:ext uri="{BB962C8B-B14F-4D97-AF65-F5344CB8AC3E}">
-        <p14:creationId xmlns:p14="http://schemas.microsoft.com/office/powerpoint/2010/main" val="437474540"/>
+        <p14:creationId xmlns:p14="http://schemas.microsoft.com/office/powerpoint/2010/main" val="3747556625"/>
       </p:ext>
     </p:extLst>
   </p:cSld>
   <p:clrMap bg1="lt1" tx1="dk1" bg2="lt2" tx2="dk2" accent1="accent1" accent2="accent2" accent3="accent3" accent4="accent4" accent5="accent5" accent6="accent6" hlink="hlink" folHlink="folHlink"/>
   <p:sldLayoutIdLst>
-    <p:sldLayoutId id="2147483649" r:id="rId1"/>
-    <p:sldLayoutId id="2147483650" r:id="rId2"/>
-    <p:sldLayoutId id="2147483651" r:id="rId3"/>
-    <p:sldLayoutId id="2147483652" r:id="rId4"/>
-    <p:sldLayoutId id="2147483653" r:id="rId5"/>
-    <p:sldLayoutId id="2147483654" r:id="rId6"/>
-    <p:sldLayoutId id="2147483655" r:id="rId7"/>
-    <p:sldLayoutId id="2147483656" r:id="rId8"/>
-    <p:sldLayoutId id="2147483657" r:id="rId9"/>
-    <p:sldLayoutId id="2147483658" r:id="rId10"/>
-    <p:sldLayoutId id="2147483659" r:id="rId11"/>
+    <p:sldLayoutId id="2147483721" r:id="rId1"/>
+    <p:sldLayoutId id="2147483722" r:id="rId2"/>
+    <p:sldLayoutId id="2147483723" r:id="rId3"/>
+    <p:sldLayoutId id="2147483724" r:id="rId4"/>
+    <p:sldLayoutId id="2147483725" r:id="rId5"/>
+    <p:sldLayoutId id="2147483726" r:id="rId6"/>
+    <p:sldLayoutId id="2147483727" r:id="rId7"/>
+    <p:sldLayoutId id="2147483728" r:id="rId8"/>
+    <p:sldLayoutId id="2147483729" r:id="rId9"/>
+    <p:sldLayoutId id="2147483730" r:id="rId10"/>
+    <p:sldLayoutId id="2147483731" r:id="rId11"/>
   </p:sldLayoutIdLst>
   <p:txStyles>
     <p:titleStyle>
@@ -3207,7 +3209,7 @@
     </p:bodyStyle>
     <p:otherStyle>
       <a:defPPr>
-        <a:defRPr lang="zh-CN"/>
+        <a:defRPr lang="en-US"/>
       </a:defPPr>
       <a:lvl1pPr marL="0" algn="l" defTabSz="914400" rtl="0" eaLnBrk="1" latinLnBrk="0" hangingPunct="1">
         <a:defRPr sz="1800" kern="1200">
@@ -3321,259 +3323,4699 @@
           <a:chExt cx="0" cy="0"/>
         </a:xfrm>
       </p:grpSpPr>
-      <p:pic>
-        <p:nvPicPr>
-          <p:cNvPr id="3" name="图片 2">
+      <p:grpSp>
+        <p:nvGrpSpPr>
+          <p:cNvPr id="237" name="组合 236">
             <a:extLst>
               <a:ext uri="{FF2B5EF4-FFF2-40B4-BE49-F238E27FC236}">
-                <a16:creationId xmlns:a16="http://schemas.microsoft.com/office/drawing/2014/main" id="{1AA7F8D7-1165-450B-B23D-46013D710BEB}"/>
+                <a16:creationId xmlns:a16="http://schemas.microsoft.com/office/drawing/2014/main" id="{3B7AD538-5BF5-4648-9098-0842273C5781}"/>
               </a:ext>
             </a:extLst>
           </p:cNvPr>
-          <p:cNvPicPr>
-            <a:picLocks noChangeAspect="1"/>
-          </p:cNvPicPr>
+          <p:cNvGrpSpPr/>
           <p:nvPr/>
-        </p:nvPicPr>
-        <p:blipFill>
-          <a:blip r:embed="rId2">
-            <a:extLst>
-              <a:ext uri="{28A0092B-C50C-407E-A947-70E740481C1C}">
-                <a14:useLocalDpi xmlns:a14="http://schemas.microsoft.com/office/drawing/2010/main" val="0"/>
-              </a:ext>
-            </a:extLst>
-          </a:blip>
-          <a:stretch>
-            <a:fillRect/>
-          </a:stretch>
-        </p:blipFill>
-        <p:spPr>
+        </p:nvGrpSpPr>
+        <p:grpSpPr>
           <a:xfrm>
-            <a:off x="-760413" y="856456"/>
-            <a:ext cx="5000625" cy="5362575"/>
+            <a:off x="243063" y="156292"/>
+            <a:ext cx="8663741" cy="8527528"/>
+            <a:chOff x="-1328464" y="114590"/>
+            <a:chExt cx="9010657" cy="8868990"/>
           </a:xfrm>
-          <a:prstGeom prst="rect">
-            <a:avLst/>
-          </a:prstGeom>
-        </p:spPr>
-      </p:pic>
-      <p:sp>
-        <p:nvSpPr>
-          <p:cNvPr id="4" name="矩形: 圆角 3">
-            <a:extLst>
-              <a:ext uri="{FF2B5EF4-FFF2-40B4-BE49-F238E27FC236}">
-                <a16:creationId xmlns:a16="http://schemas.microsoft.com/office/drawing/2014/main" id="{08089F2E-D711-4F76-A553-A10FDDECF9A3}"/>
-              </a:ext>
-            </a:extLst>
-          </p:cNvPr>
-          <p:cNvSpPr/>
-          <p:nvPr/>
-        </p:nvSpPr>
-        <p:spPr>
-          <a:xfrm>
-            <a:off x="4927600" y="404813"/>
-            <a:ext cx="6578600" cy="903287"/>
-          </a:xfrm>
-          <a:prstGeom prst="roundRect">
-            <a:avLst>
-              <a:gd name="adj" fmla="val 12449"/>
-            </a:avLst>
-          </a:prstGeom>
-          <a:solidFill>
-            <a:srgbClr val="D4EAD5"/>
-          </a:solidFill>
-          <a:ln>
-            <a:solidFill>
-              <a:schemeClr val="accent6">
-                <a:lumMod val="75000"/>
+        </p:grpSpPr>
+        <p:sp>
+          <p:nvSpPr>
+            <p:cNvPr id="4" name="矩形: 圆角 3">
+              <a:extLst>
+                <a:ext uri="{FF2B5EF4-FFF2-40B4-BE49-F238E27FC236}">
+                  <a16:creationId xmlns:a16="http://schemas.microsoft.com/office/drawing/2014/main" id="{08089F2E-D711-4F76-A553-A10FDDECF9A3}"/>
+                </a:ext>
+              </a:extLst>
+            </p:cNvPr>
+            <p:cNvSpPr/>
+            <p:nvPr/>
+          </p:nvSpPr>
+          <p:spPr>
+            <a:xfrm>
+              <a:off x="-1313503" y="118068"/>
+              <a:ext cx="8994462" cy="1540335"/>
+            </a:xfrm>
+            <a:prstGeom prst="roundRect">
+              <a:avLst>
+                <a:gd name="adj" fmla="val 7229"/>
+              </a:avLst>
+            </a:prstGeom>
+            <a:noFill/>
+            <a:ln>
+              <a:solidFill>
+                <a:schemeClr val="tx1"/>
+              </a:solidFill>
+            </a:ln>
+          </p:spPr>
+          <p:style>
+            <a:lnRef idx="2">
+              <a:schemeClr val="accent1">
+                <a:shade val="50000"/>
               </a:schemeClr>
-            </a:solidFill>
-          </a:ln>
-        </p:spPr>
-        <p:style>
-          <a:lnRef idx="2">
-            <a:schemeClr val="accent1">
-              <a:shade val="50000"/>
-            </a:schemeClr>
-          </a:lnRef>
-          <a:fillRef idx="1">
-            <a:schemeClr val="accent1"/>
-          </a:fillRef>
-          <a:effectRef idx="0">
-            <a:schemeClr val="accent1"/>
-          </a:effectRef>
-          <a:fontRef idx="minor">
-            <a:schemeClr val="lt1"/>
-          </a:fontRef>
-        </p:style>
-        <p:txBody>
-          <a:bodyPr rtlCol="0" anchor="ctr"/>
-          <a:lstStyle/>
-          <a:p>
-            <a:pPr algn="ctr"/>
-            <a:r>
-              <a:rPr lang="zh-CN" altLang="en-US" sz="1600" dirty="0">
+            </a:lnRef>
+            <a:fillRef idx="1">
+              <a:schemeClr val="accent1"/>
+            </a:fillRef>
+            <a:effectRef idx="0">
+              <a:schemeClr val="accent1"/>
+            </a:effectRef>
+            <a:fontRef idx="minor">
+              <a:schemeClr val="lt1"/>
+            </a:fontRef>
+          </p:style>
+          <p:txBody>
+            <a:bodyPr rtlCol="0" anchor="ctr"/>
+            <a:lstStyle/>
+            <a:p>
+              <a:pPr algn="ctr"/>
+              <a:endParaRPr lang="zh-CN" altLang="en-US" sz="1154" dirty="0">
                 <a:solidFill>
                   <a:schemeClr val="tx1"/>
                 </a:solidFill>
                 <a:latin typeface="宋体" panose="02010600030101010101" pitchFamily="2" charset="-122"/>
                 <a:ea typeface="宋体" panose="02010600030101010101" pitchFamily="2" charset="-122"/>
-              </a:rPr>
-              <a:t>第一、二章：基于无监督的网络流量数据异常检测</a:t>
-            </a:r>
-            <a:endParaRPr lang="en-US" altLang="zh-CN" sz="1600" dirty="0">
+              </a:endParaRPr>
+            </a:p>
+          </p:txBody>
+        </p:sp>
+        <p:sp>
+          <p:nvSpPr>
+            <p:cNvPr id="2" name="文本框 1">
+              <a:extLst>
+                <a:ext uri="{FF2B5EF4-FFF2-40B4-BE49-F238E27FC236}">
+                  <a16:creationId xmlns:a16="http://schemas.microsoft.com/office/drawing/2014/main" id="{4DA8476A-573B-430B-868D-4C718913C9C8}"/>
+                </a:ext>
+              </a:extLst>
+            </p:cNvPr>
+            <p:cNvSpPr txBox="1"/>
+            <p:nvPr/>
+          </p:nvSpPr>
+          <p:spPr>
+            <a:xfrm>
+              <a:off x="2584804" y="114590"/>
+              <a:ext cx="1320749" cy="342175"/>
+            </a:xfrm>
+            <a:prstGeom prst="rect">
+              <a:avLst/>
+            </a:prstGeom>
+            <a:noFill/>
+          </p:spPr>
+          <p:txBody>
+            <a:bodyPr wrap="none" rtlCol="0">
+              <a:spAutoFit/>
+            </a:bodyPr>
+            <a:lstStyle/>
+            <a:p>
+              <a:r>
+                <a:rPr lang="zh-CN" altLang="en-US" sz="1538" dirty="0">
+                  <a:latin typeface="宋体" panose="02010600030101010101" pitchFamily="2" charset="-122"/>
+                  <a:ea typeface="宋体" panose="02010600030101010101" pitchFamily="2" charset="-122"/>
+                </a:rPr>
+                <a:t>第一章 绪论</a:t>
+              </a:r>
+            </a:p>
+          </p:txBody>
+        </p:sp>
+        <p:sp>
+          <p:nvSpPr>
+            <p:cNvPr id="22" name="矩形: 圆角 21">
+              <a:extLst>
+                <a:ext uri="{FF2B5EF4-FFF2-40B4-BE49-F238E27FC236}">
+                  <a16:creationId xmlns:a16="http://schemas.microsoft.com/office/drawing/2014/main" id="{77777E0A-606B-4262-BEC3-D621ED318726}"/>
+                </a:ext>
+              </a:extLst>
+            </p:cNvPr>
+            <p:cNvSpPr/>
+            <p:nvPr/>
+          </p:nvSpPr>
+          <p:spPr>
+            <a:xfrm>
+              <a:off x="-1215248" y="541270"/>
+              <a:ext cx="2375410" cy="1044309"/>
+            </a:xfrm>
+            <a:prstGeom prst="roundRect">
+              <a:avLst>
+                <a:gd name="adj" fmla="val 7229"/>
+              </a:avLst>
+            </a:prstGeom>
+            <a:noFill/>
+            <a:ln>
               <a:solidFill>
                 <a:schemeClr val="tx1"/>
               </a:solidFill>
-              <a:latin typeface="宋体" panose="02010600030101010101" pitchFamily="2" charset="-122"/>
-              <a:ea typeface="宋体" panose="02010600030101010101" pitchFamily="2" charset="-122"/>
-            </a:endParaRPr>
-          </a:p>
-          <a:p>
-            <a:pPr algn="ctr"/>
-            <a:r>
-              <a:rPr lang="zh-CN" altLang="en-US" sz="1600" dirty="0">
+            </a:ln>
+          </p:spPr>
+          <p:style>
+            <a:lnRef idx="2">
+              <a:schemeClr val="accent1">
+                <a:shade val="50000"/>
+              </a:schemeClr>
+            </a:lnRef>
+            <a:fillRef idx="1">
+              <a:schemeClr val="accent1"/>
+            </a:fillRef>
+            <a:effectRef idx="0">
+              <a:schemeClr val="accent1"/>
+            </a:effectRef>
+            <a:fontRef idx="minor">
+              <a:schemeClr val="lt1"/>
+            </a:fontRef>
+          </p:style>
+          <p:txBody>
+            <a:bodyPr rtlCol="0" anchor="ctr"/>
+            <a:lstStyle/>
+            <a:p>
+              <a:pPr algn="ctr"/>
+              <a:endParaRPr lang="zh-CN" altLang="en-US" sz="1154" dirty="0">
                 <a:solidFill>
                   <a:schemeClr val="tx1"/>
                 </a:solidFill>
                 <a:latin typeface="宋体" panose="02010600030101010101" pitchFamily="2" charset="-122"/>
                 <a:ea typeface="宋体" panose="02010600030101010101" pitchFamily="2" charset="-122"/>
-              </a:rPr>
-              <a:t>研究背景、研究现状以及相关技术</a:t>
-            </a:r>
-          </a:p>
-        </p:txBody>
-      </p:sp>
-      <p:sp>
-        <p:nvSpPr>
-          <p:cNvPr id="5" name="矩形: 圆角 4">
-            <a:extLst>
-              <a:ext uri="{FF2B5EF4-FFF2-40B4-BE49-F238E27FC236}">
-                <a16:creationId xmlns:a16="http://schemas.microsoft.com/office/drawing/2014/main" id="{BEF8FCD1-A74D-41E9-9784-9FB4185B96CE}"/>
-              </a:ext>
-            </a:extLst>
-          </p:cNvPr>
-          <p:cNvSpPr/>
-          <p:nvPr/>
-        </p:nvSpPr>
-        <p:spPr>
-          <a:xfrm>
-            <a:off x="4927600" y="1898650"/>
-            <a:ext cx="3124200" cy="903287"/>
-          </a:xfrm>
-          <a:prstGeom prst="roundRect">
-            <a:avLst/>
-          </a:prstGeom>
-          <a:solidFill>
-            <a:srgbClr val="FFE7CB"/>
-          </a:solidFill>
-          <a:ln>
-            <a:solidFill>
-              <a:schemeClr val="accent4">
-                <a:lumMod val="75000"/>
+              </a:endParaRPr>
+            </a:p>
+          </p:txBody>
+        </p:sp>
+        <p:cxnSp>
+          <p:nvCxnSpPr>
+            <p:cNvPr id="8" name="直接连接符 7">
+              <a:extLst>
+                <a:ext uri="{FF2B5EF4-FFF2-40B4-BE49-F238E27FC236}">
+                  <a16:creationId xmlns:a16="http://schemas.microsoft.com/office/drawing/2014/main" id="{984FD81F-20E0-48E7-9490-1B7BB3E5B421}"/>
+                </a:ext>
+              </a:extLst>
+            </p:cNvPr>
+            <p:cNvCxnSpPr>
+              <a:cxnSpLocks/>
+            </p:cNvCxnSpPr>
+            <p:nvPr/>
+          </p:nvCxnSpPr>
+          <p:spPr>
+            <a:xfrm>
+              <a:off x="-1257931" y="447582"/>
+              <a:ext cx="8832210" cy="5562"/>
+            </a:xfrm>
+            <a:prstGeom prst="line">
+              <a:avLst/>
+            </a:prstGeom>
+            <a:ln w="9525"/>
+          </p:spPr>
+          <p:style>
+            <a:lnRef idx="1">
+              <a:schemeClr val="dk1"/>
+            </a:lnRef>
+            <a:fillRef idx="0">
+              <a:schemeClr val="dk1"/>
+            </a:fillRef>
+            <a:effectRef idx="0">
+              <a:schemeClr val="dk1"/>
+            </a:effectRef>
+            <a:fontRef idx="minor">
+              <a:schemeClr val="tx1"/>
+            </a:fontRef>
+          </p:style>
+        </p:cxnSp>
+        <p:sp>
+          <p:nvSpPr>
+            <p:cNvPr id="23" name="文本框 22">
+              <a:extLst>
+                <a:ext uri="{FF2B5EF4-FFF2-40B4-BE49-F238E27FC236}">
+                  <a16:creationId xmlns:a16="http://schemas.microsoft.com/office/drawing/2014/main" id="{581ED880-F62A-4125-87DE-A2D7E7E677A6}"/>
+                </a:ext>
+              </a:extLst>
+            </p:cNvPr>
+            <p:cNvSpPr txBox="1"/>
+            <p:nvPr/>
+          </p:nvSpPr>
+          <p:spPr>
+            <a:xfrm>
+              <a:off x="-960903" y="535709"/>
+              <a:ext cx="1627512" cy="342175"/>
+            </a:xfrm>
+            <a:prstGeom prst="rect">
+              <a:avLst/>
+            </a:prstGeom>
+            <a:noFill/>
+          </p:spPr>
+          <p:txBody>
+            <a:bodyPr wrap="none" rtlCol="0">
+              <a:spAutoFit/>
+            </a:bodyPr>
+            <a:lstStyle/>
+            <a:p>
+              <a:r>
+                <a:rPr lang="zh-CN" altLang="en-US" sz="1538" dirty="0">
+                  <a:latin typeface="宋体" panose="02010600030101010101" pitchFamily="2" charset="-122"/>
+                  <a:ea typeface="宋体" panose="02010600030101010101" pitchFamily="2" charset="-122"/>
+                </a:rPr>
+                <a:t>研究背景与意义</a:t>
+              </a:r>
+            </a:p>
+          </p:txBody>
+        </p:sp>
+        <p:cxnSp>
+          <p:nvCxnSpPr>
+            <p:cNvPr id="29" name="直接连接符 28">
+              <a:extLst>
+                <a:ext uri="{FF2B5EF4-FFF2-40B4-BE49-F238E27FC236}">
+                  <a16:creationId xmlns:a16="http://schemas.microsoft.com/office/drawing/2014/main" id="{0C0804A6-D9A2-425C-8EFD-D6B3E3B3B31F}"/>
+                </a:ext>
+              </a:extLst>
+            </p:cNvPr>
+            <p:cNvCxnSpPr>
+              <a:cxnSpLocks/>
+            </p:cNvCxnSpPr>
+            <p:nvPr/>
+          </p:nvCxnSpPr>
+          <p:spPr>
+            <a:xfrm>
+              <a:off x="-1145947" y="874263"/>
+              <a:ext cx="1979516" cy="0"/>
+            </a:xfrm>
+            <a:prstGeom prst="line">
+              <a:avLst/>
+            </a:prstGeom>
+            <a:ln w="9525"/>
+          </p:spPr>
+          <p:style>
+            <a:lnRef idx="1">
+              <a:schemeClr val="dk1"/>
+            </a:lnRef>
+            <a:fillRef idx="0">
+              <a:schemeClr val="dk1"/>
+            </a:fillRef>
+            <a:effectRef idx="0">
+              <a:schemeClr val="dk1"/>
+            </a:effectRef>
+            <a:fontRef idx="minor">
+              <a:schemeClr val="tx1"/>
+            </a:fontRef>
+          </p:style>
+        </p:cxnSp>
+        <p:sp>
+          <p:nvSpPr>
+            <p:cNvPr id="31" name="文本框 30">
+              <a:extLst>
+                <a:ext uri="{FF2B5EF4-FFF2-40B4-BE49-F238E27FC236}">
+                  <a16:creationId xmlns:a16="http://schemas.microsoft.com/office/drawing/2014/main" id="{107769EE-6287-4468-9179-0C57DCDEA71A}"/>
+                </a:ext>
+              </a:extLst>
+            </p:cNvPr>
+            <p:cNvSpPr txBox="1"/>
+            <p:nvPr/>
+          </p:nvSpPr>
+          <p:spPr>
+            <a:xfrm>
+              <a:off x="-1257931" y="868702"/>
+              <a:ext cx="2448106" cy="738664"/>
+            </a:xfrm>
+            <a:prstGeom prst="rect">
+              <a:avLst/>
+            </a:prstGeom>
+            <a:noFill/>
+          </p:spPr>
+          <p:txBody>
+            <a:bodyPr wrap="none" rtlCol="0">
+              <a:spAutoFit/>
+            </a:bodyPr>
+            <a:lstStyle/>
+            <a:p>
+              <a:pPr marL="274749" indent="-274749">
+                <a:buFont typeface="Arial" panose="020B0604020202020204" pitchFamily="34" charset="0"/>
+                <a:buChar char="•"/>
+              </a:pPr>
+              <a:r>
+                <a:rPr lang="zh-CN" altLang="en-US" sz="1346" dirty="0">
+                  <a:latin typeface="宋体" panose="02010600030101010101" pitchFamily="2" charset="-122"/>
+                  <a:ea typeface="宋体" panose="02010600030101010101" pitchFamily="2" charset="-122"/>
+                </a:rPr>
+                <a:t>网络异常流量检测重要性</a:t>
+              </a:r>
+              <a:endParaRPr lang="en-US" altLang="zh-CN" sz="1346" dirty="0">
+                <a:latin typeface="宋体" panose="02010600030101010101" pitchFamily="2" charset="-122"/>
+                <a:ea typeface="宋体" panose="02010600030101010101" pitchFamily="2" charset="-122"/>
+              </a:endParaRPr>
+            </a:p>
+            <a:p>
+              <a:pPr marL="274749" indent="-274749">
+                <a:buFont typeface="Arial" panose="020B0604020202020204" pitchFamily="34" charset="0"/>
+                <a:buChar char="•"/>
+              </a:pPr>
+              <a:r>
+                <a:rPr lang="zh-CN" altLang="en-US" sz="1346" dirty="0">
+                  <a:latin typeface="宋体" panose="02010600030101010101" pitchFamily="2" charset="-122"/>
+                  <a:ea typeface="宋体" panose="02010600030101010101" pitchFamily="2" charset="-122"/>
+                </a:rPr>
+                <a:t>长尾分布和多中心流量</a:t>
+              </a:r>
+              <a:endParaRPr lang="en-US" altLang="zh-CN" sz="1346" dirty="0">
+                <a:latin typeface="宋体" panose="02010600030101010101" pitchFamily="2" charset="-122"/>
+                <a:ea typeface="宋体" panose="02010600030101010101" pitchFamily="2" charset="-122"/>
+              </a:endParaRPr>
+            </a:p>
+            <a:p>
+              <a:pPr marL="274749" indent="-274749">
+                <a:buFont typeface="Arial" panose="020B0604020202020204" pitchFamily="34" charset="0"/>
+                <a:buChar char="•"/>
+              </a:pPr>
+              <a:r>
+                <a:rPr lang="zh-CN" altLang="en-US" sz="1346" dirty="0">
+                  <a:latin typeface="宋体" panose="02010600030101010101" pitchFamily="2" charset="-122"/>
+                  <a:ea typeface="宋体" panose="02010600030101010101" pitchFamily="2" charset="-122"/>
+                </a:rPr>
+                <a:t>现有方法存在的局限性</a:t>
+              </a:r>
+            </a:p>
+          </p:txBody>
+        </p:sp>
+        <p:grpSp>
+          <p:nvGrpSpPr>
+            <p:cNvPr id="130" name="组合 129">
+              <a:extLst>
+                <a:ext uri="{FF2B5EF4-FFF2-40B4-BE49-F238E27FC236}">
+                  <a16:creationId xmlns:a16="http://schemas.microsoft.com/office/drawing/2014/main" id="{CE280905-004A-4AB7-9137-62811F6D0269}"/>
+                </a:ext>
+              </a:extLst>
+            </p:cNvPr>
+            <p:cNvGrpSpPr/>
+            <p:nvPr/>
+          </p:nvGrpSpPr>
+          <p:grpSpPr>
+            <a:xfrm>
+              <a:off x="1333677" y="530080"/>
+              <a:ext cx="2172331" cy="1049870"/>
+              <a:chOff x="1143486" y="530148"/>
+              <a:chExt cx="2172331" cy="1049870"/>
+            </a:xfrm>
+          </p:grpSpPr>
+          <p:sp>
+            <p:nvSpPr>
+              <p:cNvPr id="32" name="矩形: 圆角 31">
+                <a:extLst>
+                  <a:ext uri="{FF2B5EF4-FFF2-40B4-BE49-F238E27FC236}">
+                    <a16:creationId xmlns:a16="http://schemas.microsoft.com/office/drawing/2014/main" id="{A34F65A0-B484-43A4-A284-48D4578DBB3B}"/>
+                  </a:ext>
+                </a:extLst>
+              </p:cNvPr>
+              <p:cNvSpPr/>
+              <p:nvPr/>
+            </p:nvSpPr>
+            <p:spPr>
+              <a:xfrm>
+                <a:off x="1186169" y="535709"/>
+                <a:ext cx="2129648" cy="1044309"/>
+              </a:xfrm>
+              <a:prstGeom prst="roundRect">
+                <a:avLst>
+                  <a:gd name="adj" fmla="val 7229"/>
+                </a:avLst>
+              </a:prstGeom>
+              <a:noFill/>
+              <a:ln>
+                <a:solidFill>
+                  <a:schemeClr val="tx1"/>
+                </a:solidFill>
+              </a:ln>
+            </p:spPr>
+            <p:style>
+              <a:lnRef idx="2">
+                <a:schemeClr val="accent1">
+                  <a:shade val="50000"/>
+                </a:schemeClr>
+              </a:lnRef>
+              <a:fillRef idx="1">
+                <a:schemeClr val="accent1"/>
+              </a:fillRef>
+              <a:effectRef idx="0">
+                <a:schemeClr val="accent1"/>
+              </a:effectRef>
+              <a:fontRef idx="minor">
+                <a:schemeClr val="lt1"/>
+              </a:fontRef>
+            </p:style>
+            <p:txBody>
+              <a:bodyPr rtlCol="0" anchor="ctr"/>
+              <a:lstStyle/>
+              <a:p>
+                <a:pPr algn="ctr"/>
+                <a:endParaRPr lang="zh-CN" altLang="en-US" sz="1154" dirty="0">
+                  <a:solidFill>
+                    <a:schemeClr val="tx1"/>
+                  </a:solidFill>
+                  <a:latin typeface="宋体" panose="02010600030101010101" pitchFamily="2" charset="-122"/>
+                  <a:ea typeface="宋体" panose="02010600030101010101" pitchFamily="2" charset="-122"/>
+                </a:endParaRPr>
+              </a:p>
+            </p:txBody>
+          </p:sp>
+          <p:sp>
+            <p:nvSpPr>
+              <p:cNvPr id="33" name="文本框 32">
+                <a:extLst>
+                  <a:ext uri="{FF2B5EF4-FFF2-40B4-BE49-F238E27FC236}">
+                    <a16:creationId xmlns:a16="http://schemas.microsoft.com/office/drawing/2014/main" id="{2443B2C5-C934-48E3-BE20-6D3F00085C11}"/>
+                  </a:ext>
+                </a:extLst>
+              </p:cNvPr>
+              <p:cNvSpPr txBox="1"/>
+              <p:nvPr/>
+            </p:nvSpPr>
+            <p:spPr>
+              <a:xfrm>
+                <a:off x="1440514" y="530148"/>
+                <a:ext cx="1627512" cy="342175"/>
+              </a:xfrm>
+              <a:prstGeom prst="rect">
+                <a:avLst/>
+              </a:prstGeom>
+              <a:noFill/>
+            </p:spPr>
+            <p:txBody>
+              <a:bodyPr wrap="none" rtlCol="0">
+                <a:spAutoFit/>
+              </a:bodyPr>
+              <a:lstStyle/>
+              <a:p>
+                <a:r>
+                  <a:rPr lang="zh-CN" altLang="en-US" sz="1538" dirty="0">
+                    <a:latin typeface="宋体" panose="02010600030101010101" pitchFamily="2" charset="-122"/>
+                    <a:ea typeface="宋体" panose="02010600030101010101" pitchFamily="2" charset="-122"/>
+                  </a:rPr>
+                  <a:t>国内外研究现状</a:t>
+                </a:r>
+              </a:p>
+            </p:txBody>
+          </p:sp>
+          <p:cxnSp>
+            <p:nvCxnSpPr>
+              <p:cNvPr id="34" name="直接连接符 33">
+                <a:extLst>
+                  <a:ext uri="{FF2B5EF4-FFF2-40B4-BE49-F238E27FC236}">
+                    <a16:creationId xmlns:a16="http://schemas.microsoft.com/office/drawing/2014/main" id="{C9B7BD79-A4C7-4F35-9074-785CCE9E3742}"/>
+                  </a:ext>
+                </a:extLst>
+              </p:cNvPr>
+              <p:cNvCxnSpPr>
+                <a:cxnSpLocks/>
+              </p:cNvCxnSpPr>
+              <p:nvPr/>
+            </p:nvCxnSpPr>
+            <p:spPr>
+              <a:xfrm>
+                <a:off x="1255470" y="868702"/>
+                <a:ext cx="1979516" cy="0"/>
+              </a:xfrm>
+              <a:prstGeom prst="line">
+                <a:avLst/>
+              </a:prstGeom>
+              <a:ln w="9525"/>
+            </p:spPr>
+            <p:style>
+              <a:lnRef idx="1">
+                <a:schemeClr val="dk1"/>
+              </a:lnRef>
+              <a:fillRef idx="0">
+                <a:schemeClr val="dk1"/>
+              </a:fillRef>
+              <a:effectRef idx="0">
+                <a:schemeClr val="dk1"/>
+              </a:effectRef>
+              <a:fontRef idx="minor">
+                <a:schemeClr val="tx1"/>
+              </a:fontRef>
+            </p:style>
+          </p:cxnSp>
+          <p:sp>
+            <p:nvSpPr>
+              <p:cNvPr id="35" name="文本框 34">
+                <a:extLst>
+                  <a:ext uri="{FF2B5EF4-FFF2-40B4-BE49-F238E27FC236}">
+                    <a16:creationId xmlns:a16="http://schemas.microsoft.com/office/drawing/2014/main" id="{688F8AF7-6A6F-44DE-A33D-AE3D72F97E71}"/>
+                  </a:ext>
+                </a:extLst>
+              </p:cNvPr>
+              <p:cNvSpPr txBox="1"/>
+              <p:nvPr/>
+            </p:nvSpPr>
+            <p:spPr>
+              <a:xfrm>
+                <a:off x="1143486" y="863141"/>
+                <a:ext cx="2089033" cy="523220"/>
+              </a:xfrm>
+              <a:prstGeom prst="rect">
+                <a:avLst/>
+              </a:prstGeom>
+              <a:noFill/>
+            </p:spPr>
+            <p:txBody>
+              <a:bodyPr wrap="none" rtlCol="0">
+                <a:spAutoFit/>
+              </a:bodyPr>
+              <a:lstStyle/>
+              <a:p>
+                <a:pPr marL="274749" indent="-274749">
+                  <a:buFont typeface="Arial" panose="020B0604020202020204" pitchFamily="34" charset="0"/>
+                  <a:buChar char="•"/>
+                </a:pPr>
+                <a:r>
+                  <a:rPr lang="zh-CN" altLang="en-US" sz="1346" dirty="0">
+                    <a:latin typeface="宋体" panose="02010600030101010101" pitchFamily="2" charset="-122"/>
+                    <a:ea typeface="宋体" panose="02010600030101010101" pitchFamily="2" charset="-122"/>
+                  </a:rPr>
+                  <a:t>基于机器学习的方法</a:t>
+                </a:r>
+                <a:endParaRPr lang="en-US" altLang="zh-CN" sz="1346" dirty="0">
+                  <a:latin typeface="宋体" panose="02010600030101010101" pitchFamily="2" charset="-122"/>
+                  <a:ea typeface="宋体" panose="02010600030101010101" pitchFamily="2" charset="-122"/>
+                </a:endParaRPr>
+              </a:p>
+              <a:p>
+                <a:pPr marL="274749" indent="-274749">
+                  <a:buFont typeface="Arial" panose="020B0604020202020204" pitchFamily="34" charset="0"/>
+                  <a:buChar char="•"/>
+                </a:pPr>
+                <a:r>
+                  <a:rPr lang="zh-CN" altLang="en-US" sz="1346" dirty="0">
+                    <a:latin typeface="宋体" panose="02010600030101010101" pitchFamily="2" charset="-122"/>
+                    <a:ea typeface="宋体" panose="02010600030101010101" pitchFamily="2" charset="-122"/>
+                  </a:rPr>
+                  <a:t>基于深度学习的方法</a:t>
+                </a:r>
+              </a:p>
+            </p:txBody>
+          </p:sp>
+        </p:grpSp>
+        <p:grpSp>
+          <p:nvGrpSpPr>
+            <p:cNvPr id="13" name="组合 12">
+              <a:extLst>
+                <a:ext uri="{FF2B5EF4-FFF2-40B4-BE49-F238E27FC236}">
+                  <a16:creationId xmlns:a16="http://schemas.microsoft.com/office/drawing/2014/main" id="{5D874394-6A33-4A14-A33E-12E2E80A0343}"/>
+                </a:ext>
+              </a:extLst>
+            </p:cNvPr>
+            <p:cNvGrpSpPr/>
+            <p:nvPr/>
+          </p:nvGrpSpPr>
+          <p:grpSpPr>
+            <a:xfrm>
+              <a:off x="3925286" y="533931"/>
+              <a:ext cx="3756907" cy="1066160"/>
+              <a:chOff x="1820895" y="1926390"/>
+              <a:chExt cx="2330090" cy="1066160"/>
+            </a:xfrm>
+          </p:grpSpPr>
+          <p:sp>
+            <p:nvSpPr>
+              <p:cNvPr id="36" name="矩形: 圆角 35">
+                <a:extLst>
+                  <a:ext uri="{FF2B5EF4-FFF2-40B4-BE49-F238E27FC236}">
+                    <a16:creationId xmlns:a16="http://schemas.microsoft.com/office/drawing/2014/main" id="{B2EC8047-4EDA-4276-9868-D2BB2F16A4C5}"/>
+                  </a:ext>
+                </a:extLst>
+              </p:cNvPr>
+              <p:cNvSpPr/>
+              <p:nvPr/>
+            </p:nvSpPr>
+            <p:spPr>
+              <a:xfrm>
+                <a:off x="1820895" y="1931951"/>
+                <a:ext cx="2297810" cy="1044309"/>
+              </a:xfrm>
+              <a:prstGeom prst="roundRect">
+                <a:avLst>
+                  <a:gd name="adj" fmla="val 7229"/>
+                </a:avLst>
+              </a:prstGeom>
+              <a:noFill/>
+              <a:ln>
+                <a:solidFill>
+                  <a:schemeClr val="tx1"/>
+                </a:solidFill>
+              </a:ln>
+            </p:spPr>
+            <p:style>
+              <a:lnRef idx="2">
+                <a:schemeClr val="accent1">
+                  <a:shade val="50000"/>
+                </a:schemeClr>
+              </a:lnRef>
+              <a:fillRef idx="1">
+                <a:schemeClr val="accent1"/>
+              </a:fillRef>
+              <a:effectRef idx="0">
+                <a:schemeClr val="accent1"/>
+              </a:effectRef>
+              <a:fontRef idx="minor">
+                <a:schemeClr val="lt1"/>
+              </a:fontRef>
+            </p:style>
+            <p:txBody>
+              <a:bodyPr rtlCol="0" anchor="ctr"/>
+              <a:lstStyle/>
+              <a:p>
+                <a:pPr algn="ctr"/>
+                <a:endParaRPr lang="zh-CN" altLang="en-US" sz="1154" dirty="0">
+                  <a:solidFill>
+                    <a:schemeClr val="tx1"/>
+                  </a:solidFill>
+                  <a:latin typeface="宋体" panose="02010600030101010101" pitchFamily="2" charset="-122"/>
+                  <a:ea typeface="宋体" panose="02010600030101010101" pitchFamily="2" charset="-122"/>
+                </a:endParaRPr>
+              </a:p>
+            </p:txBody>
+          </p:sp>
+          <p:sp>
+            <p:nvSpPr>
+              <p:cNvPr id="37" name="文本框 36">
+                <a:extLst>
+                  <a:ext uri="{FF2B5EF4-FFF2-40B4-BE49-F238E27FC236}">
+                    <a16:creationId xmlns:a16="http://schemas.microsoft.com/office/drawing/2014/main" id="{2DA7FD3A-8136-43F7-82A0-5CD2A9D6DA00}"/>
+                  </a:ext>
+                </a:extLst>
+              </p:cNvPr>
+              <p:cNvSpPr txBox="1"/>
+              <p:nvPr/>
+            </p:nvSpPr>
+            <p:spPr>
+              <a:xfrm>
+                <a:off x="2253836" y="1926390"/>
+                <a:ext cx="1263776" cy="342175"/>
+              </a:xfrm>
+              <a:prstGeom prst="rect">
+                <a:avLst/>
+              </a:prstGeom>
+              <a:noFill/>
+            </p:spPr>
+            <p:txBody>
+              <a:bodyPr wrap="none" rtlCol="0">
+                <a:spAutoFit/>
+              </a:bodyPr>
+              <a:lstStyle/>
+              <a:p>
+                <a:pPr algn="ctr"/>
+                <a:r>
+                  <a:rPr lang="zh-CN" altLang="en-US" sz="1538" dirty="0">
+                    <a:latin typeface="宋体" panose="02010600030101010101" pitchFamily="2" charset="-122"/>
+                    <a:ea typeface="宋体" panose="02010600030101010101" pitchFamily="2" charset="-122"/>
+                  </a:rPr>
+                  <a:t>本文主要工作与贡献</a:t>
+                </a:r>
+              </a:p>
+            </p:txBody>
+          </p:sp>
+          <p:cxnSp>
+            <p:nvCxnSpPr>
+              <p:cNvPr id="38" name="直接连接符 37">
+                <a:extLst>
+                  <a:ext uri="{FF2B5EF4-FFF2-40B4-BE49-F238E27FC236}">
+                    <a16:creationId xmlns:a16="http://schemas.microsoft.com/office/drawing/2014/main" id="{7429142F-2936-4220-823A-FE730213A477}"/>
+                  </a:ext>
+                </a:extLst>
+              </p:cNvPr>
+              <p:cNvCxnSpPr>
+                <a:cxnSpLocks/>
+              </p:cNvCxnSpPr>
+              <p:nvPr/>
+            </p:nvCxnSpPr>
+            <p:spPr>
+              <a:xfrm>
+                <a:off x="1890196" y="2264944"/>
+                <a:ext cx="1979516" cy="0"/>
+              </a:xfrm>
+              <a:prstGeom prst="line">
+                <a:avLst/>
+              </a:prstGeom>
+              <a:ln w="9525"/>
+            </p:spPr>
+            <p:style>
+              <a:lnRef idx="1">
+                <a:schemeClr val="dk1"/>
+              </a:lnRef>
+              <a:fillRef idx="0">
+                <a:schemeClr val="dk1"/>
+              </a:fillRef>
+              <a:effectRef idx="0">
+                <a:schemeClr val="dk1"/>
+              </a:effectRef>
+              <a:fontRef idx="minor">
+                <a:schemeClr val="tx1"/>
+              </a:fontRef>
+            </p:style>
+          </p:cxnSp>
+          <p:sp>
+            <p:nvSpPr>
+              <p:cNvPr id="39" name="文本框 38">
+                <a:extLst>
+                  <a:ext uri="{FF2B5EF4-FFF2-40B4-BE49-F238E27FC236}">
+                    <a16:creationId xmlns:a16="http://schemas.microsoft.com/office/drawing/2014/main" id="{BFA3FF1E-4D07-477A-A171-D3E28BE8F543}"/>
+                  </a:ext>
+                </a:extLst>
+              </p:cNvPr>
+              <p:cNvSpPr txBox="1"/>
+              <p:nvPr/>
+            </p:nvSpPr>
+            <p:spPr>
+              <a:xfrm>
+                <a:off x="1853175" y="2253886"/>
+                <a:ext cx="2297810" cy="738664"/>
+              </a:xfrm>
+              <a:prstGeom prst="rect">
+                <a:avLst/>
+              </a:prstGeom>
+              <a:noFill/>
+            </p:spPr>
+            <p:txBody>
+              <a:bodyPr wrap="none" rtlCol="0">
+                <a:spAutoFit/>
+              </a:bodyPr>
+              <a:lstStyle/>
+              <a:p>
+                <a:pPr marL="274749" indent="-274749">
+                  <a:buFont typeface="Arial" panose="020B0604020202020204" pitchFamily="34" charset="0"/>
+                  <a:buChar char="•"/>
+                </a:pPr>
+                <a:r>
+                  <a:rPr lang="zh-CN" altLang="en-US" sz="1346" dirty="0">
+                    <a:latin typeface="宋体" panose="02010600030101010101" pitchFamily="2" charset="-122"/>
+                    <a:ea typeface="宋体" panose="02010600030101010101" pitchFamily="2" charset="-122"/>
+                  </a:rPr>
+                  <a:t>基于多样性加权的无监督超球体检测方法</a:t>
+                </a:r>
+                <a:endParaRPr lang="en-US" altLang="zh-CN" sz="1346" dirty="0">
+                  <a:latin typeface="宋体" panose="02010600030101010101" pitchFamily="2" charset="-122"/>
+                  <a:ea typeface="宋体" panose="02010600030101010101" pitchFamily="2" charset="-122"/>
+                </a:endParaRPr>
+              </a:p>
+              <a:p>
+                <a:pPr marL="274749" indent="-274749">
+                  <a:buFont typeface="Arial" panose="020B0604020202020204" pitchFamily="34" charset="0"/>
+                  <a:buChar char="•"/>
+                </a:pPr>
+                <a:r>
+                  <a:rPr lang="zh-CN" altLang="en-US" sz="1346" dirty="0">
+                    <a:latin typeface="宋体" panose="02010600030101010101" pitchFamily="2" charset="-122"/>
+                    <a:ea typeface="宋体" panose="02010600030101010101" pitchFamily="2" charset="-122"/>
+                  </a:rPr>
+                  <a:t>基于多中心聚类的无监督检测方法</a:t>
+                </a:r>
+                <a:endParaRPr lang="en-US" altLang="zh-CN" sz="1346" dirty="0">
+                  <a:latin typeface="宋体" panose="02010600030101010101" pitchFamily="2" charset="-122"/>
+                  <a:ea typeface="宋体" panose="02010600030101010101" pitchFamily="2" charset="-122"/>
+                </a:endParaRPr>
+              </a:p>
+              <a:p>
+                <a:pPr marL="274749" indent="-274749">
+                  <a:buFont typeface="Arial" panose="020B0604020202020204" pitchFamily="34" charset="0"/>
+                  <a:buChar char="•"/>
+                </a:pPr>
+                <a:r>
+                  <a:rPr lang="zh-CN" altLang="en-US" sz="1346" dirty="0">
+                    <a:latin typeface="宋体" panose="02010600030101010101" pitchFamily="2" charset="-122"/>
+                    <a:ea typeface="宋体" panose="02010600030101010101" pitchFamily="2" charset="-122"/>
+                  </a:rPr>
+                  <a:t>设计并实现异常流量检测系统</a:t>
+                </a:r>
+              </a:p>
+            </p:txBody>
+          </p:sp>
+        </p:grpSp>
+        <p:grpSp>
+          <p:nvGrpSpPr>
+            <p:cNvPr id="210" name="组合 209">
+              <a:extLst>
+                <a:ext uri="{FF2B5EF4-FFF2-40B4-BE49-F238E27FC236}">
+                  <a16:creationId xmlns:a16="http://schemas.microsoft.com/office/drawing/2014/main" id="{D9AD82FB-D184-456A-BD28-AA758C65A8FB}"/>
+                </a:ext>
+              </a:extLst>
+            </p:cNvPr>
+            <p:cNvGrpSpPr/>
+            <p:nvPr/>
+          </p:nvGrpSpPr>
+          <p:grpSpPr>
+            <a:xfrm>
+              <a:off x="-1313504" y="1869525"/>
+              <a:ext cx="8994463" cy="1550976"/>
+              <a:chOff x="-1313504" y="1869525"/>
+              <a:chExt cx="8994463" cy="1550976"/>
+            </a:xfrm>
+          </p:grpSpPr>
+          <p:sp>
+            <p:nvSpPr>
+              <p:cNvPr id="40" name="矩形: 圆角 39">
+                <a:extLst>
+                  <a:ext uri="{FF2B5EF4-FFF2-40B4-BE49-F238E27FC236}">
+                    <a16:creationId xmlns:a16="http://schemas.microsoft.com/office/drawing/2014/main" id="{33D1860E-1A40-45FE-B577-50870AD0A29B}"/>
+                  </a:ext>
+                </a:extLst>
+              </p:cNvPr>
+              <p:cNvSpPr/>
+              <p:nvPr/>
+            </p:nvSpPr>
+            <p:spPr>
+              <a:xfrm>
+                <a:off x="-1313504" y="1880166"/>
+                <a:ext cx="8994463" cy="1540335"/>
+              </a:xfrm>
+              <a:prstGeom prst="roundRect">
+                <a:avLst>
+                  <a:gd name="adj" fmla="val 7229"/>
+                </a:avLst>
+              </a:prstGeom>
+              <a:noFill/>
+              <a:ln>
+                <a:solidFill>
+                  <a:schemeClr val="tx1"/>
+                </a:solidFill>
+              </a:ln>
+            </p:spPr>
+            <p:style>
+              <a:lnRef idx="2">
+                <a:schemeClr val="accent1">
+                  <a:shade val="50000"/>
+                </a:schemeClr>
+              </a:lnRef>
+              <a:fillRef idx="1">
+                <a:schemeClr val="accent1"/>
+              </a:fillRef>
+              <a:effectRef idx="0">
+                <a:schemeClr val="accent1"/>
+              </a:effectRef>
+              <a:fontRef idx="minor">
+                <a:schemeClr val="lt1"/>
+              </a:fontRef>
+            </p:style>
+            <p:txBody>
+              <a:bodyPr rtlCol="0" anchor="ctr"/>
+              <a:lstStyle/>
+              <a:p>
+                <a:pPr algn="ctr"/>
+                <a:endParaRPr lang="zh-CN" altLang="en-US" sz="1154" dirty="0">
+                  <a:solidFill>
+                    <a:schemeClr val="tx1"/>
+                  </a:solidFill>
+                  <a:latin typeface="宋体" panose="02010600030101010101" pitchFamily="2" charset="-122"/>
+                  <a:ea typeface="宋体" panose="02010600030101010101" pitchFamily="2" charset="-122"/>
+                </a:endParaRPr>
+              </a:p>
+            </p:txBody>
+          </p:sp>
+          <p:sp>
+            <p:nvSpPr>
+              <p:cNvPr id="41" name="文本框 40">
+                <a:extLst>
+                  <a:ext uri="{FF2B5EF4-FFF2-40B4-BE49-F238E27FC236}">
+                    <a16:creationId xmlns:a16="http://schemas.microsoft.com/office/drawing/2014/main" id="{3C4D4BA0-EE0C-4C72-A003-6D5377DD7EC6}"/>
+                  </a:ext>
+                </a:extLst>
+              </p:cNvPr>
+              <p:cNvSpPr txBox="1"/>
+              <p:nvPr/>
+            </p:nvSpPr>
+            <p:spPr>
+              <a:xfrm>
+                <a:off x="2086068" y="1869525"/>
+                <a:ext cx="2346071" cy="342175"/>
+              </a:xfrm>
+              <a:prstGeom prst="rect">
+                <a:avLst/>
+              </a:prstGeom>
+              <a:noFill/>
+            </p:spPr>
+            <p:txBody>
+              <a:bodyPr wrap="none" rtlCol="0">
+                <a:spAutoFit/>
+              </a:bodyPr>
+              <a:lstStyle/>
+              <a:p>
+                <a:r>
+                  <a:rPr lang="zh-CN" altLang="en-US" sz="1538" dirty="0">
+                    <a:latin typeface="宋体" panose="02010600030101010101" pitchFamily="2" charset="-122"/>
+                    <a:ea typeface="宋体" panose="02010600030101010101" pitchFamily="2" charset="-122"/>
+                  </a:rPr>
+                  <a:t>第二章 相关技术与理论</a:t>
+                </a:r>
+              </a:p>
+            </p:txBody>
+          </p:sp>
+          <p:cxnSp>
+            <p:nvCxnSpPr>
+              <p:cNvPr id="43" name="直接连接符 42">
+                <a:extLst>
+                  <a:ext uri="{FF2B5EF4-FFF2-40B4-BE49-F238E27FC236}">
+                    <a16:creationId xmlns:a16="http://schemas.microsoft.com/office/drawing/2014/main" id="{A49981FC-03FF-4C04-B222-E4CDE0596158}"/>
+                  </a:ext>
+                </a:extLst>
+              </p:cNvPr>
+              <p:cNvCxnSpPr>
+                <a:cxnSpLocks/>
+              </p:cNvCxnSpPr>
+              <p:nvPr/>
+            </p:nvCxnSpPr>
+            <p:spPr>
+              <a:xfrm flipV="1">
+                <a:off x="-1257931" y="2208079"/>
+                <a:ext cx="8832210" cy="1601"/>
+              </a:xfrm>
+              <a:prstGeom prst="line">
+                <a:avLst/>
+              </a:prstGeom>
+              <a:ln w="9525"/>
+            </p:spPr>
+            <p:style>
+              <a:lnRef idx="1">
+                <a:schemeClr val="dk1"/>
+              </a:lnRef>
+              <a:fillRef idx="0">
+                <a:schemeClr val="dk1"/>
+              </a:fillRef>
+              <a:effectRef idx="0">
+                <a:schemeClr val="dk1"/>
+              </a:effectRef>
+              <a:fontRef idx="minor">
+                <a:schemeClr val="tx1"/>
+              </a:fontRef>
+            </p:style>
+          </p:cxnSp>
+          <p:grpSp>
+            <p:nvGrpSpPr>
+              <p:cNvPr id="15" name="组合 14">
+                <a:extLst>
+                  <a:ext uri="{FF2B5EF4-FFF2-40B4-BE49-F238E27FC236}">
+                    <a16:creationId xmlns:a16="http://schemas.microsoft.com/office/drawing/2014/main" id="{9C230472-DDD5-4303-B9A4-2C8B855C007B}"/>
+                  </a:ext>
+                </a:extLst>
+              </p:cNvPr>
+              <p:cNvGrpSpPr/>
+              <p:nvPr/>
+            </p:nvGrpSpPr>
+            <p:grpSpPr>
+              <a:xfrm>
+                <a:off x="-992491" y="2278908"/>
+                <a:ext cx="2172331" cy="1077218"/>
+                <a:chOff x="-1257931" y="2292246"/>
+                <a:chExt cx="2172331" cy="1077218"/>
+              </a:xfrm>
+            </p:grpSpPr>
+            <p:sp>
+              <p:nvSpPr>
+                <p:cNvPr id="42" name="矩形: 圆角 41">
+                  <a:extLst>
+                    <a:ext uri="{FF2B5EF4-FFF2-40B4-BE49-F238E27FC236}">
+                      <a16:creationId xmlns:a16="http://schemas.microsoft.com/office/drawing/2014/main" id="{4988A03F-8CD0-416A-A43B-99F90CD5A7C7}"/>
+                    </a:ext>
+                  </a:extLst>
+                </p:cNvPr>
+                <p:cNvSpPr/>
+                <p:nvPr/>
+              </p:nvSpPr>
+              <p:spPr>
+                <a:xfrm>
+                  <a:off x="-1215248" y="2303368"/>
+                  <a:ext cx="2129648" cy="1044309"/>
+                </a:xfrm>
+                <a:prstGeom prst="roundRect">
+                  <a:avLst>
+                    <a:gd name="adj" fmla="val 7229"/>
+                  </a:avLst>
+                </a:prstGeom>
+                <a:noFill/>
+                <a:ln>
+                  <a:solidFill>
+                    <a:schemeClr val="tx1"/>
+                  </a:solidFill>
+                </a:ln>
+              </p:spPr>
+              <p:style>
+                <a:lnRef idx="2">
+                  <a:schemeClr val="accent1">
+                    <a:shade val="50000"/>
+                  </a:schemeClr>
+                </a:lnRef>
+                <a:fillRef idx="1">
+                  <a:schemeClr val="accent1"/>
+                </a:fillRef>
+                <a:effectRef idx="0">
+                  <a:schemeClr val="accent1"/>
+                </a:effectRef>
+                <a:fontRef idx="minor">
+                  <a:schemeClr val="lt1"/>
+                </a:fontRef>
+              </p:style>
+              <p:txBody>
+                <a:bodyPr rtlCol="0" anchor="ctr"/>
+                <a:lstStyle/>
+                <a:p>
+                  <a:pPr algn="ctr"/>
+                  <a:endParaRPr lang="zh-CN" altLang="en-US" sz="1154" dirty="0">
+                    <a:solidFill>
+                      <a:schemeClr val="tx1"/>
+                    </a:solidFill>
+                    <a:latin typeface="宋体" panose="02010600030101010101" pitchFamily="2" charset="-122"/>
+                    <a:ea typeface="宋体" panose="02010600030101010101" pitchFamily="2" charset="-122"/>
+                  </a:endParaRPr>
+                </a:p>
+              </p:txBody>
+            </p:sp>
+            <p:sp>
+              <p:nvSpPr>
+                <p:cNvPr id="44" name="文本框 43">
+                  <a:extLst>
+                    <a:ext uri="{FF2B5EF4-FFF2-40B4-BE49-F238E27FC236}">
+                      <a16:creationId xmlns:a16="http://schemas.microsoft.com/office/drawing/2014/main" id="{90980BA8-C785-496C-8737-48CF4BC128B0}"/>
+                    </a:ext>
+                  </a:extLst>
+                </p:cNvPr>
+                <p:cNvSpPr txBox="1"/>
+                <p:nvPr/>
+              </p:nvSpPr>
+              <p:spPr>
+                <a:xfrm>
+                  <a:off x="-814237" y="2292246"/>
+                  <a:ext cx="1422447" cy="342175"/>
+                </a:xfrm>
+                <a:prstGeom prst="rect">
+                  <a:avLst/>
+                </a:prstGeom>
+                <a:noFill/>
+              </p:spPr>
+              <p:txBody>
+                <a:bodyPr wrap="none" rtlCol="0">
+                  <a:spAutoFit/>
+                </a:bodyPr>
+                <a:lstStyle/>
+                <a:p>
+                  <a:r>
+                    <a:rPr lang="zh-CN" altLang="en-US" sz="1538" dirty="0">
+                      <a:latin typeface="宋体" panose="02010600030101010101" pitchFamily="2" charset="-122"/>
+                      <a:ea typeface="宋体" panose="02010600030101010101" pitchFamily="2" charset="-122"/>
+                    </a:rPr>
+                    <a:t>网络攻击类型</a:t>
+                  </a:r>
+                </a:p>
+              </p:txBody>
+            </p:sp>
+            <p:cxnSp>
+              <p:nvCxnSpPr>
+                <p:cNvPr id="45" name="直接连接符 44">
+                  <a:extLst>
+                    <a:ext uri="{FF2B5EF4-FFF2-40B4-BE49-F238E27FC236}">
+                      <a16:creationId xmlns:a16="http://schemas.microsoft.com/office/drawing/2014/main" id="{422A153B-4AB0-46A0-A3EC-71DF72D78108}"/>
+                    </a:ext>
+                  </a:extLst>
+                </p:cNvPr>
+                <p:cNvCxnSpPr>
+                  <a:cxnSpLocks/>
+                </p:cNvCxnSpPr>
+                <p:nvPr/>
+              </p:nvCxnSpPr>
+              <p:spPr>
+                <a:xfrm>
+                  <a:off x="-1145947" y="2636361"/>
+                  <a:ext cx="1979516" cy="0"/>
+                </a:xfrm>
+                <a:prstGeom prst="line">
+                  <a:avLst/>
+                </a:prstGeom>
+                <a:ln w="9525"/>
+              </p:spPr>
+              <p:style>
+                <a:lnRef idx="1">
+                  <a:schemeClr val="dk1"/>
+                </a:lnRef>
+                <a:fillRef idx="0">
+                  <a:schemeClr val="dk1"/>
+                </a:fillRef>
+                <a:effectRef idx="0">
+                  <a:schemeClr val="dk1"/>
+                </a:effectRef>
+                <a:fontRef idx="minor">
+                  <a:schemeClr val="tx1"/>
+                </a:fontRef>
+              </p:style>
+            </p:cxnSp>
+            <p:sp>
+              <p:nvSpPr>
+                <p:cNvPr id="46" name="文本框 45">
+                  <a:extLst>
+                    <a:ext uri="{FF2B5EF4-FFF2-40B4-BE49-F238E27FC236}">
+                      <a16:creationId xmlns:a16="http://schemas.microsoft.com/office/drawing/2014/main" id="{CF9E2FBD-25C0-42D6-85F5-F426942D96E9}"/>
+                    </a:ext>
+                  </a:extLst>
+                </p:cNvPr>
+                <p:cNvSpPr txBox="1"/>
+                <p:nvPr/>
+              </p:nvSpPr>
+              <p:spPr>
+                <a:xfrm>
+                  <a:off x="-1257931" y="2630800"/>
+                  <a:ext cx="1550424" cy="738664"/>
+                </a:xfrm>
+                <a:prstGeom prst="rect">
+                  <a:avLst/>
+                </a:prstGeom>
+                <a:noFill/>
+              </p:spPr>
+              <p:txBody>
+                <a:bodyPr wrap="none" rtlCol="0">
+                  <a:spAutoFit/>
+                </a:bodyPr>
+                <a:lstStyle/>
+                <a:p>
+                  <a:pPr marL="274749" indent="-274749">
+                    <a:buFont typeface="Arial" panose="020B0604020202020204" pitchFamily="34" charset="0"/>
+                    <a:buChar char="•"/>
+                  </a:pPr>
+                  <a:r>
+                    <a:rPr lang="zh-CN" altLang="en-US" sz="1346" dirty="0">
+                      <a:latin typeface="宋体" panose="02010600030101010101" pitchFamily="2" charset="-122"/>
+                      <a:ea typeface="宋体" panose="02010600030101010101" pitchFamily="2" charset="-122"/>
+                    </a:rPr>
+                    <a:t>拒绝服务</a:t>
+                  </a:r>
+                  <a:r>
+                    <a:rPr lang="en-US" altLang="zh-CN" sz="1346" dirty="0">
+                      <a:latin typeface="宋体" panose="02010600030101010101" pitchFamily="2" charset="-122"/>
+                      <a:ea typeface="宋体" panose="02010600030101010101" pitchFamily="2" charset="-122"/>
+                    </a:rPr>
+                    <a:t>DOS</a:t>
+                  </a:r>
+                </a:p>
+                <a:p>
+                  <a:pPr marL="274749" indent="-274749">
+                    <a:buFont typeface="Arial" panose="020B0604020202020204" pitchFamily="34" charset="0"/>
+                    <a:buChar char="•"/>
+                  </a:pPr>
+                  <a:r>
+                    <a:rPr lang="en-US" altLang="zh-CN" sz="1346" dirty="0">
+                      <a:latin typeface="宋体" panose="02010600030101010101" pitchFamily="2" charset="-122"/>
+                      <a:ea typeface="宋体" panose="02010600030101010101" pitchFamily="2" charset="-122"/>
+                    </a:rPr>
+                    <a:t>Web</a:t>
+                  </a:r>
+                  <a:r>
+                    <a:rPr lang="zh-CN" altLang="en-US" sz="1346" dirty="0">
+                      <a:latin typeface="宋体" panose="02010600030101010101" pitchFamily="2" charset="-122"/>
+                      <a:ea typeface="宋体" panose="02010600030101010101" pitchFamily="2" charset="-122"/>
+                    </a:rPr>
+                    <a:t>攻击</a:t>
+                  </a:r>
+                  <a:endParaRPr lang="en-US" altLang="zh-CN" sz="1346" dirty="0">
+                    <a:latin typeface="宋体" panose="02010600030101010101" pitchFamily="2" charset="-122"/>
+                    <a:ea typeface="宋体" panose="02010600030101010101" pitchFamily="2" charset="-122"/>
+                  </a:endParaRPr>
+                </a:p>
+                <a:p>
+                  <a:pPr marL="274749" indent="-274749">
+                    <a:buFont typeface="Arial" panose="020B0604020202020204" pitchFamily="34" charset="0"/>
+                    <a:buChar char="•"/>
+                  </a:pPr>
+                  <a:r>
+                    <a:rPr lang="zh-CN" altLang="en-US" sz="1346" dirty="0">
+                      <a:latin typeface="宋体" panose="02010600030101010101" pitchFamily="2" charset="-122"/>
+                      <a:ea typeface="宋体" panose="02010600030101010101" pitchFamily="2" charset="-122"/>
+                    </a:rPr>
+                    <a:t>远程访问攻击</a:t>
+                  </a:r>
+                </a:p>
+              </p:txBody>
+            </p:sp>
+          </p:grpSp>
+          <p:grpSp>
+            <p:nvGrpSpPr>
+              <p:cNvPr id="14" name="组合 13">
+                <a:extLst>
+                  <a:ext uri="{FF2B5EF4-FFF2-40B4-BE49-F238E27FC236}">
+                    <a16:creationId xmlns:a16="http://schemas.microsoft.com/office/drawing/2014/main" id="{5854FD14-A2CA-4429-9DBF-09C5AE716AC1}"/>
+                  </a:ext>
+                </a:extLst>
+              </p:cNvPr>
+              <p:cNvGrpSpPr/>
+              <p:nvPr/>
+            </p:nvGrpSpPr>
+            <p:grpSpPr>
+              <a:xfrm>
+                <a:off x="4225751" y="2270273"/>
+                <a:ext cx="3439890" cy="1049870"/>
+                <a:chOff x="1144226" y="2292246"/>
+                <a:chExt cx="2623203" cy="1049870"/>
+              </a:xfrm>
+            </p:grpSpPr>
+            <p:sp>
+              <p:nvSpPr>
+                <p:cNvPr id="47" name="矩形: 圆角 46">
+                  <a:extLst>
+                    <a:ext uri="{FF2B5EF4-FFF2-40B4-BE49-F238E27FC236}">
+                      <a16:creationId xmlns:a16="http://schemas.microsoft.com/office/drawing/2014/main" id="{FE8D5384-2414-42FE-BDE4-DFE60209412B}"/>
+                    </a:ext>
+                  </a:extLst>
+                </p:cNvPr>
+                <p:cNvSpPr/>
+                <p:nvPr/>
+              </p:nvSpPr>
+              <p:spPr>
+                <a:xfrm>
+                  <a:off x="1160754" y="2297807"/>
+                  <a:ext cx="2537004" cy="1044309"/>
+                </a:xfrm>
+                <a:prstGeom prst="roundRect">
+                  <a:avLst>
+                    <a:gd name="adj" fmla="val 7229"/>
+                  </a:avLst>
+                </a:prstGeom>
+                <a:noFill/>
+                <a:ln>
+                  <a:solidFill>
+                    <a:schemeClr val="tx1"/>
+                  </a:solidFill>
+                </a:ln>
+              </p:spPr>
+              <p:style>
+                <a:lnRef idx="2">
+                  <a:schemeClr val="accent1">
+                    <a:shade val="50000"/>
+                  </a:schemeClr>
+                </a:lnRef>
+                <a:fillRef idx="1">
+                  <a:schemeClr val="accent1"/>
+                </a:fillRef>
+                <a:effectRef idx="0">
+                  <a:schemeClr val="accent1"/>
+                </a:effectRef>
+                <a:fontRef idx="minor">
+                  <a:schemeClr val="lt1"/>
+                </a:fontRef>
+              </p:style>
+              <p:txBody>
+                <a:bodyPr rtlCol="0" anchor="ctr"/>
+                <a:lstStyle/>
+                <a:p>
+                  <a:pPr algn="ctr"/>
+                  <a:endParaRPr lang="zh-CN" altLang="en-US" sz="1154" dirty="0">
+                    <a:solidFill>
+                      <a:schemeClr val="tx1"/>
+                    </a:solidFill>
+                    <a:latin typeface="宋体" panose="02010600030101010101" pitchFamily="2" charset="-122"/>
+                    <a:ea typeface="宋体" panose="02010600030101010101" pitchFamily="2" charset="-122"/>
+                  </a:endParaRPr>
+                </a:p>
+              </p:txBody>
+            </p:sp>
+            <p:sp>
+              <p:nvSpPr>
+                <p:cNvPr id="48" name="文本框 47">
+                  <a:extLst>
+                    <a:ext uri="{FF2B5EF4-FFF2-40B4-BE49-F238E27FC236}">
+                      <a16:creationId xmlns:a16="http://schemas.microsoft.com/office/drawing/2014/main" id="{F0678E1A-6C39-47BE-9778-F6E0B04B19C8}"/>
+                    </a:ext>
+                  </a:extLst>
+                </p:cNvPr>
+                <p:cNvSpPr txBox="1"/>
+                <p:nvPr/>
+              </p:nvSpPr>
+              <p:spPr>
+                <a:xfrm>
+                  <a:off x="1630436" y="2292246"/>
+                  <a:ext cx="1241114" cy="342175"/>
+                </a:xfrm>
+                <a:prstGeom prst="rect">
+                  <a:avLst/>
+                </a:prstGeom>
+                <a:noFill/>
+              </p:spPr>
+              <p:txBody>
+                <a:bodyPr wrap="none" rtlCol="0">
+                  <a:spAutoFit/>
+                </a:bodyPr>
+                <a:lstStyle/>
+                <a:p>
+                  <a:pPr algn="ctr"/>
+                  <a:r>
+                    <a:rPr lang="zh-CN" altLang="en-US" sz="1538" dirty="0">
+                      <a:latin typeface="宋体" panose="02010600030101010101" pitchFamily="2" charset="-122"/>
+                      <a:ea typeface="宋体" panose="02010600030101010101" pitchFamily="2" charset="-122"/>
+                    </a:rPr>
+                    <a:t>无监督检测方法</a:t>
+                  </a:r>
+                </a:p>
+              </p:txBody>
+            </p:sp>
+            <p:cxnSp>
+              <p:nvCxnSpPr>
+                <p:cNvPr id="49" name="直接连接符 48">
+                  <a:extLst>
+                    <a:ext uri="{FF2B5EF4-FFF2-40B4-BE49-F238E27FC236}">
+                      <a16:creationId xmlns:a16="http://schemas.microsoft.com/office/drawing/2014/main" id="{E4204288-167A-4FDA-A3FE-5F383BC381D6}"/>
+                    </a:ext>
+                  </a:extLst>
+                </p:cNvPr>
+                <p:cNvCxnSpPr>
+                  <a:cxnSpLocks/>
+                </p:cNvCxnSpPr>
+                <p:nvPr/>
+              </p:nvCxnSpPr>
+              <p:spPr>
+                <a:xfrm>
+                  <a:off x="1255470" y="2630800"/>
+                  <a:ext cx="1979516" cy="0"/>
+                </a:xfrm>
+                <a:prstGeom prst="line">
+                  <a:avLst/>
+                </a:prstGeom>
+                <a:ln w="9525"/>
+              </p:spPr>
+              <p:style>
+                <a:lnRef idx="1">
+                  <a:schemeClr val="dk1"/>
+                </a:lnRef>
+                <a:fillRef idx="0">
+                  <a:schemeClr val="dk1"/>
+                </a:fillRef>
+                <a:effectRef idx="0">
+                  <a:schemeClr val="dk1"/>
+                </a:effectRef>
+                <a:fontRef idx="minor">
+                  <a:schemeClr val="tx1"/>
+                </a:fontRef>
+              </p:style>
+            </p:cxnSp>
+            <p:sp>
+              <p:nvSpPr>
+                <p:cNvPr id="50" name="文本框 49">
+                  <a:extLst>
+                    <a:ext uri="{FF2B5EF4-FFF2-40B4-BE49-F238E27FC236}">
+                      <a16:creationId xmlns:a16="http://schemas.microsoft.com/office/drawing/2014/main" id="{3A41F0FA-52E5-43D1-AB41-7437C4E939F7}"/>
+                    </a:ext>
+                  </a:extLst>
+                </p:cNvPr>
+                <p:cNvSpPr txBox="1"/>
+                <p:nvPr/>
+              </p:nvSpPr>
+              <p:spPr>
+                <a:xfrm>
+                  <a:off x="1144226" y="2621730"/>
+                  <a:ext cx="1386184" cy="526832"/>
+                </a:xfrm>
+                <a:prstGeom prst="rect">
+                  <a:avLst/>
+                </a:prstGeom>
+                <a:noFill/>
+              </p:spPr>
+              <p:txBody>
+                <a:bodyPr wrap="square" rtlCol="0">
+                  <a:spAutoFit/>
+                </a:bodyPr>
+                <a:lstStyle/>
+                <a:p>
+                  <a:pPr marL="274749" indent="-274749">
+                    <a:buFont typeface="Arial" panose="020B0604020202020204" pitchFamily="34" charset="0"/>
+                    <a:buChar char="•"/>
+                  </a:pPr>
+                  <a:r>
+                    <a:rPr lang="zh-CN" altLang="en-US" sz="1346" dirty="0">
+                      <a:latin typeface="宋体" panose="02010600030101010101" pitchFamily="2" charset="-122"/>
+                      <a:ea typeface="宋体" panose="02010600030101010101" pitchFamily="2" charset="-122"/>
+                    </a:rPr>
+                    <a:t>基于聚类的方法</a:t>
+                  </a:r>
+                  <a:endParaRPr lang="en-US" altLang="zh-CN" sz="1346" dirty="0">
+                    <a:latin typeface="宋体" panose="02010600030101010101" pitchFamily="2" charset="-122"/>
+                    <a:ea typeface="宋体" panose="02010600030101010101" pitchFamily="2" charset="-122"/>
+                  </a:endParaRPr>
+                </a:p>
+                <a:p>
+                  <a:pPr marL="274749" indent="-274749">
+                    <a:buFont typeface="Arial" panose="020B0604020202020204" pitchFamily="34" charset="0"/>
+                    <a:buChar char="•"/>
+                  </a:pPr>
+                  <a:r>
+                    <a:rPr lang="zh-CN" altLang="en-US" sz="1346" dirty="0">
+                      <a:latin typeface="宋体" panose="02010600030101010101" pitchFamily="2" charset="-122"/>
+                      <a:ea typeface="宋体" panose="02010600030101010101" pitchFamily="2" charset="-122"/>
+                    </a:rPr>
+                    <a:t>基于边界的方法</a:t>
+                  </a:r>
+                  <a:endParaRPr lang="en-US" altLang="zh-CN" sz="1346" dirty="0">
+                    <a:latin typeface="宋体" panose="02010600030101010101" pitchFamily="2" charset="-122"/>
+                    <a:ea typeface="宋体" panose="02010600030101010101" pitchFamily="2" charset="-122"/>
+                  </a:endParaRPr>
+                </a:p>
+              </p:txBody>
+            </p:sp>
+            <p:sp>
+              <p:nvSpPr>
+                <p:cNvPr id="70" name="文本框 69">
+                  <a:extLst>
+                    <a:ext uri="{FF2B5EF4-FFF2-40B4-BE49-F238E27FC236}">
+                      <a16:creationId xmlns:a16="http://schemas.microsoft.com/office/drawing/2014/main" id="{9DE3E978-9938-491A-8EE2-6CFD5F6B3888}"/>
+                    </a:ext>
+                  </a:extLst>
+                </p:cNvPr>
+                <p:cNvSpPr txBox="1"/>
+                <p:nvPr/>
+              </p:nvSpPr>
+              <p:spPr>
+                <a:xfrm>
+                  <a:off x="2367419" y="2621730"/>
+                  <a:ext cx="1400010" cy="526832"/>
+                </a:xfrm>
+                <a:prstGeom prst="rect">
+                  <a:avLst/>
+                </a:prstGeom>
+                <a:noFill/>
+              </p:spPr>
+              <p:txBody>
+                <a:bodyPr wrap="square" rtlCol="0">
+                  <a:spAutoFit/>
+                </a:bodyPr>
+                <a:lstStyle/>
+                <a:p>
+                  <a:pPr marL="274749" indent="-274749">
+                    <a:buFont typeface="Arial" panose="020B0604020202020204" pitchFamily="34" charset="0"/>
+                    <a:buChar char="•"/>
+                  </a:pPr>
+                  <a:r>
+                    <a:rPr lang="zh-CN" altLang="en-US" sz="1346" dirty="0">
+                      <a:latin typeface="宋体" panose="02010600030101010101" pitchFamily="2" charset="-122"/>
+                      <a:ea typeface="宋体" panose="02010600030101010101" pitchFamily="2" charset="-122"/>
+                    </a:rPr>
+                    <a:t>基于距离的方法</a:t>
+                  </a:r>
+                  <a:endParaRPr lang="en-US" altLang="zh-CN" sz="1346" dirty="0">
+                    <a:latin typeface="宋体" panose="02010600030101010101" pitchFamily="2" charset="-122"/>
+                    <a:ea typeface="宋体" panose="02010600030101010101" pitchFamily="2" charset="-122"/>
+                  </a:endParaRPr>
+                </a:p>
+                <a:p>
+                  <a:pPr marL="274749" indent="-274749">
+                    <a:buFont typeface="Arial" panose="020B0604020202020204" pitchFamily="34" charset="0"/>
+                    <a:buChar char="•"/>
+                  </a:pPr>
+                  <a:r>
+                    <a:rPr lang="zh-CN" altLang="en-US" sz="1346" dirty="0">
+                      <a:latin typeface="宋体" panose="02010600030101010101" pitchFamily="2" charset="-122"/>
+                      <a:ea typeface="宋体" panose="02010600030101010101" pitchFamily="2" charset="-122"/>
+                    </a:rPr>
+                    <a:t>基于重构的方法</a:t>
+                  </a:r>
+                  <a:endParaRPr lang="en-US" altLang="zh-CN" sz="1346" dirty="0">
+                    <a:latin typeface="宋体" panose="02010600030101010101" pitchFamily="2" charset="-122"/>
+                    <a:ea typeface="宋体" panose="02010600030101010101" pitchFamily="2" charset="-122"/>
+                  </a:endParaRPr>
+                </a:p>
+              </p:txBody>
+            </p:sp>
+          </p:grpSp>
+          <p:grpSp>
+            <p:nvGrpSpPr>
+              <p:cNvPr id="56" name="组合 55">
+                <a:extLst>
+                  <a:ext uri="{FF2B5EF4-FFF2-40B4-BE49-F238E27FC236}">
+                    <a16:creationId xmlns:a16="http://schemas.microsoft.com/office/drawing/2014/main" id="{27EBCFB9-CEBD-4A5A-A55A-C7F4416BCA1D}"/>
+                  </a:ext>
+                </a:extLst>
+              </p:cNvPr>
+              <p:cNvGrpSpPr/>
+              <p:nvPr/>
+            </p:nvGrpSpPr>
+            <p:grpSpPr>
+              <a:xfrm>
+                <a:off x="1694793" y="2286685"/>
+                <a:ext cx="2172331" cy="1055431"/>
+                <a:chOff x="-1257931" y="2292246"/>
+                <a:chExt cx="2172331" cy="1055431"/>
+              </a:xfrm>
+            </p:grpSpPr>
+            <p:sp>
+              <p:nvSpPr>
+                <p:cNvPr id="57" name="矩形: 圆角 56">
+                  <a:extLst>
+                    <a:ext uri="{FF2B5EF4-FFF2-40B4-BE49-F238E27FC236}">
+                      <a16:creationId xmlns:a16="http://schemas.microsoft.com/office/drawing/2014/main" id="{1F9A58F1-0661-4B05-9118-2AC32EB09AFB}"/>
+                    </a:ext>
+                  </a:extLst>
+                </p:cNvPr>
+                <p:cNvSpPr/>
+                <p:nvPr/>
+              </p:nvSpPr>
+              <p:spPr>
+                <a:xfrm>
+                  <a:off x="-1215248" y="2303368"/>
+                  <a:ext cx="2129648" cy="1044309"/>
+                </a:xfrm>
+                <a:prstGeom prst="roundRect">
+                  <a:avLst>
+                    <a:gd name="adj" fmla="val 7229"/>
+                  </a:avLst>
+                </a:prstGeom>
+                <a:noFill/>
+                <a:ln>
+                  <a:solidFill>
+                    <a:schemeClr val="tx1"/>
+                  </a:solidFill>
+                </a:ln>
+              </p:spPr>
+              <p:style>
+                <a:lnRef idx="2">
+                  <a:schemeClr val="accent1">
+                    <a:shade val="50000"/>
+                  </a:schemeClr>
+                </a:lnRef>
+                <a:fillRef idx="1">
+                  <a:schemeClr val="accent1"/>
+                </a:fillRef>
+                <a:effectRef idx="0">
+                  <a:schemeClr val="accent1"/>
+                </a:effectRef>
+                <a:fontRef idx="minor">
+                  <a:schemeClr val="lt1"/>
+                </a:fontRef>
+              </p:style>
+              <p:txBody>
+                <a:bodyPr rtlCol="0" anchor="ctr"/>
+                <a:lstStyle/>
+                <a:p>
+                  <a:pPr algn="ctr"/>
+                  <a:endParaRPr lang="zh-CN" altLang="en-US" sz="1154" dirty="0">
+                    <a:solidFill>
+                      <a:schemeClr val="tx1"/>
+                    </a:solidFill>
+                    <a:latin typeface="宋体" panose="02010600030101010101" pitchFamily="2" charset="-122"/>
+                    <a:ea typeface="宋体" panose="02010600030101010101" pitchFamily="2" charset="-122"/>
+                  </a:endParaRPr>
+                </a:p>
+              </p:txBody>
+            </p:sp>
+            <p:sp>
+              <p:nvSpPr>
+                <p:cNvPr id="58" name="文本框 57">
+                  <a:extLst>
+                    <a:ext uri="{FF2B5EF4-FFF2-40B4-BE49-F238E27FC236}">
+                      <a16:creationId xmlns:a16="http://schemas.microsoft.com/office/drawing/2014/main" id="{57A7D381-52DE-494F-8DA9-36B8AC5C348A}"/>
+                    </a:ext>
+                  </a:extLst>
+                </p:cNvPr>
+                <p:cNvSpPr txBox="1"/>
+                <p:nvPr/>
+              </p:nvSpPr>
+              <p:spPr>
+                <a:xfrm>
+                  <a:off x="-814237" y="2292246"/>
+                  <a:ext cx="1422447" cy="342175"/>
+                </a:xfrm>
+                <a:prstGeom prst="rect">
+                  <a:avLst/>
+                </a:prstGeom>
+                <a:noFill/>
+              </p:spPr>
+              <p:txBody>
+                <a:bodyPr wrap="none" rtlCol="0">
+                  <a:spAutoFit/>
+                </a:bodyPr>
+                <a:lstStyle/>
+                <a:p>
+                  <a:r>
+                    <a:rPr lang="zh-CN" altLang="en-US" sz="1538" dirty="0">
+                      <a:latin typeface="宋体" panose="02010600030101010101" pitchFamily="2" charset="-122"/>
+                      <a:ea typeface="宋体" panose="02010600030101010101" pitchFamily="2" charset="-122"/>
+                    </a:rPr>
+                    <a:t>原始网络流量</a:t>
+                  </a:r>
+                </a:p>
+              </p:txBody>
+            </p:sp>
+            <p:cxnSp>
+              <p:nvCxnSpPr>
+                <p:cNvPr id="59" name="直接连接符 58">
+                  <a:extLst>
+                    <a:ext uri="{FF2B5EF4-FFF2-40B4-BE49-F238E27FC236}">
+                      <a16:creationId xmlns:a16="http://schemas.microsoft.com/office/drawing/2014/main" id="{BF9D3FCD-694A-4613-A822-16B6BE50F9BA}"/>
+                    </a:ext>
+                  </a:extLst>
+                </p:cNvPr>
+                <p:cNvCxnSpPr>
+                  <a:cxnSpLocks/>
+                </p:cNvCxnSpPr>
+                <p:nvPr/>
+              </p:nvCxnSpPr>
+              <p:spPr>
+                <a:xfrm>
+                  <a:off x="-1145947" y="2636361"/>
+                  <a:ext cx="1979516" cy="0"/>
+                </a:xfrm>
+                <a:prstGeom prst="line">
+                  <a:avLst/>
+                </a:prstGeom>
+                <a:ln w="9525"/>
+              </p:spPr>
+              <p:style>
+                <a:lnRef idx="1">
+                  <a:schemeClr val="dk1"/>
+                </a:lnRef>
+                <a:fillRef idx="0">
+                  <a:schemeClr val="dk1"/>
+                </a:fillRef>
+                <a:effectRef idx="0">
+                  <a:schemeClr val="dk1"/>
+                </a:effectRef>
+                <a:fontRef idx="minor">
+                  <a:schemeClr val="tx1"/>
+                </a:fontRef>
+              </p:style>
+            </p:cxnSp>
+            <p:sp>
+              <p:nvSpPr>
+                <p:cNvPr id="60" name="文本框 59">
+                  <a:extLst>
+                    <a:ext uri="{FF2B5EF4-FFF2-40B4-BE49-F238E27FC236}">
+                      <a16:creationId xmlns:a16="http://schemas.microsoft.com/office/drawing/2014/main" id="{EA90CBCA-5DCC-4E95-80FA-BA6A652C8446}"/>
+                    </a:ext>
+                  </a:extLst>
+                </p:cNvPr>
+                <p:cNvSpPr txBox="1"/>
+                <p:nvPr/>
+              </p:nvSpPr>
+              <p:spPr>
+                <a:xfrm>
+                  <a:off x="-1257931" y="2630800"/>
+                  <a:ext cx="1281120" cy="523220"/>
+                </a:xfrm>
+                <a:prstGeom prst="rect">
+                  <a:avLst/>
+                </a:prstGeom>
+                <a:noFill/>
+              </p:spPr>
+              <p:txBody>
+                <a:bodyPr wrap="none" rtlCol="0">
+                  <a:spAutoFit/>
+                </a:bodyPr>
+                <a:lstStyle/>
+                <a:p>
+                  <a:pPr marL="274749" indent="-274749">
+                    <a:buFont typeface="Arial" panose="020B0604020202020204" pitchFamily="34" charset="0"/>
+                    <a:buChar char="•"/>
+                  </a:pPr>
+                  <a:r>
+                    <a:rPr lang="en-US" altLang="zh-CN" sz="1346" dirty="0">
+                      <a:latin typeface="宋体" panose="02010600030101010101" pitchFamily="2" charset="-122"/>
+                      <a:ea typeface="宋体" panose="02010600030101010101" pitchFamily="2" charset="-122"/>
+                    </a:rPr>
+                    <a:t>PCAP</a:t>
+                  </a:r>
+                  <a:r>
+                    <a:rPr lang="zh-CN" altLang="en-US" sz="1346" dirty="0">
+                      <a:latin typeface="宋体" panose="02010600030101010101" pitchFamily="2" charset="-122"/>
+                      <a:ea typeface="宋体" panose="02010600030101010101" pitchFamily="2" charset="-122"/>
+                    </a:rPr>
+                    <a:t>包</a:t>
+                  </a:r>
+                  <a:endParaRPr lang="en-US" altLang="zh-CN" sz="1346" dirty="0">
+                    <a:latin typeface="宋体" panose="02010600030101010101" pitchFamily="2" charset="-122"/>
+                    <a:ea typeface="宋体" panose="02010600030101010101" pitchFamily="2" charset="-122"/>
+                  </a:endParaRPr>
+                </a:p>
+                <a:p>
+                  <a:pPr marL="274749" indent="-274749">
+                    <a:buFont typeface="Arial" panose="020B0604020202020204" pitchFamily="34" charset="0"/>
+                    <a:buChar char="•"/>
+                  </a:pPr>
+                  <a:r>
+                    <a:rPr lang="en-US" altLang="zh-CN" sz="1346" dirty="0">
+                      <a:latin typeface="宋体" panose="02010600030101010101" pitchFamily="2" charset="-122"/>
+                      <a:ea typeface="宋体" panose="02010600030101010101" pitchFamily="2" charset="-122"/>
+                    </a:rPr>
+                    <a:t>NetFlow</a:t>
+                  </a:r>
+                  <a:r>
+                    <a:rPr lang="zh-CN" altLang="en-US" sz="1346" dirty="0">
+                      <a:latin typeface="宋体" panose="02010600030101010101" pitchFamily="2" charset="-122"/>
+                      <a:ea typeface="宋体" panose="02010600030101010101" pitchFamily="2" charset="-122"/>
+                    </a:rPr>
+                    <a:t>流</a:t>
+                  </a:r>
+                  <a:endParaRPr lang="en-US" altLang="zh-CN" sz="1346" dirty="0">
+                    <a:latin typeface="宋体" panose="02010600030101010101" pitchFamily="2" charset="-122"/>
+                    <a:ea typeface="宋体" panose="02010600030101010101" pitchFamily="2" charset="-122"/>
+                  </a:endParaRPr>
+                </a:p>
+              </p:txBody>
+            </p:sp>
+          </p:grpSp>
+        </p:grpSp>
+        <p:sp>
+          <p:nvSpPr>
+            <p:cNvPr id="61" name="矩形: 圆角 60">
+              <a:extLst>
+                <a:ext uri="{FF2B5EF4-FFF2-40B4-BE49-F238E27FC236}">
+                  <a16:creationId xmlns:a16="http://schemas.microsoft.com/office/drawing/2014/main" id="{259E7B7A-2865-46E8-9CED-23BA55429A80}"/>
+                </a:ext>
+              </a:extLst>
+            </p:cNvPr>
+            <p:cNvSpPr/>
+            <p:nvPr/>
+          </p:nvSpPr>
+          <p:spPr>
+            <a:xfrm>
+              <a:off x="-1328464" y="3599002"/>
+              <a:ext cx="3135241" cy="3662858"/>
+            </a:xfrm>
+            <a:prstGeom prst="roundRect">
+              <a:avLst>
+                <a:gd name="adj" fmla="val 2723"/>
+              </a:avLst>
+            </a:prstGeom>
+            <a:noFill/>
+            <a:ln>
+              <a:solidFill>
+                <a:schemeClr val="tx1"/>
+              </a:solidFill>
+            </a:ln>
+          </p:spPr>
+          <p:style>
+            <a:lnRef idx="2">
+              <a:schemeClr val="accent1">
+                <a:shade val="50000"/>
               </a:schemeClr>
-            </a:solidFill>
-          </a:ln>
-        </p:spPr>
-        <p:style>
-          <a:lnRef idx="2">
-            <a:schemeClr val="accent1">
-              <a:shade val="50000"/>
-            </a:schemeClr>
-          </a:lnRef>
-          <a:fillRef idx="1">
-            <a:schemeClr val="accent1"/>
-          </a:fillRef>
-          <a:effectRef idx="0">
-            <a:schemeClr val="accent1"/>
-          </a:effectRef>
-          <a:fontRef idx="minor">
-            <a:schemeClr val="lt1"/>
-          </a:fontRef>
-        </p:style>
-        <p:txBody>
-          <a:bodyPr rtlCol="0" anchor="ctr"/>
-          <a:lstStyle/>
-          <a:p>
-            <a:pPr algn="ctr"/>
-            <a:r>
-              <a:rPr lang="zh-CN" altLang="en-US" sz="1600" dirty="0">
+            </a:lnRef>
+            <a:fillRef idx="1">
+              <a:schemeClr val="accent1"/>
+            </a:fillRef>
+            <a:effectRef idx="0">
+              <a:schemeClr val="accent1"/>
+            </a:effectRef>
+            <a:fontRef idx="minor">
+              <a:schemeClr val="lt1"/>
+            </a:fontRef>
+          </p:style>
+          <p:txBody>
+            <a:bodyPr rtlCol="0" anchor="ctr"/>
+            <a:lstStyle/>
+            <a:p>
+              <a:pPr algn="ctr"/>
+              <a:endParaRPr lang="zh-CN" altLang="en-US" sz="1154" dirty="0">
                 <a:solidFill>
                   <a:schemeClr val="tx1"/>
                 </a:solidFill>
                 <a:latin typeface="宋体" panose="02010600030101010101" pitchFamily="2" charset="-122"/>
                 <a:ea typeface="宋体" panose="02010600030101010101" pitchFamily="2" charset="-122"/>
-              </a:rPr>
-              <a:t>第三章：基于多样性加权的无监督超球体网络流量异常检测方法</a:t>
-            </a:r>
-          </a:p>
-        </p:txBody>
-      </p:sp>
-      <p:sp>
-        <p:nvSpPr>
-          <p:cNvPr id="6" name="矩形: 圆角 5">
-            <a:extLst>
-              <a:ext uri="{FF2B5EF4-FFF2-40B4-BE49-F238E27FC236}">
-                <a16:creationId xmlns:a16="http://schemas.microsoft.com/office/drawing/2014/main" id="{80DB5FD0-6B46-4874-9065-25D69CC70E73}"/>
-              </a:ext>
-            </a:extLst>
-          </p:cNvPr>
-          <p:cNvSpPr/>
-          <p:nvPr/>
-        </p:nvSpPr>
-        <p:spPr>
-          <a:xfrm>
-            <a:off x="8667750" y="1651000"/>
-            <a:ext cx="3124200" cy="1320800"/>
-          </a:xfrm>
-          <a:prstGeom prst="roundRect">
-            <a:avLst/>
-          </a:prstGeom>
-          <a:solidFill>
-            <a:srgbClr val="FFE7CB"/>
-          </a:solidFill>
-          <a:ln>
-            <a:solidFill>
-              <a:schemeClr val="accent4">
-                <a:lumMod val="75000"/>
+              </a:endParaRPr>
+            </a:p>
+          </p:txBody>
+        </p:sp>
+        <p:sp>
+          <p:nvSpPr>
+            <p:cNvPr id="63" name="文本框 62">
+              <a:extLst>
+                <a:ext uri="{FF2B5EF4-FFF2-40B4-BE49-F238E27FC236}">
+                  <a16:creationId xmlns:a16="http://schemas.microsoft.com/office/drawing/2014/main" id="{8AD5C642-C181-42BC-A27E-C45951E49832}"/>
+                </a:ext>
+              </a:extLst>
+            </p:cNvPr>
+            <p:cNvSpPr txBox="1"/>
+            <p:nvPr/>
+          </p:nvSpPr>
+          <p:spPr>
+            <a:xfrm>
+              <a:off x="-1215248" y="3687357"/>
+              <a:ext cx="2726659" cy="584775"/>
+            </a:xfrm>
+            <a:prstGeom prst="rect">
+              <a:avLst/>
+            </a:prstGeom>
+            <a:noFill/>
+          </p:spPr>
+          <p:txBody>
+            <a:bodyPr wrap="square" rtlCol="0">
+              <a:spAutoFit/>
+            </a:bodyPr>
+            <a:lstStyle/>
+            <a:p>
+              <a:pPr algn="ctr"/>
+              <a:r>
+                <a:rPr lang="zh-CN" altLang="en-US" sz="1538" dirty="0">
+                  <a:latin typeface="宋体" panose="02010600030101010101" pitchFamily="2" charset="-122"/>
+                  <a:ea typeface="宋体" panose="02010600030101010101" pitchFamily="2" charset="-122"/>
+                </a:rPr>
+                <a:t>第三章 基于多样性加权的无监督超球体检测方法</a:t>
+              </a:r>
+            </a:p>
+          </p:txBody>
+        </p:sp>
+        <p:cxnSp>
+          <p:nvCxnSpPr>
+            <p:cNvPr id="64" name="直接连接符 63">
+              <a:extLst>
+                <a:ext uri="{FF2B5EF4-FFF2-40B4-BE49-F238E27FC236}">
+                  <a16:creationId xmlns:a16="http://schemas.microsoft.com/office/drawing/2014/main" id="{0D773F77-F7CE-443C-BF6D-0079DA545E34}"/>
+                </a:ext>
+              </a:extLst>
+            </p:cNvPr>
+            <p:cNvCxnSpPr>
+              <a:cxnSpLocks/>
+            </p:cNvCxnSpPr>
+            <p:nvPr/>
+          </p:nvCxnSpPr>
+          <p:spPr>
+            <a:xfrm>
+              <a:off x="-1257931" y="4292812"/>
+              <a:ext cx="2982690" cy="0"/>
+            </a:xfrm>
+            <a:prstGeom prst="line">
+              <a:avLst/>
+            </a:prstGeom>
+            <a:ln w="9525"/>
+          </p:spPr>
+          <p:style>
+            <a:lnRef idx="1">
+              <a:schemeClr val="dk1"/>
+            </a:lnRef>
+            <a:fillRef idx="0">
+              <a:schemeClr val="dk1"/>
+            </a:fillRef>
+            <a:effectRef idx="0">
+              <a:schemeClr val="dk1"/>
+            </a:effectRef>
+            <a:fontRef idx="minor">
+              <a:schemeClr val="tx1"/>
+            </a:fontRef>
+          </p:style>
+        </p:cxnSp>
+        <p:sp>
+          <p:nvSpPr>
+            <p:cNvPr id="67" name="矩形: 圆角 66">
+              <a:extLst>
+                <a:ext uri="{FF2B5EF4-FFF2-40B4-BE49-F238E27FC236}">
+                  <a16:creationId xmlns:a16="http://schemas.microsoft.com/office/drawing/2014/main" id="{836C0202-7929-4727-A3EA-CB8E03512A3B}"/>
+                </a:ext>
+              </a:extLst>
+            </p:cNvPr>
+            <p:cNvSpPr/>
+            <p:nvPr/>
+          </p:nvSpPr>
+          <p:spPr>
+            <a:xfrm>
+              <a:off x="-404172" y="4337890"/>
+              <a:ext cx="1080923" cy="294914"/>
+            </a:xfrm>
+            <a:prstGeom prst="roundRect">
+              <a:avLst/>
+            </a:prstGeom>
+            <a:noFill/>
+            <a:ln>
+              <a:solidFill>
+                <a:schemeClr val="tx1"/>
+              </a:solidFill>
+            </a:ln>
+          </p:spPr>
+          <p:style>
+            <a:lnRef idx="2">
+              <a:schemeClr val="accent1">
+                <a:shade val="50000"/>
               </a:schemeClr>
-            </a:solidFill>
-          </a:ln>
-        </p:spPr>
-        <p:style>
-          <a:lnRef idx="2">
-            <a:schemeClr val="accent1">
-              <a:shade val="50000"/>
-            </a:schemeClr>
-          </a:lnRef>
-          <a:fillRef idx="1">
-            <a:schemeClr val="accent1"/>
-          </a:fillRef>
-          <a:effectRef idx="0">
-            <a:schemeClr val="accent1"/>
-          </a:effectRef>
-          <a:fontRef idx="minor">
-            <a:schemeClr val="lt1"/>
-          </a:fontRef>
-        </p:style>
-        <p:txBody>
-          <a:bodyPr rtlCol="0" anchor="ctr"/>
-          <a:lstStyle/>
-          <a:p>
-            <a:pPr algn="ctr"/>
-            <a:r>
-              <a:rPr lang="zh-CN" altLang="en-US" sz="1600" dirty="0">
+            </a:lnRef>
+            <a:fillRef idx="1">
+              <a:schemeClr val="accent1"/>
+            </a:fillRef>
+            <a:effectRef idx="0">
+              <a:schemeClr val="accent1"/>
+            </a:effectRef>
+            <a:fontRef idx="minor">
+              <a:schemeClr val="lt1"/>
+            </a:fontRef>
+          </p:style>
+          <p:txBody>
+            <a:bodyPr rtlCol="0" anchor="ctr"/>
+            <a:lstStyle/>
+            <a:p>
+              <a:pPr algn="ctr"/>
+              <a:r>
+                <a:rPr lang="zh-CN" altLang="zh-CN" sz="1346" dirty="0">
+                  <a:solidFill>
+                    <a:srgbClr val="000000"/>
+                  </a:solidFill>
+                  <a:latin typeface="宋体" panose="02010600030101010101" pitchFamily="2" charset="-122"/>
+                  <a:ea typeface="宋体" panose="02010600030101010101" pitchFamily="2" charset="-122"/>
+                </a:rPr>
+                <a:t>数据流量</a:t>
+              </a:r>
+              <a:endParaRPr lang="zh-CN" altLang="zh-CN" sz="1010" dirty="0"/>
+            </a:p>
+          </p:txBody>
+        </p:sp>
+        <p:sp>
+          <p:nvSpPr>
+            <p:cNvPr id="68" name="矩形: 圆角 67">
+              <a:extLst>
+                <a:ext uri="{FF2B5EF4-FFF2-40B4-BE49-F238E27FC236}">
+                  <a16:creationId xmlns:a16="http://schemas.microsoft.com/office/drawing/2014/main" id="{16D78D8B-E4B6-49B9-9E2C-FEA1C49B6AA4}"/>
+                </a:ext>
+              </a:extLst>
+            </p:cNvPr>
+            <p:cNvSpPr/>
+            <p:nvPr/>
+          </p:nvSpPr>
+          <p:spPr>
+            <a:xfrm>
+              <a:off x="-404173" y="4836807"/>
+              <a:ext cx="1080923" cy="299631"/>
+            </a:xfrm>
+            <a:prstGeom prst="roundRect">
+              <a:avLst/>
+            </a:prstGeom>
+            <a:noFill/>
+            <a:ln>
+              <a:solidFill>
+                <a:schemeClr val="tx1"/>
+              </a:solidFill>
+            </a:ln>
+          </p:spPr>
+          <p:style>
+            <a:lnRef idx="2">
+              <a:schemeClr val="accent1">
+                <a:shade val="50000"/>
+              </a:schemeClr>
+            </a:lnRef>
+            <a:fillRef idx="1">
+              <a:schemeClr val="accent1"/>
+            </a:fillRef>
+            <a:effectRef idx="0">
+              <a:schemeClr val="accent1"/>
+            </a:effectRef>
+            <a:fontRef idx="minor">
+              <a:schemeClr val="lt1"/>
+            </a:fontRef>
+          </p:style>
+          <p:txBody>
+            <a:bodyPr rtlCol="0" anchor="ctr"/>
+            <a:lstStyle/>
+            <a:p>
+              <a:pPr algn="ctr"/>
+              <a:r>
+                <a:rPr lang="zh-CN" altLang="en-US" sz="1346" dirty="0">
+                  <a:solidFill>
+                    <a:srgbClr val="000000"/>
+                  </a:solidFill>
+                  <a:latin typeface="宋体" panose="02010600030101010101" pitchFamily="2" charset="-122"/>
+                  <a:ea typeface="宋体" panose="02010600030101010101" pitchFamily="2" charset="-122"/>
+                </a:rPr>
+                <a:t>小波分块</a:t>
+              </a:r>
+              <a:endParaRPr lang="zh-CN" altLang="zh-CN" sz="1010" dirty="0"/>
+            </a:p>
+          </p:txBody>
+        </p:sp>
+        <p:sp>
+          <p:nvSpPr>
+            <p:cNvPr id="69" name="矩形: 圆角 68">
+              <a:extLst>
+                <a:ext uri="{FF2B5EF4-FFF2-40B4-BE49-F238E27FC236}">
+                  <a16:creationId xmlns:a16="http://schemas.microsoft.com/office/drawing/2014/main" id="{906B8A33-0388-4827-AD2D-D6BF11DD5D6A}"/>
+                </a:ext>
+              </a:extLst>
+            </p:cNvPr>
+            <p:cNvSpPr/>
+            <p:nvPr/>
+          </p:nvSpPr>
+          <p:spPr>
+            <a:xfrm>
+              <a:off x="-762097" y="5338102"/>
+              <a:ext cx="1785282" cy="313711"/>
+            </a:xfrm>
+            <a:prstGeom prst="roundRect">
+              <a:avLst/>
+            </a:prstGeom>
+            <a:noFill/>
+            <a:ln>
+              <a:solidFill>
+                <a:schemeClr val="tx1"/>
+              </a:solidFill>
+            </a:ln>
+          </p:spPr>
+          <p:style>
+            <a:lnRef idx="2">
+              <a:schemeClr val="accent1">
+                <a:shade val="50000"/>
+              </a:schemeClr>
+            </a:lnRef>
+            <a:fillRef idx="1">
+              <a:schemeClr val="accent1"/>
+            </a:fillRef>
+            <a:effectRef idx="0">
+              <a:schemeClr val="accent1"/>
+            </a:effectRef>
+            <a:fontRef idx="minor">
+              <a:schemeClr val="lt1"/>
+            </a:fontRef>
+          </p:style>
+          <p:txBody>
+            <a:bodyPr rtlCol="0" anchor="ctr"/>
+            <a:lstStyle/>
+            <a:p>
+              <a:pPr algn="ctr"/>
+              <a:r>
+                <a:rPr lang="en-US" altLang="zh-CN" sz="1346" dirty="0">
+                  <a:solidFill>
+                    <a:srgbClr val="000000"/>
+                  </a:solidFill>
+                  <a:latin typeface="宋体" panose="02010600030101010101" pitchFamily="2" charset="-122"/>
+                  <a:ea typeface="宋体" panose="02010600030101010101" pitchFamily="2" charset="-122"/>
+                </a:rPr>
+                <a:t>Anomaly Attention</a:t>
+              </a:r>
+              <a:endParaRPr lang="zh-CN" altLang="zh-CN" sz="1010" dirty="0"/>
+            </a:p>
+          </p:txBody>
+        </p:sp>
+        <p:sp>
+          <p:nvSpPr>
+            <p:cNvPr id="71" name="矩形: 圆角 70">
+              <a:extLst>
+                <a:ext uri="{FF2B5EF4-FFF2-40B4-BE49-F238E27FC236}">
+                  <a16:creationId xmlns:a16="http://schemas.microsoft.com/office/drawing/2014/main" id="{AC3D7B37-04AD-481F-A5E1-C787159BEFB9}"/>
+                </a:ext>
+              </a:extLst>
+            </p:cNvPr>
+            <p:cNvSpPr/>
+            <p:nvPr/>
+          </p:nvSpPr>
+          <p:spPr>
+            <a:xfrm>
+              <a:off x="-1260247" y="5846568"/>
+              <a:ext cx="1298347" cy="299631"/>
+            </a:xfrm>
+            <a:prstGeom prst="roundRect">
+              <a:avLst/>
+            </a:prstGeom>
+            <a:noFill/>
+            <a:ln>
+              <a:solidFill>
+                <a:schemeClr val="tx1"/>
+              </a:solidFill>
+            </a:ln>
+          </p:spPr>
+          <p:style>
+            <a:lnRef idx="2">
+              <a:schemeClr val="accent1">
+                <a:shade val="50000"/>
+              </a:schemeClr>
+            </a:lnRef>
+            <a:fillRef idx="1">
+              <a:schemeClr val="accent1"/>
+            </a:fillRef>
+            <a:effectRef idx="0">
+              <a:schemeClr val="accent1"/>
+            </a:effectRef>
+            <a:fontRef idx="minor">
+              <a:schemeClr val="lt1"/>
+            </a:fontRef>
+          </p:style>
+          <p:txBody>
+            <a:bodyPr rtlCol="0" anchor="ctr"/>
+            <a:lstStyle/>
+            <a:p>
+              <a:pPr algn="ctr"/>
+              <a:r>
+                <a:rPr lang="zh-CN" altLang="en-US" sz="1346" dirty="0">
+                  <a:solidFill>
+                    <a:srgbClr val="000000"/>
+                  </a:solidFill>
+                  <a:latin typeface="宋体" panose="02010600030101010101" pitchFamily="2" charset="-122"/>
+                  <a:ea typeface="宋体" panose="02010600030101010101" pitchFamily="2" charset="-122"/>
+                </a:rPr>
+                <a:t>特征中心更新</a:t>
+              </a:r>
+              <a:endParaRPr lang="zh-CN" altLang="zh-CN" sz="1010" dirty="0"/>
+            </a:p>
+          </p:txBody>
+        </p:sp>
+        <p:sp>
+          <p:nvSpPr>
+            <p:cNvPr id="72" name="矩形: 圆角 71">
+              <a:extLst>
+                <a:ext uri="{FF2B5EF4-FFF2-40B4-BE49-F238E27FC236}">
+                  <a16:creationId xmlns:a16="http://schemas.microsoft.com/office/drawing/2014/main" id="{B2FC640B-D547-4CAF-9D62-BE0A43B08553}"/>
+                </a:ext>
+              </a:extLst>
+            </p:cNvPr>
+            <p:cNvSpPr/>
+            <p:nvPr/>
+          </p:nvSpPr>
+          <p:spPr>
+            <a:xfrm>
+              <a:off x="441960" y="5841736"/>
+              <a:ext cx="1282799" cy="299631"/>
+            </a:xfrm>
+            <a:prstGeom prst="roundRect">
+              <a:avLst/>
+            </a:prstGeom>
+            <a:noFill/>
+            <a:ln>
+              <a:solidFill>
+                <a:schemeClr val="tx1"/>
+              </a:solidFill>
+            </a:ln>
+          </p:spPr>
+          <p:style>
+            <a:lnRef idx="2">
+              <a:schemeClr val="accent1">
+                <a:shade val="50000"/>
+              </a:schemeClr>
+            </a:lnRef>
+            <a:fillRef idx="1">
+              <a:schemeClr val="accent1"/>
+            </a:fillRef>
+            <a:effectRef idx="0">
+              <a:schemeClr val="accent1"/>
+            </a:effectRef>
+            <a:fontRef idx="minor">
+              <a:schemeClr val="lt1"/>
+            </a:fontRef>
+          </p:style>
+          <p:txBody>
+            <a:bodyPr rtlCol="0" anchor="ctr"/>
+            <a:lstStyle/>
+            <a:p>
+              <a:pPr algn="ctr"/>
+              <a:r>
+                <a:rPr lang="zh-CN" altLang="en-US" sz="1346" dirty="0">
+                  <a:solidFill>
+                    <a:srgbClr val="000000"/>
+                  </a:solidFill>
+                  <a:latin typeface="宋体" panose="02010600030101010101" pitchFamily="2" charset="-122"/>
+                  <a:ea typeface="宋体" panose="02010600030101010101" pitchFamily="2" charset="-122"/>
+                </a:rPr>
+                <a:t>多样性评估</a:t>
+              </a:r>
+              <a:endParaRPr lang="en-US" altLang="zh-CN" sz="1346" dirty="0">
+                <a:solidFill>
+                  <a:srgbClr val="000000"/>
+                </a:solidFill>
+                <a:latin typeface="宋体" panose="02010600030101010101" pitchFamily="2" charset="-122"/>
+                <a:ea typeface="宋体" panose="02010600030101010101" pitchFamily="2" charset="-122"/>
+              </a:endParaRPr>
+            </a:p>
+          </p:txBody>
+        </p:sp>
+        <p:sp>
+          <p:nvSpPr>
+            <p:cNvPr id="77" name="矩形: 圆角 76">
+              <a:extLst>
+                <a:ext uri="{FF2B5EF4-FFF2-40B4-BE49-F238E27FC236}">
+                  <a16:creationId xmlns:a16="http://schemas.microsoft.com/office/drawing/2014/main" id="{C3171658-DE16-443E-ABAF-10B446993348}"/>
+                </a:ext>
+              </a:extLst>
+            </p:cNvPr>
+            <p:cNvSpPr/>
+            <p:nvPr/>
+          </p:nvSpPr>
+          <p:spPr>
+            <a:xfrm>
+              <a:off x="-392516" y="6357111"/>
+              <a:ext cx="1126414" cy="299631"/>
+            </a:xfrm>
+            <a:prstGeom prst="roundRect">
+              <a:avLst/>
+            </a:prstGeom>
+            <a:noFill/>
+            <a:ln>
+              <a:solidFill>
+                <a:schemeClr val="tx1"/>
+              </a:solidFill>
+            </a:ln>
+          </p:spPr>
+          <p:style>
+            <a:lnRef idx="2">
+              <a:schemeClr val="accent1">
+                <a:shade val="50000"/>
+              </a:schemeClr>
+            </a:lnRef>
+            <a:fillRef idx="1">
+              <a:schemeClr val="accent1"/>
+            </a:fillRef>
+            <a:effectRef idx="0">
+              <a:schemeClr val="accent1"/>
+            </a:effectRef>
+            <a:fontRef idx="minor">
+              <a:schemeClr val="lt1"/>
+            </a:fontRef>
+          </p:style>
+          <p:txBody>
+            <a:bodyPr rtlCol="0" anchor="ctr"/>
+            <a:lstStyle/>
+            <a:p>
+              <a:pPr algn="ctr"/>
+              <a:r>
+                <a:rPr lang="zh-CN" altLang="en-US" sz="1346" dirty="0">
+                  <a:solidFill>
+                    <a:srgbClr val="000000"/>
+                  </a:solidFill>
+                  <a:latin typeface="宋体" panose="02010600030101010101" pitchFamily="2" charset="-122"/>
+                  <a:ea typeface="宋体" panose="02010600030101010101" pitchFamily="2" charset="-122"/>
+                </a:rPr>
+                <a:t>损失与权重</a:t>
+              </a:r>
+              <a:endParaRPr lang="zh-CN" altLang="zh-CN" sz="1010" dirty="0"/>
+            </a:p>
+          </p:txBody>
+        </p:sp>
+        <p:sp>
+          <p:nvSpPr>
+            <p:cNvPr id="78" name="矩形: 圆角 77">
+              <a:extLst>
+                <a:ext uri="{FF2B5EF4-FFF2-40B4-BE49-F238E27FC236}">
+                  <a16:creationId xmlns:a16="http://schemas.microsoft.com/office/drawing/2014/main" id="{DDDDCE9C-2004-4178-875F-C5BDED26F6C3}"/>
+                </a:ext>
+              </a:extLst>
+            </p:cNvPr>
+            <p:cNvSpPr/>
+            <p:nvPr/>
+          </p:nvSpPr>
+          <p:spPr>
+            <a:xfrm>
+              <a:off x="-386202" y="6825157"/>
+              <a:ext cx="1110914" cy="299631"/>
+            </a:xfrm>
+            <a:prstGeom prst="roundRect">
+              <a:avLst/>
+            </a:prstGeom>
+            <a:noFill/>
+            <a:ln>
+              <a:solidFill>
+                <a:schemeClr val="tx1"/>
+              </a:solidFill>
+            </a:ln>
+          </p:spPr>
+          <p:style>
+            <a:lnRef idx="2">
+              <a:schemeClr val="accent1">
+                <a:shade val="50000"/>
+              </a:schemeClr>
+            </a:lnRef>
+            <a:fillRef idx="1">
+              <a:schemeClr val="accent1"/>
+            </a:fillRef>
+            <a:effectRef idx="0">
+              <a:schemeClr val="accent1"/>
+            </a:effectRef>
+            <a:fontRef idx="minor">
+              <a:schemeClr val="lt1"/>
+            </a:fontRef>
+          </p:style>
+          <p:txBody>
+            <a:bodyPr rtlCol="0" anchor="ctr"/>
+            <a:lstStyle/>
+            <a:p>
+              <a:pPr algn="ctr"/>
+              <a:r>
+                <a:rPr lang="zh-CN" altLang="en-US" sz="1346" dirty="0">
+                  <a:solidFill>
+                    <a:srgbClr val="000000"/>
+                  </a:solidFill>
+                  <a:latin typeface="宋体" panose="02010600030101010101" pitchFamily="2" charset="-122"/>
+                  <a:ea typeface="宋体" panose="02010600030101010101" pitchFamily="2" charset="-122"/>
+                </a:rPr>
+                <a:t>异常分类</a:t>
+              </a:r>
+              <a:endParaRPr lang="zh-CN" altLang="zh-CN" sz="1010" dirty="0"/>
+            </a:p>
+          </p:txBody>
+        </p:sp>
+        <p:cxnSp>
+          <p:nvCxnSpPr>
+            <p:cNvPr id="80" name="直接箭头连接符 79">
+              <a:extLst>
+                <a:ext uri="{FF2B5EF4-FFF2-40B4-BE49-F238E27FC236}">
+                  <a16:creationId xmlns:a16="http://schemas.microsoft.com/office/drawing/2014/main" id="{D369B0A9-391E-4856-A862-3BD8E3D29731}"/>
+                </a:ext>
+              </a:extLst>
+            </p:cNvPr>
+            <p:cNvCxnSpPr>
+              <a:stCxn id="67" idx="2"/>
+              <a:endCxn id="68" idx="0"/>
+            </p:cNvCxnSpPr>
+            <p:nvPr/>
+          </p:nvCxnSpPr>
+          <p:spPr>
+            <a:xfrm flipH="1">
+              <a:off x="136289" y="4632804"/>
+              <a:ext cx="1" cy="204003"/>
+            </a:xfrm>
+            <a:prstGeom prst="straightConnector1">
+              <a:avLst/>
+            </a:prstGeom>
+            <a:ln w="12700">
+              <a:solidFill>
+                <a:schemeClr val="tx1"/>
+              </a:solidFill>
+              <a:tailEnd type="triangle"/>
+            </a:ln>
+          </p:spPr>
+          <p:style>
+            <a:lnRef idx="1">
+              <a:schemeClr val="accent1"/>
+            </a:lnRef>
+            <a:fillRef idx="0">
+              <a:schemeClr val="accent1"/>
+            </a:fillRef>
+            <a:effectRef idx="0">
+              <a:schemeClr val="accent1"/>
+            </a:effectRef>
+            <a:fontRef idx="minor">
+              <a:schemeClr val="tx1"/>
+            </a:fontRef>
+          </p:style>
+        </p:cxnSp>
+        <p:cxnSp>
+          <p:nvCxnSpPr>
+            <p:cNvPr id="81" name="直接箭头连接符 80">
+              <a:extLst>
+                <a:ext uri="{FF2B5EF4-FFF2-40B4-BE49-F238E27FC236}">
+                  <a16:creationId xmlns:a16="http://schemas.microsoft.com/office/drawing/2014/main" id="{F30789AE-254D-4440-8649-B51FB41B9E3F}"/>
+                </a:ext>
+              </a:extLst>
+            </p:cNvPr>
+            <p:cNvCxnSpPr>
+              <a:cxnSpLocks/>
+              <a:stCxn id="68" idx="2"/>
+              <a:endCxn id="69" idx="0"/>
+            </p:cNvCxnSpPr>
+            <p:nvPr/>
+          </p:nvCxnSpPr>
+          <p:spPr>
+            <a:xfrm flipH="1">
+              <a:off x="130544" y="5136438"/>
+              <a:ext cx="5745" cy="201664"/>
+            </a:xfrm>
+            <a:prstGeom prst="straightConnector1">
+              <a:avLst/>
+            </a:prstGeom>
+            <a:ln w="12700">
+              <a:solidFill>
+                <a:schemeClr val="tx1"/>
+              </a:solidFill>
+              <a:tailEnd type="triangle"/>
+            </a:ln>
+          </p:spPr>
+          <p:style>
+            <a:lnRef idx="1">
+              <a:schemeClr val="accent1"/>
+            </a:lnRef>
+            <a:fillRef idx="0">
+              <a:schemeClr val="accent1"/>
+            </a:fillRef>
+            <a:effectRef idx="0">
+              <a:schemeClr val="accent1"/>
+            </a:effectRef>
+            <a:fontRef idx="minor">
+              <a:schemeClr val="tx1"/>
+            </a:fontRef>
+          </p:style>
+        </p:cxnSp>
+        <p:cxnSp>
+          <p:nvCxnSpPr>
+            <p:cNvPr id="84" name="直接箭头连接符 83">
+              <a:extLst>
+                <a:ext uri="{FF2B5EF4-FFF2-40B4-BE49-F238E27FC236}">
+                  <a16:creationId xmlns:a16="http://schemas.microsoft.com/office/drawing/2014/main" id="{B945B57D-F35E-4671-8192-DB55DCD8A9AD}"/>
+                </a:ext>
+              </a:extLst>
+            </p:cNvPr>
+            <p:cNvCxnSpPr>
+              <a:cxnSpLocks/>
+            </p:cNvCxnSpPr>
+            <p:nvPr/>
+          </p:nvCxnSpPr>
+          <p:spPr>
+            <a:xfrm flipH="1">
+              <a:off x="-611074" y="5645943"/>
+              <a:ext cx="5745" cy="201664"/>
+            </a:xfrm>
+            <a:prstGeom prst="straightConnector1">
+              <a:avLst/>
+            </a:prstGeom>
+            <a:ln w="12700">
+              <a:solidFill>
+                <a:schemeClr val="tx1"/>
+              </a:solidFill>
+              <a:tailEnd type="triangle"/>
+            </a:ln>
+          </p:spPr>
+          <p:style>
+            <a:lnRef idx="1">
+              <a:schemeClr val="accent1"/>
+            </a:lnRef>
+            <a:fillRef idx="0">
+              <a:schemeClr val="accent1"/>
+            </a:fillRef>
+            <a:effectRef idx="0">
+              <a:schemeClr val="accent1"/>
+            </a:effectRef>
+            <a:fontRef idx="minor">
+              <a:schemeClr val="tx1"/>
+            </a:fontRef>
+          </p:style>
+        </p:cxnSp>
+        <p:cxnSp>
+          <p:nvCxnSpPr>
+            <p:cNvPr id="85" name="直接箭头连接符 84">
+              <a:extLst>
+                <a:ext uri="{FF2B5EF4-FFF2-40B4-BE49-F238E27FC236}">
+                  <a16:creationId xmlns:a16="http://schemas.microsoft.com/office/drawing/2014/main" id="{7604E10B-F9A7-44FC-9193-6177DAC88A15}"/>
+                </a:ext>
+              </a:extLst>
+            </p:cNvPr>
+            <p:cNvCxnSpPr>
+              <a:cxnSpLocks/>
+            </p:cNvCxnSpPr>
+            <p:nvPr/>
+          </p:nvCxnSpPr>
+          <p:spPr>
+            <a:xfrm flipH="1">
+              <a:off x="898494" y="5645943"/>
+              <a:ext cx="5745" cy="201664"/>
+            </a:xfrm>
+            <a:prstGeom prst="straightConnector1">
+              <a:avLst/>
+            </a:prstGeom>
+            <a:ln w="12700">
+              <a:solidFill>
+                <a:schemeClr val="tx1"/>
+              </a:solidFill>
+              <a:tailEnd type="triangle"/>
+            </a:ln>
+          </p:spPr>
+          <p:style>
+            <a:lnRef idx="1">
+              <a:schemeClr val="accent1"/>
+            </a:lnRef>
+            <a:fillRef idx="0">
+              <a:schemeClr val="accent1"/>
+            </a:fillRef>
+            <a:effectRef idx="0">
+              <a:schemeClr val="accent1"/>
+            </a:effectRef>
+            <a:fontRef idx="minor">
+              <a:schemeClr val="tx1"/>
+            </a:fontRef>
+          </p:style>
+        </p:cxnSp>
+        <p:cxnSp>
+          <p:nvCxnSpPr>
+            <p:cNvPr id="87" name="连接符: 肘形 86">
+              <a:extLst>
+                <a:ext uri="{FF2B5EF4-FFF2-40B4-BE49-F238E27FC236}">
+                  <a16:creationId xmlns:a16="http://schemas.microsoft.com/office/drawing/2014/main" id="{F025CE00-8969-43FC-AD84-488E17F525C5}"/>
+                </a:ext>
+              </a:extLst>
+            </p:cNvPr>
+            <p:cNvCxnSpPr>
+              <a:cxnSpLocks/>
+              <a:stCxn id="71" idx="2"/>
+              <a:endCxn id="77" idx="0"/>
+            </p:cNvCxnSpPr>
+            <p:nvPr/>
+          </p:nvCxnSpPr>
+          <p:spPr>
+            <a:xfrm rot="16200000" flipH="1">
+              <a:off x="-325648" y="5860773"/>
+              <a:ext cx="210912" cy="781763"/>
+            </a:xfrm>
+            <a:prstGeom prst="bentConnector3">
+              <a:avLst/>
+            </a:prstGeom>
+            <a:ln w="12700">
+              <a:solidFill>
+                <a:schemeClr val="tx1"/>
+              </a:solidFill>
+              <a:tailEnd type="triangle"/>
+            </a:ln>
+          </p:spPr>
+          <p:style>
+            <a:lnRef idx="1">
+              <a:schemeClr val="accent1"/>
+            </a:lnRef>
+            <a:fillRef idx="0">
+              <a:schemeClr val="accent1"/>
+            </a:fillRef>
+            <a:effectRef idx="0">
+              <a:schemeClr val="accent1"/>
+            </a:effectRef>
+            <a:fontRef idx="minor">
+              <a:schemeClr val="tx1"/>
+            </a:fontRef>
+          </p:style>
+        </p:cxnSp>
+        <p:cxnSp>
+          <p:nvCxnSpPr>
+            <p:cNvPr id="88" name="连接符: 肘形 87">
+              <a:extLst>
+                <a:ext uri="{FF2B5EF4-FFF2-40B4-BE49-F238E27FC236}">
+                  <a16:creationId xmlns:a16="http://schemas.microsoft.com/office/drawing/2014/main" id="{D8C76584-58DC-4CAD-9CDD-1939233E32D0}"/>
+                </a:ext>
+              </a:extLst>
+            </p:cNvPr>
+            <p:cNvCxnSpPr>
+              <a:cxnSpLocks/>
+              <a:stCxn id="72" idx="2"/>
+              <a:endCxn id="77" idx="0"/>
+            </p:cNvCxnSpPr>
+            <p:nvPr/>
+          </p:nvCxnSpPr>
+          <p:spPr>
+            <a:xfrm rot="5400000">
+              <a:off x="519153" y="5792905"/>
+              <a:ext cx="215744" cy="912669"/>
+            </a:xfrm>
+            <a:prstGeom prst="bentConnector3">
+              <a:avLst>
+                <a:gd name="adj1" fmla="val 50000"/>
+              </a:avLst>
+            </a:prstGeom>
+            <a:ln w="12700">
+              <a:solidFill>
+                <a:schemeClr val="tx1"/>
+              </a:solidFill>
+              <a:tailEnd type="triangle"/>
+            </a:ln>
+          </p:spPr>
+          <p:style>
+            <a:lnRef idx="1">
+              <a:schemeClr val="accent1"/>
+            </a:lnRef>
+            <a:fillRef idx="0">
+              <a:schemeClr val="accent1"/>
+            </a:fillRef>
+            <a:effectRef idx="0">
+              <a:schemeClr val="accent1"/>
+            </a:effectRef>
+            <a:fontRef idx="minor">
+              <a:schemeClr val="tx1"/>
+            </a:fontRef>
+          </p:style>
+        </p:cxnSp>
+        <p:cxnSp>
+          <p:nvCxnSpPr>
+            <p:cNvPr id="92" name="直接箭头连接符 91">
+              <a:extLst>
+                <a:ext uri="{FF2B5EF4-FFF2-40B4-BE49-F238E27FC236}">
+                  <a16:creationId xmlns:a16="http://schemas.microsoft.com/office/drawing/2014/main" id="{9FA158AD-1A7D-4CB2-BC74-3589079B7113}"/>
+                </a:ext>
+              </a:extLst>
+            </p:cNvPr>
+            <p:cNvCxnSpPr>
+              <a:cxnSpLocks/>
+              <a:stCxn id="77" idx="2"/>
+            </p:cNvCxnSpPr>
+            <p:nvPr/>
+          </p:nvCxnSpPr>
+          <p:spPr>
+            <a:xfrm flipH="1">
+              <a:off x="161026" y="6656742"/>
+              <a:ext cx="9664" cy="168415"/>
+            </a:xfrm>
+            <a:prstGeom prst="straightConnector1">
+              <a:avLst/>
+            </a:prstGeom>
+            <a:ln w="12700">
+              <a:solidFill>
+                <a:schemeClr val="tx1"/>
+              </a:solidFill>
+              <a:tailEnd type="triangle"/>
+            </a:ln>
+          </p:spPr>
+          <p:style>
+            <a:lnRef idx="1">
+              <a:schemeClr val="accent1"/>
+            </a:lnRef>
+            <a:fillRef idx="0">
+              <a:schemeClr val="accent1"/>
+            </a:fillRef>
+            <a:effectRef idx="0">
+              <a:schemeClr val="accent1"/>
+            </a:effectRef>
+            <a:fontRef idx="minor">
+              <a:schemeClr val="tx1"/>
+            </a:fontRef>
+          </p:style>
+        </p:cxnSp>
+        <p:grpSp>
+          <p:nvGrpSpPr>
+            <p:cNvPr id="152" name="组合 151">
+              <a:extLst>
+                <a:ext uri="{FF2B5EF4-FFF2-40B4-BE49-F238E27FC236}">
+                  <a16:creationId xmlns:a16="http://schemas.microsoft.com/office/drawing/2014/main" id="{C0D16830-A530-4DDC-B8ED-162AA185B858}"/>
+                </a:ext>
+              </a:extLst>
+            </p:cNvPr>
+            <p:cNvGrpSpPr/>
+            <p:nvPr/>
+          </p:nvGrpSpPr>
+          <p:grpSpPr>
+            <a:xfrm>
+              <a:off x="1907914" y="3599002"/>
+              <a:ext cx="2924513" cy="3662858"/>
+              <a:chOff x="2028487" y="3608984"/>
+              <a:chExt cx="2924513" cy="3662858"/>
+            </a:xfrm>
+          </p:grpSpPr>
+          <p:sp>
+            <p:nvSpPr>
+              <p:cNvPr id="96" name="矩形: 圆角 95">
+                <a:extLst>
+                  <a:ext uri="{FF2B5EF4-FFF2-40B4-BE49-F238E27FC236}">
+                    <a16:creationId xmlns:a16="http://schemas.microsoft.com/office/drawing/2014/main" id="{3C4B156E-B902-4522-86C7-5164751CE45C}"/>
+                  </a:ext>
+                </a:extLst>
+              </p:cNvPr>
+              <p:cNvSpPr/>
+              <p:nvPr/>
+            </p:nvSpPr>
+            <p:spPr>
+              <a:xfrm>
+                <a:off x="2064951" y="3608984"/>
+                <a:ext cx="2888049" cy="3662858"/>
+              </a:xfrm>
+              <a:prstGeom prst="roundRect">
+                <a:avLst>
+                  <a:gd name="adj" fmla="val 3909"/>
+                </a:avLst>
+              </a:prstGeom>
+              <a:noFill/>
+              <a:ln>
+                <a:solidFill>
+                  <a:schemeClr val="tx1"/>
+                </a:solidFill>
+              </a:ln>
+            </p:spPr>
+            <p:style>
+              <a:lnRef idx="2">
+                <a:schemeClr val="accent1">
+                  <a:shade val="50000"/>
+                </a:schemeClr>
+              </a:lnRef>
+              <a:fillRef idx="1">
+                <a:schemeClr val="accent1"/>
+              </a:fillRef>
+              <a:effectRef idx="0">
+                <a:schemeClr val="accent1"/>
+              </a:effectRef>
+              <a:fontRef idx="minor">
+                <a:schemeClr val="lt1"/>
+              </a:fontRef>
+            </p:style>
+            <p:txBody>
+              <a:bodyPr rtlCol="0" anchor="ctr"/>
+              <a:lstStyle/>
+              <a:p>
+                <a:pPr algn="ctr"/>
+                <a:endParaRPr lang="zh-CN" altLang="en-US" sz="1154" dirty="0">
+                  <a:solidFill>
+                    <a:schemeClr val="tx1"/>
+                  </a:solidFill>
+                  <a:latin typeface="宋体" panose="02010600030101010101" pitchFamily="2" charset="-122"/>
+                  <a:ea typeface="宋体" panose="02010600030101010101" pitchFamily="2" charset="-122"/>
+                </a:endParaRPr>
+              </a:p>
+            </p:txBody>
+          </p:sp>
+          <p:sp>
+            <p:nvSpPr>
+              <p:cNvPr id="97" name="文本框 96">
+                <a:extLst>
+                  <a:ext uri="{FF2B5EF4-FFF2-40B4-BE49-F238E27FC236}">
+                    <a16:creationId xmlns:a16="http://schemas.microsoft.com/office/drawing/2014/main" id="{CA8BE84B-CBD3-47B2-B102-E8CEFF551AD7}"/>
+                  </a:ext>
+                </a:extLst>
+              </p:cNvPr>
+              <p:cNvSpPr txBox="1"/>
+              <p:nvPr/>
+            </p:nvSpPr>
+            <p:spPr>
+              <a:xfrm>
+                <a:off x="2028487" y="3697339"/>
+                <a:ext cx="2726659" cy="584775"/>
+              </a:xfrm>
+              <a:prstGeom prst="rect">
+                <a:avLst/>
+              </a:prstGeom>
+              <a:noFill/>
+            </p:spPr>
+            <p:txBody>
+              <a:bodyPr wrap="square" rtlCol="0">
+                <a:spAutoFit/>
+              </a:bodyPr>
+              <a:lstStyle/>
+              <a:p>
+                <a:pPr algn="ctr"/>
+                <a:r>
+                  <a:rPr lang="zh-CN" altLang="en-US" sz="1538" dirty="0">
+                    <a:latin typeface="宋体" panose="02010600030101010101" pitchFamily="2" charset="-122"/>
+                    <a:ea typeface="宋体" panose="02010600030101010101" pitchFamily="2" charset="-122"/>
+                  </a:rPr>
+                  <a:t>第四章 基于多中心聚类的无监督检测方法</a:t>
+                </a:r>
+              </a:p>
+            </p:txBody>
+          </p:sp>
+          <p:cxnSp>
+            <p:nvCxnSpPr>
+              <p:cNvPr id="98" name="直接连接符 97">
+                <a:extLst>
+                  <a:ext uri="{FF2B5EF4-FFF2-40B4-BE49-F238E27FC236}">
+                    <a16:creationId xmlns:a16="http://schemas.microsoft.com/office/drawing/2014/main" id="{CD076A62-8CC2-4AAA-A779-BFB44D8BF6C3}"/>
+                  </a:ext>
+                </a:extLst>
+              </p:cNvPr>
+              <p:cNvCxnSpPr>
+                <a:cxnSpLocks/>
+              </p:cNvCxnSpPr>
+              <p:nvPr/>
+            </p:nvCxnSpPr>
+            <p:spPr>
+              <a:xfrm>
+                <a:off x="2138488" y="4292812"/>
+                <a:ext cx="2728124" cy="15322"/>
+              </a:xfrm>
+              <a:prstGeom prst="line">
+                <a:avLst/>
+              </a:prstGeom>
+              <a:ln w="9525"/>
+            </p:spPr>
+            <p:style>
+              <a:lnRef idx="1">
+                <a:schemeClr val="dk1"/>
+              </a:lnRef>
+              <a:fillRef idx="0">
+                <a:schemeClr val="dk1"/>
+              </a:fillRef>
+              <a:effectRef idx="0">
+                <a:schemeClr val="dk1"/>
+              </a:effectRef>
+              <a:fontRef idx="minor">
+                <a:schemeClr val="tx1"/>
+              </a:fontRef>
+            </p:style>
+          </p:cxnSp>
+          <p:sp>
+            <p:nvSpPr>
+              <p:cNvPr id="99" name="矩形: 圆角 98">
+                <a:extLst>
+                  <a:ext uri="{FF2B5EF4-FFF2-40B4-BE49-F238E27FC236}">
+                    <a16:creationId xmlns:a16="http://schemas.microsoft.com/office/drawing/2014/main" id="{8CB77E3E-A773-46FB-AFFE-88BB15CCCC2C}"/>
+                  </a:ext>
+                </a:extLst>
+              </p:cNvPr>
+              <p:cNvSpPr/>
+              <p:nvPr/>
+            </p:nvSpPr>
+            <p:spPr>
+              <a:xfrm>
+                <a:off x="2953863" y="4347872"/>
+                <a:ext cx="1080923" cy="294914"/>
+              </a:xfrm>
+              <a:prstGeom prst="roundRect">
+                <a:avLst/>
+              </a:prstGeom>
+              <a:noFill/>
+              <a:ln>
+                <a:solidFill>
+                  <a:schemeClr val="tx1"/>
+                </a:solidFill>
+              </a:ln>
+            </p:spPr>
+            <p:style>
+              <a:lnRef idx="2">
+                <a:schemeClr val="accent1">
+                  <a:shade val="50000"/>
+                </a:schemeClr>
+              </a:lnRef>
+              <a:fillRef idx="1">
+                <a:schemeClr val="accent1"/>
+              </a:fillRef>
+              <a:effectRef idx="0">
+                <a:schemeClr val="accent1"/>
+              </a:effectRef>
+              <a:fontRef idx="minor">
+                <a:schemeClr val="lt1"/>
+              </a:fontRef>
+            </p:style>
+            <p:txBody>
+              <a:bodyPr rtlCol="0" anchor="ctr"/>
+              <a:lstStyle/>
+              <a:p>
+                <a:pPr algn="ctr"/>
+                <a:r>
+                  <a:rPr lang="zh-CN" altLang="zh-CN" sz="1346" dirty="0">
+                    <a:solidFill>
+                      <a:srgbClr val="000000"/>
+                    </a:solidFill>
+                    <a:latin typeface="宋体" panose="02010600030101010101" pitchFamily="2" charset="-122"/>
+                    <a:ea typeface="宋体" panose="02010600030101010101" pitchFamily="2" charset="-122"/>
+                  </a:rPr>
+                  <a:t>数据流量</a:t>
+                </a:r>
+                <a:endParaRPr lang="zh-CN" altLang="zh-CN" sz="1010" dirty="0"/>
+              </a:p>
+            </p:txBody>
+          </p:sp>
+          <p:sp>
+            <p:nvSpPr>
+              <p:cNvPr id="101" name="矩形: 圆角 100">
+                <a:extLst>
+                  <a:ext uri="{FF2B5EF4-FFF2-40B4-BE49-F238E27FC236}">
+                    <a16:creationId xmlns:a16="http://schemas.microsoft.com/office/drawing/2014/main" id="{1737B92D-3C52-49B8-972D-7D9E0414C70B}"/>
+                  </a:ext>
+                </a:extLst>
+              </p:cNvPr>
+              <p:cNvSpPr/>
+              <p:nvPr/>
+            </p:nvSpPr>
+            <p:spPr>
+              <a:xfrm>
+                <a:off x="2525482" y="4996604"/>
+                <a:ext cx="1934085" cy="313711"/>
+              </a:xfrm>
+              <a:prstGeom prst="roundRect">
+                <a:avLst/>
+              </a:prstGeom>
+              <a:noFill/>
+              <a:ln>
+                <a:solidFill>
+                  <a:schemeClr val="tx1"/>
+                </a:solidFill>
+              </a:ln>
+            </p:spPr>
+            <p:style>
+              <a:lnRef idx="2">
+                <a:schemeClr val="accent1">
+                  <a:shade val="50000"/>
+                </a:schemeClr>
+              </a:lnRef>
+              <a:fillRef idx="1">
+                <a:schemeClr val="accent1"/>
+              </a:fillRef>
+              <a:effectRef idx="0">
+                <a:schemeClr val="accent1"/>
+              </a:effectRef>
+              <a:fontRef idx="minor">
+                <a:schemeClr val="lt1"/>
+              </a:fontRef>
+            </p:style>
+            <p:txBody>
+              <a:bodyPr rtlCol="0" anchor="ctr"/>
+              <a:lstStyle/>
+              <a:p>
+                <a:pPr algn="ctr"/>
+                <a:r>
+                  <a:rPr lang="en-US" altLang="zh-CN" sz="1346" dirty="0">
+                    <a:solidFill>
+                      <a:srgbClr val="000000"/>
+                    </a:solidFill>
+                    <a:latin typeface="宋体" panose="02010600030101010101" pitchFamily="2" charset="-122"/>
+                    <a:ea typeface="宋体" panose="02010600030101010101" pitchFamily="2" charset="-122"/>
+                  </a:rPr>
+                  <a:t>MaskTST</a:t>
+                </a:r>
+                <a:r>
+                  <a:rPr lang="zh-CN" altLang="en-US" sz="1346" dirty="0">
+                    <a:solidFill>
+                      <a:srgbClr val="000000"/>
+                    </a:solidFill>
+                    <a:latin typeface="宋体" panose="02010600030101010101" pitchFamily="2" charset="-122"/>
+                    <a:ea typeface="宋体" panose="02010600030101010101" pitchFamily="2" charset="-122"/>
+                  </a:rPr>
+                  <a:t>编码重构数据</a:t>
+                </a:r>
+                <a:endParaRPr lang="zh-CN" altLang="zh-CN" sz="1010" dirty="0"/>
+              </a:p>
+            </p:txBody>
+          </p:sp>
+          <p:sp>
+            <p:nvSpPr>
+              <p:cNvPr id="102" name="矩形: 圆角 101">
+                <a:extLst>
+                  <a:ext uri="{FF2B5EF4-FFF2-40B4-BE49-F238E27FC236}">
+                    <a16:creationId xmlns:a16="http://schemas.microsoft.com/office/drawing/2014/main" id="{616ACDFD-C5ED-42B7-8A5D-91E18CD0020C}"/>
+                  </a:ext>
+                </a:extLst>
+              </p:cNvPr>
+              <p:cNvSpPr/>
+              <p:nvPr/>
+            </p:nvSpPr>
+            <p:spPr>
+              <a:xfrm>
+                <a:off x="2139024" y="5696814"/>
+                <a:ext cx="1328452" cy="299631"/>
+              </a:xfrm>
+              <a:prstGeom prst="roundRect">
+                <a:avLst/>
+              </a:prstGeom>
+              <a:noFill/>
+              <a:ln>
+                <a:solidFill>
+                  <a:schemeClr val="tx1"/>
+                </a:solidFill>
+              </a:ln>
+            </p:spPr>
+            <p:style>
+              <a:lnRef idx="2">
+                <a:schemeClr val="accent1">
+                  <a:shade val="50000"/>
+                </a:schemeClr>
+              </a:lnRef>
+              <a:fillRef idx="1">
+                <a:schemeClr val="accent1"/>
+              </a:fillRef>
+              <a:effectRef idx="0">
+                <a:schemeClr val="accent1"/>
+              </a:effectRef>
+              <a:fontRef idx="minor">
+                <a:schemeClr val="lt1"/>
+              </a:fontRef>
+            </p:style>
+            <p:txBody>
+              <a:bodyPr rtlCol="0" anchor="ctr"/>
+              <a:lstStyle/>
+              <a:p>
+                <a:pPr algn="ctr"/>
+                <a:r>
+                  <a:rPr lang="zh-CN" altLang="en-US" sz="1346" dirty="0">
+                    <a:solidFill>
+                      <a:srgbClr val="000000"/>
+                    </a:solidFill>
+                    <a:latin typeface="宋体" panose="02010600030101010101" pitchFamily="2" charset="-122"/>
+                    <a:ea typeface="宋体" panose="02010600030101010101" pitchFamily="2" charset="-122"/>
+                  </a:rPr>
+                  <a:t>特征中心更新</a:t>
+                </a:r>
+                <a:endParaRPr lang="zh-CN" altLang="zh-CN" sz="1010" dirty="0"/>
+              </a:p>
+            </p:txBody>
+          </p:sp>
+          <p:sp>
+            <p:nvSpPr>
+              <p:cNvPr id="103" name="矩形: 圆角 102">
+                <a:extLst>
+                  <a:ext uri="{FF2B5EF4-FFF2-40B4-BE49-F238E27FC236}">
+                    <a16:creationId xmlns:a16="http://schemas.microsoft.com/office/drawing/2014/main" id="{869B4D01-9F7D-41B6-9A6D-D03EDEBD02CC}"/>
+                  </a:ext>
+                </a:extLst>
+              </p:cNvPr>
+              <p:cNvSpPr/>
+              <p:nvPr/>
+            </p:nvSpPr>
+            <p:spPr>
+              <a:xfrm>
+                <a:off x="3587499" y="5699564"/>
+                <a:ext cx="1307833" cy="299631"/>
+              </a:xfrm>
+              <a:prstGeom prst="roundRect">
+                <a:avLst/>
+              </a:prstGeom>
+              <a:noFill/>
+              <a:ln>
+                <a:solidFill>
+                  <a:schemeClr val="tx1"/>
+                </a:solidFill>
+              </a:ln>
+            </p:spPr>
+            <p:style>
+              <a:lnRef idx="2">
+                <a:schemeClr val="accent1">
+                  <a:shade val="50000"/>
+                </a:schemeClr>
+              </a:lnRef>
+              <a:fillRef idx="1">
+                <a:schemeClr val="accent1"/>
+              </a:fillRef>
+              <a:effectRef idx="0">
+                <a:schemeClr val="accent1"/>
+              </a:effectRef>
+              <a:fontRef idx="minor">
+                <a:schemeClr val="lt1"/>
+              </a:fontRef>
+            </p:style>
+            <p:txBody>
+              <a:bodyPr rtlCol="0" anchor="ctr"/>
+              <a:lstStyle/>
+              <a:p>
+                <a:pPr algn="ctr"/>
+                <a:r>
+                  <a:rPr lang="zh-CN" altLang="en-US" sz="1346" dirty="0">
+                    <a:solidFill>
+                      <a:srgbClr val="000000"/>
+                    </a:solidFill>
+                    <a:latin typeface="宋体" panose="02010600030101010101" pitchFamily="2" charset="-122"/>
+                    <a:ea typeface="宋体" panose="02010600030101010101" pitchFamily="2" charset="-122"/>
+                  </a:rPr>
+                  <a:t>距离向量权重</a:t>
+                </a:r>
+                <a:endParaRPr lang="en-US" altLang="zh-CN" sz="1346" dirty="0">
+                  <a:solidFill>
+                    <a:srgbClr val="000000"/>
+                  </a:solidFill>
+                  <a:latin typeface="宋体" panose="02010600030101010101" pitchFamily="2" charset="-122"/>
+                  <a:ea typeface="宋体" panose="02010600030101010101" pitchFamily="2" charset="-122"/>
+                </a:endParaRPr>
+              </a:p>
+            </p:txBody>
+          </p:sp>
+          <p:sp>
+            <p:nvSpPr>
+              <p:cNvPr id="104" name="矩形: 圆角 103">
+                <a:extLst>
+                  <a:ext uri="{FF2B5EF4-FFF2-40B4-BE49-F238E27FC236}">
+                    <a16:creationId xmlns:a16="http://schemas.microsoft.com/office/drawing/2014/main" id="{95B06566-44CB-4DC0-B557-498E32A7DEC3}"/>
+                  </a:ext>
+                </a:extLst>
+              </p:cNvPr>
+              <p:cNvSpPr/>
+              <p:nvPr/>
+            </p:nvSpPr>
+            <p:spPr>
+              <a:xfrm>
+                <a:off x="2965519" y="6367093"/>
+                <a:ext cx="1200144" cy="299631"/>
+              </a:xfrm>
+              <a:prstGeom prst="roundRect">
+                <a:avLst/>
+              </a:prstGeom>
+              <a:noFill/>
+              <a:ln>
+                <a:solidFill>
+                  <a:schemeClr val="tx1"/>
+                </a:solidFill>
+              </a:ln>
+            </p:spPr>
+            <p:style>
+              <a:lnRef idx="2">
+                <a:schemeClr val="accent1">
+                  <a:shade val="50000"/>
+                </a:schemeClr>
+              </a:lnRef>
+              <a:fillRef idx="1">
+                <a:schemeClr val="accent1"/>
+              </a:fillRef>
+              <a:effectRef idx="0">
+                <a:schemeClr val="accent1"/>
+              </a:effectRef>
+              <a:fontRef idx="minor">
+                <a:schemeClr val="lt1"/>
+              </a:fontRef>
+            </p:style>
+            <p:txBody>
+              <a:bodyPr rtlCol="0" anchor="ctr"/>
+              <a:lstStyle/>
+              <a:p>
+                <a:pPr algn="ctr"/>
+                <a:r>
+                  <a:rPr lang="zh-CN" altLang="en-US" sz="1346" dirty="0">
+                    <a:solidFill>
+                      <a:srgbClr val="000000"/>
+                    </a:solidFill>
+                    <a:latin typeface="宋体" panose="02010600030101010101" pitchFamily="2" charset="-122"/>
+                    <a:ea typeface="宋体" panose="02010600030101010101" pitchFamily="2" charset="-122"/>
+                  </a:rPr>
+                  <a:t>损失与权重</a:t>
+                </a:r>
+                <a:endParaRPr lang="zh-CN" altLang="zh-CN" sz="1010" dirty="0"/>
+              </a:p>
+            </p:txBody>
+          </p:sp>
+          <p:sp>
+            <p:nvSpPr>
+              <p:cNvPr id="105" name="矩形: 圆角 104">
+                <a:extLst>
+                  <a:ext uri="{FF2B5EF4-FFF2-40B4-BE49-F238E27FC236}">
+                    <a16:creationId xmlns:a16="http://schemas.microsoft.com/office/drawing/2014/main" id="{480AC361-79AD-460A-BF77-6738C5225A77}"/>
+                  </a:ext>
+                </a:extLst>
+              </p:cNvPr>
+              <p:cNvSpPr/>
+              <p:nvPr/>
+            </p:nvSpPr>
+            <p:spPr>
+              <a:xfrm>
+                <a:off x="3019077" y="6835139"/>
+                <a:ext cx="1110914" cy="299631"/>
+              </a:xfrm>
+              <a:prstGeom prst="roundRect">
+                <a:avLst/>
+              </a:prstGeom>
+              <a:noFill/>
+              <a:ln>
+                <a:solidFill>
+                  <a:schemeClr val="tx1"/>
+                </a:solidFill>
+              </a:ln>
+            </p:spPr>
+            <p:style>
+              <a:lnRef idx="2">
+                <a:schemeClr val="accent1">
+                  <a:shade val="50000"/>
+                </a:schemeClr>
+              </a:lnRef>
+              <a:fillRef idx="1">
+                <a:schemeClr val="accent1"/>
+              </a:fillRef>
+              <a:effectRef idx="0">
+                <a:schemeClr val="accent1"/>
+              </a:effectRef>
+              <a:fontRef idx="minor">
+                <a:schemeClr val="lt1"/>
+              </a:fontRef>
+            </p:style>
+            <p:txBody>
+              <a:bodyPr rtlCol="0" anchor="ctr"/>
+              <a:lstStyle/>
+              <a:p>
+                <a:pPr algn="ctr"/>
+                <a:r>
+                  <a:rPr lang="zh-CN" altLang="en-US" sz="1346" dirty="0">
+                    <a:solidFill>
+                      <a:srgbClr val="000000"/>
+                    </a:solidFill>
+                    <a:latin typeface="宋体" panose="02010600030101010101" pitchFamily="2" charset="-122"/>
+                    <a:ea typeface="宋体" panose="02010600030101010101" pitchFamily="2" charset="-122"/>
+                  </a:rPr>
+                  <a:t>异常分类</a:t>
+                </a:r>
+                <a:endParaRPr lang="zh-CN" altLang="zh-CN" sz="1010" dirty="0"/>
+              </a:p>
+            </p:txBody>
+          </p:sp>
+          <p:cxnSp>
+            <p:nvCxnSpPr>
+              <p:cNvPr id="107" name="直接箭头连接符 106">
+                <a:extLst>
+                  <a:ext uri="{FF2B5EF4-FFF2-40B4-BE49-F238E27FC236}">
+                    <a16:creationId xmlns:a16="http://schemas.microsoft.com/office/drawing/2014/main" id="{E4471B94-FA58-4AE3-97F2-C3BA4B6689A6}"/>
+                  </a:ext>
+                </a:extLst>
+              </p:cNvPr>
+              <p:cNvCxnSpPr>
+                <a:cxnSpLocks/>
+                <a:stCxn id="99" idx="2"/>
+                <a:endCxn id="101" idx="0"/>
+              </p:cNvCxnSpPr>
+              <p:nvPr/>
+            </p:nvCxnSpPr>
+            <p:spPr>
+              <a:xfrm flipH="1">
+                <a:off x="3492525" y="4642786"/>
+                <a:ext cx="1800" cy="353818"/>
+              </a:xfrm>
+              <a:prstGeom prst="straightConnector1">
+                <a:avLst/>
+              </a:prstGeom>
+              <a:ln w="12700">
+                <a:solidFill>
+                  <a:schemeClr val="tx1"/>
+                </a:solidFill>
+                <a:tailEnd type="triangle"/>
+              </a:ln>
+            </p:spPr>
+            <p:style>
+              <a:lnRef idx="1">
+                <a:schemeClr val="accent1"/>
+              </a:lnRef>
+              <a:fillRef idx="0">
+                <a:schemeClr val="accent1"/>
+              </a:fillRef>
+              <a:effectRef idx="0">
+                <a:schemeClr val="accent1"/>
+              </a:effectRef>
+              <a:fontRef idx="minor">
+                <a:schemeClr val="tx1"/>
+              </a:fontRef>
+            </p:style>
+          </p:cxnSp>
+          <p:cxnSp>
+            <p:nvCxnSpPr>
+              <p:cNvPr id="110" name="连接符: 肘形 109">
+                <a:extLst>
+                  <a:ext uri="{FF2B5EF4-FFF2-40B4-BE49-F238E27FC236}">
+                    <a16:creationId xmlns:a16="http://schemas.microsoft.com/office/drawing/2014/main" id="{979BB925-8D49-48A8-8A75-17F730C4CCF1}"/>
+                  </a:ext>
+                </a:extLst>
+              </p:cNvPr>
+              <p:cNvCxnSpPr>
+                <a:cxnSpLocks/>
+                <a:stCxn id="102" idx="2"/>
+                <a:endCxn id="104" idx="0"/>
+              </p:cNvCxnSpPr>
+              <p:nvPr/>
+            </p:nvCxnSpPr>
+            <p:spPr>
+              <a:xfrm rot="16200000" flipH="1">
+                <a:off x="2999096" y="5800597"/>
+                <a:ext cx="370648" cy="762342"/>
+              </a:xfrm>
+              <a:prstGeom prst="bentConnector3">
+                <a:avLst>
+                  <a:gd name="adj1" fmla="val 52138"/>
+                </a:avLst>
+              </a:prstGeom>
+              <a:ln w="12700">
+                <a:solidFill>
+                  <a:schemeClr val="tx1"/>
+                </a:solidFill>
+                <a:tailEnd type="triangle"/>
+              </a:ln>
+            </p:spPr>
+            <p:style>
+              <a:lnRef idx="1">
+                <a:schemeClr val="accent1"/>
+              </a:lnRef>
+              <a:fillRef idx="0">
+                <a:schemeClr val="accent1"/>
+              </a:fillRef>
+              <a:effectRef idx="0">
+                <a:schemeClr val="accent1"/>
+              </a:effectRef>
+              <a:fontRef idx="minor">
+                <a:schemeClr val="tx1"/>
+              </a:fontRef>
+            </p:style>
+          </p:cxnSp>
+          <p:cxnSp>
+            <p:nvCxnSpPr>
+              <p:cNvPr id="111" name="连接符: 肘形 110">
+                <a:extLst>
+                  <a:ext uri="{FF2B5EF4-FFF2-40B4-BE49-F238E27FC236}">
+                    <a16:creationId xmlns:a16="http://schemas.microsoft.com/office/drawing/2014/main" id="{11AB1783-9E07-4DE2-A673-496DCF92E5BF}"/>
+                  </a:ext>
+                </a:extLst>
+              </p:cNvPr>
+              <p:cNvCxnSpPr>
+                <a:cxnSpLocks/>
+                <a:stCxn id="103" idx="2"/>
+                <a:endCxn id="104" idx="0"/>
+              </p:cNvCxnSpPr>
+              <p:nvPr/>
+            </p:nvCxnSpPr>
+            <p:spPr>
+              <a:xfrm rot="5400000">
+                <a:off x="3719555" y="5845232"/>
+                <a:ext cx="367897" cy="675824"/>
+              </a:xfrm>
+              <a:prstGeom prst="bentConnector3">
+                <a:avLst>
+                  <a:gd name="adj1" fmla="val 50000"/>
+                </a:avLst>
+              </a:prstGeom>
+              <a:ln w="12700">
+                <a:solidFill>
+                  <a:schemeClr val="tx1"/>
+                </a:solidFill>
+                <a:tailEnd type="triangle"/>
+              </a:ln>
+            </p:spPr>
+            <p:style>
+              <a:lnRef idx="1">
+                <a:schemeClr val="accent1"/>
+              </a:lnRef>
+              <a:fillRef idx="0">
+                <a:schemeClr val="accent1"/>
+              </a:fillRef>
+              <a:effectRef idx="0">
+                <a:schemeClr val="accent1"/>
+              </a:effectRef>
+              <a:fontRef idx="minor">
+                <a:schemeClr val="tx1"/>
+              </a:fontRef>
+            </p:style>
+          </p:cxnSp>
+          <p:cxnSp>
+            <p:nvCxnSpPr>
+              <p:cNvPr id="112" name="直接箭头连接符 111">
+                <a:extLst>
+                  <a:ext uri="{FF2B5EF4-FFF2-40B4-BE49-F238E27FC236}">
+                    <a16:creationId xmlns:a16="http://schemas.microsoft.com/office/drawing/2014/main" id="{5EAF97E6-3538-4A9C-AEE7-DD54EBFE6D8C}"/>
+                  </a:ext>
+                </a:extLst>
+              </p:cNvPr>
+              <p:cNvCxnSpPr>
+                <a:cxnSpLocks/>
+                <a:stCxn id="104" idx="2"/>
+                <a:endCxn id="105" idx="0"/>
+              </p:cNvCxnSpPr>
+              <p:nvPr/>
+            </p:nvCxnSpPr>
+            <p:spPr>
+              <a:xfrm>
+                <a:off x="3565592" y="6666724"/>
+                <a:ext cx="8943" cy="168415"/>
+              </a:xfrm>
+              <a:prstGeom prst="straightConnector1">
+                <a:avLst/>
+              </a:prstGeom>
+              <a:ln w="12700">
+                <a:solidFill>
+                  <a:schemeClr val="tx1"/>
+                </a:solidFill>
+                <a:tailEnd type="triangle"/>
+              </a:ln>
+            </p:spPr>
+            <p:style>
+              <a:lnRef idx="1">
+                <a:schemeClr val="accent1"/>
+              </a:lnRef>
+              <a:fillRef idx="0">
+                <a:schemeClr val="accent1"/>
+              </a:fillRef>
+              <a:effectRef idx="0">
+                <a:schemeClr val="accent1"/>
+              </a:effectRef>
+              <a:fontRef idx="minor">
+                <a:schemeClr val="tx1"/>
+              </a:fontRef>
+            </p:style>
+          </p:cxnSp>
+          <p:cxnSp>
+            <p:nvCxnSpPr>
+              <p:cNvPr id="124" name="连接符: 肘形 123">
+                <a:extLst>
+                  <a:ext uri="{FF2B5EF4-FFF2-40B4-BE49-F238E27FC236}">
+                    <a16:creationId xmlns:a16="http://schemas.microsoft.com/office/drawing/2014/main" id="{88512453-91EA-4068-A1F1-CEAE99FC20D2}"/>
+                  </a:ext>
+                </a:extLst>
+              </p:cNvPr>
+              <p:cNvCxnSpPr>
+                <a:cxnSpLocks/>
+                <a:stCxn id="101" idx="2"/>
+                <a:endCxn id="102" idx="0"/>
+              </p:cNvCxnSpPr>
+              <p:nvPr/>
+            </p:nvCxnSpPr>
+            <p:spPr>
+              <a:xfrm rot="5400000">
+                <a:off x="2954639" y="5158928"/>
+                <a:ext cx="386498" cy="689275"/>
+              </a:xfrm>
+              <a:prstGeom prst="bentConnector3">
+                <a:avLst/>
+              </a:prstGeom>
+              <a:ln w="12700">
+                <a:solidFill>
+                  <a:schemeClr val="tx1"/>
+                </a:solidFill>
+                <a:tailEnd type="triangle"/>
+              </a:ln>
+            </p:spPr>
+            <p:style>
+              <a:lnRef idx="1">
+                <a:schemeClr val="accent1"/>
+              </a:lnRef>
+              <a:fillRef idx="0">
+                <a:schemeClr val="accent1"/>
+              </a:fillRef>
+              <a:effectRef idx="0">
+                <a:schemeClr val="accent1"/>
+              </a:effectRef>
+              <a:fontRef idx="minor">
+                <a:schemeClr val="tx1"/>
+              </a:fontRef>
+            </p:style>
+          </p:cxnSp>
+          <p:cxnSp>
+            <p:nvCxnSpPr>
+              <p:cNvPr id="127" name="连接符: 肘形 126">
+                <a:extLst>
+                  <a:ext uri="{FF2B5EF4-FFF2-40B4-BE49-F238E27FC236}">
+                    <a16:creationId xmlns:a16="http://schemas.microsoft.com/office/drawing/2014/main" id="{0C1294A7-09DB-49B5-8321-E56F60E82976}"/>
+                  </a:ext>
+                </a:extLst>
+              </p:cNvPr>
+              <p:cNvCxnSpPr>
+                <a:cxnSpLocks/>
+                <a:stCxn id="101" idx="2"/>
+                <a:endCxn id="103" idx="0"/>
+              </p:cNvCxnSpPr>
+              <p:nvPr/>
+            </p:nvCxnSpPr>
+            <p:spPr>
+              <a:xfrm rot="16200000" flipH="1">
+                <a:off x="3672346" y="5130494"/>
+                <a:ext cx="389249" cy="748891"/>
+              </a:xfrm>
+              <a:prstGeom prst="bentConnector3">
+                <a:avLst>
+                  <a:gd name="adj1" fmla="val 50000"/>
+                </a:avLst>
+              </a:prstGeom>
+              <a:ln w="12700">
+                <a:solidFill>
+                  <a:schemeClr val="tx1"/>
+                </a:solidFill>
+                <a:tailEnd type="triangle"/>
+              </a:ln>
+            </p:spPr>
+            <p:style>
+              <a:lnRef idx="1">
+                <a:schemeClr val="accent1"/>
+              </a:lnRef>
+              <a:fillRef idx="0">
+                <a:schemeClr val="accent1"/>
+              </a:fillRef>
+              <a:effectRef idx="0">
+                <a:schemeClr val="accent1"/>
+              </a:effectRef>
+              <a:fontRef idx="minor">
+                <a:schemeClr val="tx1"/>
+              </a:fontRef>
+            </p:style>
+          </p:cxnSp>
+        </p:grpSp>
+        <p:sp>
+          <p:nvSpPr>
+            <p:cNvPr id="134" name="矩形: 圆角 133">
+              <a:extLst>
+                <a:ext uri="{FF2B5EF4-FFF2-40B4-BE49-F238E27FC236}">
+                  <a16:creationId xmlns:a16="http://schemas.microsoft.com/office/drawing/2014/main" id="{0FE52E42-95D3-4031-B9B6-CAE782158190}"/>
+                </a:ext>
+              </a:extLst>
+            </p:cNvPr>
+            <p:cNvSpPr/>
+            <p:nvPr/>
+          </p:nvSpPr>
+          <p:spPr>
+            <a:xfrm>
+              <a:off x="4931135" y="3599002"/>
+              <a:ext cx="2749823" cy="3662858"/>
+            </a:xfrm>
+            <a:prstGeom prst="roundRect">
+              <a:avLst>
+                <a:gd name="adj" fmla="val 3909"/>
+              </a:avLst>
+            </a:prstGeom>
+            <a:noFill/>
+            <a:ln>
+              <a:solidFill>
+                <a:schemeClr val="tx1"/>
+              </a:solidFill>
+            </a:ln>
+          </p:spPr>
+          <p:style>
+            <a:lnRef idx="2">
+              <a:schemeClr val="accent1">
+                <a:shade val="50000"/>
+              </a:schemeClr>
+            </a:lnRef>
+            <a:fillRef idx="1">
+              <a:schemeClr val="accent1"/>
+            </a:fillRef>
+            <a:effectRef idx="0">
+              <a:schemeClr val="accent1"/>
+            </a:effectRef>
+            <a:fontRef idx="minor">
+              <a:schemeClr val="lt1"/>
+            </a:fontRef>
+          </p:style>
+          <p:txBody>
+            <a:bodyPr rtlCol="0" anchor="ctr"/>
+            <a:lstStyle/>
+            <a:p>
+              <a:pPr algn="ctr"/>
+              <a:endParaRPr lang="zh-CN" altLang="en-US" sz="1154" dirty="0">
                 <a:solidFill>
                   <a:schemeClr val="tx1"/>
                 </a:solidFill>
                 <a:latin typeface="宋体" panose="02010600030101010101" pitchFamily="2" charset="-122"/>
                 <a:ea typeface="宋体" panose="02010600030101010101" pitchFamily="2" charset="-122"/>
-              </a:rPr>
-              <a:t>第三章：基于多样性加权的无监督超球体网络流量异常检测方法</a:t>
-            </a:r>
-          </a:p>
-        </p:txBody>
-      </p:sp>
+              </a:endParaRPr>
+            </a:p>
+          </p:txBody>
+        </p:sp>
+        <p:sp>
+          <p:nvSpPr>
+            <p:cNvPr id="135" name="文本框 134">
+              <a:extLst>
+                <a:ext uri="{FF2B5EF4-FFF2-40B4-BE49-F238E27FC236}">
+                  <a16:creationId xmlns:a16="http://schemas.microsoft.com/office/drawing/2014/main" id="{5592EC94-4DBE-4389-A646-99978C055434}"/>
+                </a:ext>
+              </a:extLst>
+            </p:cNvPr>
+            <p:cNvSpPr txBox="1"/>
+            <p:nvPr/>
+          </p:nvSpPr>
+          <p:spPr>
+            <a:xfrm>
+              <a:off x="5028026" y="3687357"/>
+              <a:ext cx="2333487" cy="584775"/>
+            </a:xfrm>
+            <a:prstGeom prst="rect">
+              <a:avLst/>
+            </a:prstGeom>
+            <a:noFill/>
+          </p:spPr>
+          <p:txBody>
+            <a:bodyPr wrap="square" rtlCol="0">
+              <a:spAutoFit/>
+            </a:bodyPr>
+            <a:lstStyle/>
+            <a:p>
+              <a:pPr algn="ctr"/>
+              <a:r>
+                <a:rPr lang="zh-CN" altLang="en-US" sz="1538" dirty="0">
+                  <a:latin typeface="宋体" panose="02010600030101010101" pitchFamily="2" charset="-122"/>
+                  <a:ea typeface="宋体" panose="02010600030101010101" pitchFamily="2" charset="-122"/>
+                </a:rPr>
+                <a:t>第五章 设计并实现异常流量检测系统</a:t>
+              </a:r>
+            </a:p>
+          </p:txBody>
+        </p:sp>
+        <p:cxnSp>
+          <p:nvCxnSpPr>
+            <p:cNvPr id="136" name="直接连接符 135">
+              <a:extLst>
+                <a:ext uri="{FF2B5EF4-FFF2-40B4-BE49-F238E27FC236}">
+                  <a16:creationId xmlns:a16="http://schemas.microsoft.com/office/drawing/2014/main" id="{9EF481F8-5FE8-4D8D-A844-013D2C559A54}"/>
+                </a:ext>
+              </a:extLst>
+            </p:cNvPr>
+            <p:cNvCxnSpPr>
+              <a:cxnSpLocks/>
+            </p:cNvCxnSpPr>
+            <p:nvPr/>
+          </p:nvCxnSpPr>
+          <p:spPr>
+            <a:xfrm>
+              <a:off x="4991497" y="4292812"/>
+              <a:ext cx="2650418" cy="0"/>
+            </a:xfrm>
+            <a:prstGeom prst="line">
+              <a:avLst/>
+            </a:prstGeom>
+            <a:ln w="9525"/>
+          </p:spPr>
+          <p:style>
+            <a:lnRef idx="1">
+              <a:schemeClr val="dk1"/>
+            </a:lnRef>
+            <a:fillRef idx="0">
+              <a:schemeClr val="dk1"/>
+            </a:fillRef>
+            <a:effectRef idx="0">
+              <a:schemeClr val="dk1"/>
+            </a:effectRef>
+            <a:fontRef idx="minor">
+              <a:schemeClr val="tx1"/>
+            </a:fontRef>
+          </p:style>
+        </p:cxnSp>
+        <p:sp>
+          <p:nvSpPr>
+            <p:cNvPr id="137" name="矩形: 圆角 136">
+              <a:extLst>
+                <a:ext uri="{FF2B5EF4-FFF2-40B4-BE49-F238E27FC236}">
+                  <a16:creationId xmlns:a16="http://schemas.microsoft.com/office/drawing/2014/main" id="{02FCF5B4-E8E5-4E97-B1E3-221BE6108030}"/>
+                </a:ext>
+              </a:extLst>
+            </p:cNvPr>
+            <p:cNvSpPr/>
+            <p:nvPr/>
+          </p:nvSpPr>
+          <p:spPr>
+            <a:xfrm>
+              <a:off x="5272466" y="4408335"/>
+              <a:ext cx="925059" cy="294914"/>
+            </a:xfrm>
+            <a:prstGeom prst="roundRect">
+              <a:avLst/>
+            </a:prstGeom>
+            <a:noFill/>
+            <a:ln>
+              <a:solidFill>
+                <a:schemeClr val="tx1"/>
+              </a:solidFill>
+            </a:ln>
+          </p:spPr>
+          <p:style>
+            <a:lnRef idx="2">
+              <a:schemeClr val="accent1">
+                <a:shade val="50000"/>
+              </a:schemeClr>
+            </a:lnRef>
+            <a:fillRef idx="1">
+              <a:schemeClr val="accent1"/>
+            </a:fillRef>
+            <a:effectRef idx="0">
+              <a:schemeClr val="accent1"/>
+            </a:effectRef>
+            <a:fontRef idx="minor">
+              <a:schemeClr val="lt1"/>
+            </a:fontRef>
+          </p:style>
+          <p:txBody>
+            <a:bodyPr rtlCol="0" anchor="ctr"/>
+            <a:lstStyle/>
+            <a:p>
+              <a:pPr algn="ctr"/>
+              <a:r>
+                <a:rPr lang="zh-CN" altLang="en-US" sz="1346" dirty="0">
+                  <a:solidFill>
+                    <a:srgbClr val="000000"/>
+                  </a:solidFill>
+                  <a:latin typeface="宋体" panose="02010600030101010101" pitchFamily="2" charset="-122"/>
+                  <a:ea typeface="宋体" panose="02010600030101010101" pitchFamily="2" charset="-122"/>
+                </a:rPr>
+                <a:t>应用层</a:t>
+              </a:r>
+              <a:endParaRPr lang="zh-CN" altLang="zh-CN" sz="1010" dirty="0"/>
+            </a:p>
+          </p:txBody>
+        </p:sp>
+        <p:sp>
+          <p:nvSpPr>
+            <p:cNvPr id="138" name="矩形: 圆角 137">
+              <a:extLst>
+                <a:ext uri="{FF2B5EF4-FFF2-40B4-BE49-F238E27FC236}">
+                  <a16:creationId xmlns:a16="http://schemas.microsoft.com/office/drawing/2014/main" id="{C1C16C2F-22ED-40B4-BE46-C29FDC98435E}"/>
+                </a:ext>
+              </a:extLst>
+            </p:cNvPr>
+            <p:cNvSpPr/>
+            <p:nvPr/>
+          </p:nvSpPr>
+          <p:spPr>
+            <a:xfrm>
+              <a:off x="5270235" y="4904667"/>
+              <a:ext cx="925059" cy="313711"/>
+            </a:xfrm>
+            <a:prstGeom prst="roundRect">
+              <a:avLst/>
+            </a:prstGeom>
+            <a:noFill/>
+            <a:ln>
+              <a:solidFill>
+                <a:schemeClr val="tx1"/>
+              </a:solidFill>
+            </a:ln>
+          </p:spPr>
+          <p:style>
+            <a:lnRef idx="2">
+              <a:schemeClr val="accent1">
+                <a:shade val="50000"/>
+              </a:schemeClr>
+            </a:lnRef>
+            <a:fillRef idx="1">
+              <a:schemeClr val="accent1"/>
+            </a:fillRef>
+            <a:effectRef idx="0">
+              <a:schemeClr val="accent1"/>
+            </a:effectRef>
+            <a:fontRef idx="minor">
+              <a:schemeClr val="lt1"/>
+            </a:fontRef>
+          </p:style>
+          <p:txBody>
+            <a:bodyPr rtlCol="0" anchor="ctr"/>
+            <a:lstStyle/>
+            <a:p>
+              <a:pPr algn="ctr"/>
+              <a:r>
+                <a:rPr lang="zh-CN" altLang="en-US" sz="1346" dirty="0">
+                  <a:solidFill>
+                    <a:srgbClr val="000000"/>
+                  </a:solidFill>
+                  <a:latin typeface="宋体" panose="02010600030101010101" pitchFamily="2" charset="-122"/>
+                  <a:ea typeface="宋体" panose="02010600030101010101" pitchFamily="2" charset="-122"/>
+                </a:rPr>
+                <a:t>业务层</a:t>
+              </a:r>
+              <a:endParaRPr lang="zh-CN" altLang="zh-CN" sz="1010" dirty="0"/>
+            </a:p>
+          </p:txBody>
+        </p:sp>
+        <p:sp>
+          <p:nvSpPr>
+            <p:cNvPr id="139" name="矩形: 圆角 138">
+              <a:extLst>
+                <a:ext uri="{FF2B5EF4-FFF2-40B4-BE49-F238E27FC236}">
+                  <a16:creationId xmlns:a16="http://schemas.microsoft.com/office/drawing/2014/main" id="{997B265C-F389-4A2E-A5E4-113E18A823C0}"/>
+                </a:ext>
+              </a:extLst>
+            </p:cNvPr>
+            <p:cNvSpPr/>
+            <p:nvPr/>
+          </p:nvSpPr>
+          <p:spPr>
+            <a:xfrm>
+              <a:off x="5096812" y="5447144"/>
+              <a:ext cx="1270734" cy="299631"/>
+            </a:xfrm>
+            <a:prstGeom prst="roundRect">
+              <a:avLst/>
+            </a:prstGeom>
+            <a:noFill/>
+            <a:ln>
+              <a:solidFill>
+                <a:schemeClr val="tx1"/>
+              </a:solidFill>
+            </a:ln>
+          </p:spPr>
+          <p:style>
+            <a:lnRef idx="2">
+              <a:schemeClr val="accent1">
+                <a:shade val="50000"/>
+              </a:schemeClr>
+            </a:lnRef>
+            <a:fillRef idx="1">
+              <a:schemeClr val="accent1"/>
+            </a:fillRef>
+            <a:effectRef idx="0">
+              <a:schemeClr val="accent1"/>
+            </a:effectRef>
+            <a:fontRef idx="minor">
+              <a:schemeClr val="lt1"/>
+            </a:fontRef>
+          </p:style>
+          <p:txBody>
+            <a:bodyPr rtlCol="0" anchor="ctr"/>
+            <a:lstStyle/>
+            <a:p>
+              <a:pPr algn="ctr"/>
+              <a:r>
+                <a:rPr lang="zh-CN" altLang="en-US" sz="1346" dirty="0">
+                  <a:solidFill>
+                    <a:srgbClr val="000000"/>
+                  </a:solidFill>
+                  <a:latin typeface="宋体" panose="02010600030101010101" pitchFamily="2" charset="-122"/>
+                  <a:ea typeface="宋体" panose="02010600030101010101" pitchFamily="2" charset="-122"/>
+                </a:rPr>
+                <a:t>分析检测层</a:t>
+              </a:r>
+              <a:endParaRPr lang="zh-CN" altLang="zh-CN" sz="1010" dirty="0"/>
+            </a:p>
+          </p:txBody>
+        </p:sp>
+        <p:sp>
+          <p:nvSpPr>
+            <p:cNvPr id="141" name="矩形: 圆角 140">
+              <a:extLst>
+                <a:ext uri="{FF2B5EF4-FFF2-40B4-BE49-F238E27FC236}">
+                  <a16:creationId xmlns:a16="http://schemas.microsoft.com/office/drawing/2014/main" id="{0AE0762C-448B-477C-BCD5-60B6893BA8E5}"/>
+                </a:ext>
+              </a:extLst>
+            </p:cNvPr>
+            <p:cNvSpPr/>
+            <p:nvPr/>
+          </p:nvSpPr>
+          <p:spPr>
+            <a:xfrm>
+              <a:off x="5256816" y="6021557"/>
+              <a:ext cx="950725" cy="299631"/>
+            </a:xfrm>
+            <a:prstGeom prst="roundRect">
+              <a:avLst/>
+            </a:prstGeom>
+            <a:noFill/>
+            <a:ln>
+              <a:solidFill>
+                <a:schemeClr val="tx1"/>
+              </a:solidFill>
+            </a:ln>
+          </p:spPr>
+          <p:style>
+            <a:lnRef idx="2">
+              <a:schemeClr val="accent1">
+                <a:shade val="50000"/>
+              </a:schemeClr>
+            </a:lnRef>
+            <a:fillRef idx="1">
+              <a:schemeClr val="accent1"/>
+            </a:fillRef>
+            <a:effectRef idx="0">
+              <a:schemeClr val="accent1"/>
+            </a:effectRef>
+            <a:fontRef idx="minor">
+              <a:schemeClr val="lt1"/>
+            </a:fontRef>
+          </p:style>
+          <p:txBody>
+            <a:bodyPr rtlCol="0" anchor="ctr"/>
+            <a:lstStyle/>
+            <a:p>
+              <a:pPr algn="ctr"/>
+              <a:r>
+                <a:rPr lang="zh-CN" altLang="en-US" sz="1346" dirty="0">
+                  <a:solidFill>
+                    <a:srgbClr val="000000"/>
+                  </a:solidFill>
+                  <a:latin typeface="宋体" panose="02010600030101010101" pitchFamily="2" charset="-122"/>
+                  <a:ea typeface="宋体" panose="02010600030101010101" pitchFamily="2" charset="-122"/>
+                </a:rPr>
+                <a:t>数据层</a:t>
+              </a:r>
+              <a:endParaRPr lang="zh-CN" altLang="zh-CN" sz="1010" dirty="0"/>
+            </a:p>
+          </p:txBody>
+        </p:sp>
+        <p:sp>
+          <p:nvSpPr>
+            <p:cNvPr id="142" name="矩形: 圆角 141">
+              <a:extLst>
+                <a:ext uri="{FF2B5EF4-FFF2-40B4-BE49-F238E27FC236}">
+                  <a16:creationId xmlns:a16="http://schemas.microsoft.com/office/drawing/2014/main" id="{330EA661-27F6-44D7-AF4B-BFC983EA0C70}"/>
+                </a:ext>
+              </a:extLst>
+            </p:cNvPr>
+            <p:cNvSpPr/>
+            <p:nvPr/>
+          </p:nvSpPr>
+          <p:spPr>
+            <a:xfrm>
+              <a:off x="5244569" y="6521047"/>
+              <a:ext cx="950725" cy="299631"/>
+            </a:xfrm>
+            <a:prstGeom prst="roundRect">
+              <a:avLst/>
+            </a:prstGeom>
+            <a:noFill/>
+            <a:ln>
+              <a:solidFill>
+                <a:schemeClr val="tx1"/>
+              </a:solidFill>
+            </a:ln>
+          </p:spPr>
+          <p:style>
+            <a:lnRef idx="2">
+              <a:schemeClr val="accent1">
+                <a:shade val="50000"/>
+              </a:schemeClr>
+            </a:lnRef>
+            <a:fillRef idx="1">
+              <a:schemeClr val="accent1"/>
+            </a:fillRef>
+            <a:effectRef idx="0">
+              <a:schemeClr val="accent1"/>
+            </a:effectRef>
+            <a:fontRef idx="minor">
+              <a:schemeClr val="lt1"/>
+            </a:fontRef>
+          </p:style>
+          <p:txBody>
+            <a:bodyPr rtlCol="0" anchor="ctr"/>
+            <a:lstStyle/>
+            <a:p>
+              <a:pPr algn="ctr"/>
+              <a:r>
+                <a:rPr lang="zh-CN" altLang="en-US" sz="1346" dirty="0">
+                  <a:solidFill>
+                    <a:srgbClr val="000000"/>
+                  </a:solidFill>
+                  <a:latin typeface="宋体" panose="02010600030101010101" pitchFamily="2" charset="-122"/>
+                  <a:ea typeface="宋体" panose="02010600030101010101" pitchFamily="2" charset="-122"/>
+                </a:rPr>
+                <a:t>数据库</a:t>
+              </a:r>
+              <a:endParaRPr lang="zh-CN" altLang="zh-CN" sz="1010" dirty="0"/>
+            </a:p>
+          </p:txBody>
+        </p:sp>
+        <p:cxnSp>
+          <p:nvCxnSpPr>
+            <p:cNvPr id="143" name="直接箭头连接符 142">
+              <a:extLst>
+                <a:ext uri="{FF2B5EF4-FFF2-40B4-BE49-F238E27FC236}">
+                  <a16:creationId xmlns:a16="http://schemas.microsoft.com/office/drawing/2014/main" id="{CD45207D-AA68-4916-B311-24336E552C8B}"/>
+                </a:ext>
+              </a:extLst>
+            </p:cNvPr>
+            <p:cNvCxnSpPr>
+              <a:cxnSpLocks/>
+              <a:stCxn id="137" idx="2"/>
+              <a:endCxn id="138" idx="0"/>
+            </p:cNvCxnSpPr>
+            <p:nvPr/>
+          </p:nvCxnSpPr>
+          <p:spPr>
+            <a:xfrm flipH="1">
+              <a:off x="5732765" y="4703249"/>
+              <a:ext cx="2231" cy="201418"/>
+            </a:xfrm>
+            <a:prstGeom prst="straightConnector1">
+              <a:avLst/>
+            </a:prstGeom>
+            <a:ln w="12700">
+              <a:solidFill>
+                <a:schemeClr val="tx1"/>
+              </a:solidFill>
+              <a:tailEnd type="triangle"/>
+            </a:ln>
+          </p:spPr>
+          <p:style>
+            <a:lnRef idx="1">
+              <a:schemeClr val="accent1"/>
+            </a:lnRef>
+            <a:fillRef idx="0">
+              <a:schemeClr val="accent1"/>
+            </a:fillRef>
+            <a:effectRef idx="0">
+              <a:schemeClr val="accent1"/>
+            </a:effectRef>
+            <a:fontRef idx="minor">
+              <a:schemeClr val="tx1"/>
+            </a:fontRef>
+          </p:style>
+        </p:cxnSp>
+        <p:cxnSp>
+          <p:nvCxnSpPr>
+            <p:cNvPr id="146" name="直接箭头连接符 145">
+              <a:extLst>
+                <a:ext uri="{FF2B5EF4-FFF2-40B4-BE49-F238E27FC236}">
+                  <a16:creationId xmlns:a16="http://schemas.microsoft.com/office/drawing/2014/main" id="{1E031BAF-22FD-4915-B315-131F7BD26AA8}"/>
+                </a:ext>
+              </a:extLst>
+            </p:cNvPr>
+            <p:cNvCxnSpPr>
+              <a:cxnSpLocks/>
+              <a:stCxn id="141" idx="2"/>
+              <a:endCxn id="142" idx="0"/>
+            </p:cNvCxnSpPr>
+            <p:nvPr/>
+          </p:nvCxnSpPr>
+          <p:spPr>
+            <a:xfrm flipH="1">
+              <a:off x="5719932" y="6321188"/>
+              <a:ext cx="12247" cy="199859"/>
+            </a:xfrm>
+            <a:prstGeom prst="straightConnector1">
+              <a:avLst/>
+            </a:prstGeom>
+            <a:ln w="12700">
+              <a:solidFill>
+                <a:schemeClr val="tx1"/>
+              </a:solidFill>
+              <a:tailEnd type="triangle"/>
+            </a:ln>
+          </p:spPr>
+          <p:style>
+            <a:lnRef idx="1">
+              <a:schemeClr val="accent1"/>
+            </a:lnRef>
+            <a:fillRef idx="0">
+              <a:schemeClr val="accent1"/>
+            </a:fillRef>
+            <a:effectRef idx="0">
+              <a:schemeClr val="accent1"/>
+            </a:effectRef>
+            <a:fontRef idx="minor">
+              <a:schemeClr val="tx1"/>
+            </a:fontRef>
+          </p:style>
+        </p:cxnSp>
+        <p:cxnSp>
+          <p:nvCxnSpPr>
+            <p:cNvPr id="147" name="连接符: 肘形 146">
+              <a:extLst>
+                <a:ext uri="{FF2B5EF4-FFF2-40B4-BE49-F238E27FC236}">
+                  <a16:creationId xmlns:a16="http://schemas.microsoft.com/office/drawing/2014/main" id="{0BF38B6A-FB5E-4E2B-8673-EC80D778A24A}"/>
+                </a:ext>
+              </a:extLst>
+            </p:cNvPr>
+            <p:cNvCxnSpPr>
+              <a:cxnSpLocks/>
+              <a:stCxn id="138" idx="2"/>
+              <a:endCxn id="139" idx="0"/>
+            </p:cNvCxnSpPr>
+            <p:nvPr/>
+          </p:nvCxnSpPr>
+          <p:spPr>
+            <a:xfrm rot="5400000">
+              <a:off x="5618089" y="5332468"/>
+              <a:ext cx="228766" cy="586"/>
+            </a:xfrm>
+            <a:prstGeom prst="bentConnector3">
+              <a:avLst/>
+            </a:prstGeom>
+            <a:ln w="12700">
+              <a:solidFill>
+                <a:schemeClr val="tx1"/>
+              </a:solidFill>
+              <a:tailEnd type="triangle"/>
+            </a:ln>
+          </p:spPr>
+          <p:style>
+            <a:lnRef idx="1">
+              <a:schemeClr val="accent1"/>
+            </a:lnRef>
+            <a:fillRef idx="0">
+              <a:schemeClr val="accent1"/>
+            </a:fillRef>
+            <a:effectRef idx="0">
+              <a:schemeClr val="accent1"/>
+            </a:effectRef>
+            <a:fontRef idx="minor">
+              <a:schemeClr val="tx1"/>
+            </a:fontRef>
+          </p:style>
+        </p:cxnSp>
+        <p:cxnSp>
+          <p:nvCxnSpPr>
+            <p:cNvPr id="164" name="直接箭头连接符 163">
+              <a:extLst>
+                <a:ext uri="{FF2B5EF4-FFF2-40B4-BE49-F238E27FC236}">
+                  <a16:creationId xmlns:a16="http://schemas.microsoft.com/office/drawing/2014/main" id="{C4E5D9CF-82AF-4DC3-8C56-18CAF64AFDFE}"/>
+                </a:ext>
+              </a:extLst>
+            </p:cNvPr>
+            <p:cNvCxnSpPr>
+              <a:cxnSpLocks/>
+              <a:stCxn id="139" idx="2"/>
+              <a:endCxn id="141" idx="0"/>
+            </p:cNvCxnSpPr>
+            <p:nvPr/>
+          </p:nvCxnSpPr>
+          <p:spPr>
+            <a:xfrm>
+              <a:off x="5732179" y="5746775"/>
+              <a:ext cx="0" cy="274782"/>
+            </a:xfrm>
+            <a:prstGeom prst="straightConnector1">
+              <a:avLst/>
+            </a:prstGeom>
+            <a:ln w="12700">
+              <a:solidFill>
+                <a:schemeClr val="tx1"/>
+              </a:solidFill>
+              <a:tailEnd type="triangle"/>
+            </a:ln>
+          </p:spPr>
+          <p:style>
+            <a:lnRef idx="1">
+              <a:schemeClr val="accent1"/>
+            </a:lnRef>
+            <a:fillRef idx="0">
+              <a:schemeClr val="accent1"/>
+            </a:fillRef>
+            <a:effectRef idx="0">
+              <a:schemeClr val="accent1"/>
+            </a:effectRef>
+            <a:fontRef idx="minor">
+              <a:schemeClr val="tx1"/>
+            </a:fontRef>
+          </p:style>
+        </p:cxnSp>
+        <p:sp>
+          <p:nvSpPr>
+            <p:cNvPr id="175" name="矩形: 圆角 174">
+              <a:extLst>
+                <a:ext uri="{FF2B5EF4-FFF2-40B4-BE49-F238E27FC236}">
+                  <a16:creationId xmlns:a16="http://schemas.microsoft.com/office/drawing/2014/main" id="{13206B64-5A4E-4A64-8BEE-D90E6CE093E9}"/>
+                </a:ext>
+              </a:extLst>
+            </p:cNvPr>
+            <p:cNvSpPr/>
+            <p:nvPr/>
+          </p:nvSpPr>
+          <p:spPr>
+            <a:xfrm>
+              <a:off x="6487569" y="4904667"/>
+              <a:ext cx="452440" cy="1452444"/>
+            </a:xfrm>
+            <a:prstGeom prst="roundRect">
+              <a:avLst/>
+            </a:prstGeom>
+            <a:noFill/>
+            <a:ln>
+              <a:solidFill>
+                <a:schemeClr val="tx1"/>
+              </a:solidFill>
+            </a:ln>
+          </p:spPr>
+          <p:style>
+            <a:lnRef idx="2">
+              <a:schemeClr val="accent1">
+                <a:shade val="50000"/>
+              </a:schemeClr>
+            </a:lnRef>
+            <a:fillRef idx="1">
+              <a:schemeClr val="accent1"/>
+            </a:fillRef>
+            <a:effectRef idx="0">
+              <a:schemeClr val="accent1"/>
+            </a:effectRef>
+            <a:fontRef idx="minor">
+              <a:schemeClr val="lt1"/>
+            </a:fontRef>
+          </p:style>
+          <p:txBody>
+            <a:bodyPr rtlCol="0" anchor="ctr"/>
+            <a:lstStyle/>
+            <a:p>
+              <a:pPr algn="ctr"/>
+              <a:r>
+                <a:rPr lang="zh-CN" altLang="en-US" sz="1346" dirty="0">
+                  <a:solidFill>
+                    <a:srgbClr val="000000"/>
+                  </a:solidFill>
+                  <a:latin typeface="宋体" panose="02010600030101010101" pitchFamily="2" charset="-122"/>
+                  <a:ea typeface="宋体" panose="02010600030101010101" pitchFamily="2" charset="-122"/>
+                </a:rPr>
+                <a:t>日志记录</a:t>
+              </a:r>
+            </a:p>
+          </p:txBody>
+        </p:sp>
+        <p:sp>
+          <p:nvSpPr>
+            <p:cNvPr id="176" name="矩形: 圆角 175">
+              <a:extLst>
+                <a:ext uri="{FF2B5EF4-FFF2-40B4-BE49-F238E27FC236}">
+                  <a16:creationId xmlns:a16="http://schemas.microsoft.com/office/drawing/2014/main" id="{248C7CA5-0CEF-4A07-9804-0EDD3990868A}"/>
+                </a:ext>
+              </a:extLst>
+            </p:cNvPr>
+            <p:cNvSpPr/>
+            <p:nvPr/>
+          </p:nvSpPr>
+          <p:spPr>
+            <a:xfrm>
+              <a:off x="7186408" y="4891698"/>
+              <a:ext cx="452440" cy="1452443"/>
+            </a:xfrm>
+            <a:prstGeom prst="roundRect">
+              <a:avLst/>
+            </a:prstGeom>
+            <a:noFill/>
+            <a:ln>
+              <a:solidFill>
+                <a:schemeClr val="tx1"/>
+              </a:solidFill>
+            </a:ln>
+          </p:spPr>
+          <p:style>
+            <a:lnRef idx="2">
+              <a:schemeClr val="accent1">
+                <a:shade val="50000"/>
+              </a:schemeClr>
+            </a:lnRef>
+            <a:fillRef idx="1">
+              <a:schemeClr val="accent1"/>
+            </a:fillRef>
+            <a:effectRef idx="0">
+              <a:schemeClr val="accent1"/>
+            </a:effectRef>
+            <a:fontRef idx="minor">
+              <a:schemeClr val="lt1"/>
+            </a:fontRef>
+          </p:style>
+          <p:txBody>
+            <a:bodyPr rtlCol="0" anchor="ctr"/>
+            <a:lstStyle/>
+            <a:p>
+              <a:pPr algn="ctr"/>
+              <a:r>
+                <a:rPr lang="zh-CN" altLang="en-US" sz="1346" dirty="0">
+                  <a:solidFill>
+                    <a:srgbClr val="000000"/>
+                  </a:solidFill>
+                  <a:latin typeface="宋体" panose="02010600030101010101" pitchFamily="2" charset="-122"/>
+                  <a:ea typeface="宋体" panose="02010600030101010101" pitchFamily="2" charset="-122"/>
+                </a:rPr>
+                <a:t>权限控制</a:t>
+              </a:r>
+            </a:p>
+          </p:txBody>
+        </p:sp>
+        <p:cxnSp>
+          <p:nvCxnSpPr>
+            <p:cNvPr id="177" name="直接箭头连接符 176">
+              <a:extLst>
+                <a:ext uri="{FF2B5EF4-FFF2-40B4-BE49-F238E27FC236}">
+                  <a16:creationId xmlns:a16="http://schemas.microsoft.com/office/drawing/2014/main" id="{3D4BCB1A-7317-46F4-9574-22FCA5B9142B}"/>
+                </a:ext>
+              </a:extLst>
+            </p:cNvPr>
+            <p:cNvCxnSpPr>
+              <a:cxnSpLocks/>
+              <a:stCxn id="138" idx="3"/>
+            </p:cNvCxnSpPr>
+            <p:nvPr/>
+          </p:nvCxnSpPr>
+          <p:spPr>
+            <a:xfrm>
+              <a:off x="6195294" y="5061523"/>
+              <a:ext cx="292275" cy="1"/>
+            </a:xfrm>
+            <a:prstGeom prst="straightConnector1">
+              <a:avLst/>
+            </a:prstGeom>
+            <a:ln w="12700">
+              <a:solidFill>
+                <a:schemeClr val="tx1"/>
+              </a:solidFill>
+              <a:tailEnd type="triangle"/>
+            </a:ln>
+          </p:spPr>
+          <p:style>
+            <a:lnRef idx="1">
+              <a:schemeClr val="accent1"/>
+            </a:lnRef>
+            <a:fillRef idx="0">
+              <a:schemeClr val="accent1"/>
+            </a:fillRef>
+            <a:effectRef idx="0">
+              <a:schemeClr val="accent1"/>
+            </a:effectRef>
+            <a:fontRef idx="minor">
+              <a:schemeClr val="tx1"/>
+            </a:fontRef>
+          </p:style>
+        </p:cxnSp>
+        <p:cxnSp>
+          <p:nvCxnSpPr>
+            <p:cNvPr id="182" name="直接箭头连接符 181">
+              <a:extLst>
+                <a:ext uri="{FF2B5EF4-FFF2-40B4-BE49-F238E27FC236}">
+                  <a16:creationId xmlns:a16="http://schemas.microsoft.com/office/drawing/2014/main" id="{2E4E904A-B8B4-4CCE-A491-677854933295}"/>
+                </a:ext>
+              </a:extLst>
+            </p:cNvPr>
+            <p:cNvCxnSpPr>
+              <a:cxnSpLocks/>
+            </p:cNvCxnSpPr>
+            <p:nvPr/>
+          </p:nvCxnSpPr>
+          <p:spPr>
+            <a:xfrm>
+              <a:off x="6936950" y="5061521"/>
+              <a:ext cx="242636" cy="1"/>
+            </a:xfrm>
+            <a:prstGeom prst="straightConnector1">
+              <a:avLst/>
+            </a:prstGeom>
+            <a:ln w="12700">
+              <a:solidFill>
+                <a:schemeClr val="tx1"/>
+              </a:solidFill>
+              <a:tailEnd type="triangle"/>
+            </a:ln>
+          </p:spPr>
+          <p:style>
+            <a:lnRef idx="1">
+              <a:schemeClr val="accent1"/>
+            </a:lnRef>
+            <a:fillRef idx="0">
+              <a:schemeClr val="accent1"/>
+            </a:fillRef>
+            <a:effectRef idx="0">
+              <a:schemeClr val="accent1"/>
+            </a:effectRef>
+            <a:fontRef idx="minor">
+              <a:schemeClr val="tx1"/>
+            </a:fontRef>
+          </p:style>
+        </p:cxnSp>
+        <p:cxnSp>
+          <p:nvCxnSpPr>
+            <p:cNvPr id="184" name="直接箭头连接符 183">
+              <a:extLst>
+                <a:ext uri="{FF2B5EF4-FFF2-40B4-BE49-F238E27FC236}">
+                  <a16:creationId xmlns:a16="http://schemas.microsoft.com/office/drawing/2014/main" id="{B4DDA23F-6587-4628-9317-66C1117926BA}"/>
+                </a:ext>
+              </a:extLst>
+            </p:cNvPr>
+            <p:cNvCxnSpPr>
+              <a:cxnSpLocks/>
+            </p:cNvCxnSpPr>
+            <p:nvPr/>
+          </p:nvCxnSpPr>
+          <p:spPr>
+            <a:xfrm flipH="1" flipV="1">
+              <a:off x="6936950" y="6141367"/>
+              <a:ext cx="249458" cy="1"/>
+            </a:xfrm>
+            <a:prstGeom prst="straightConnector1">
+              <a:avLst/>
+            </a:prstGeom>
+            <a:ln w="12700">
+              <a:solidFill>
+                <a:schemeClr val="tx1"/>
+              </a:solidFill>
+              <a:tailEnd type="triangle"/>
+            </a:ln>
+          </p:spPr>
+          <p:style>
+            <a:lnRef idx="1">
+              <a:schemeClr val="accent1"/>
+            </a:lnRef>
+            <a:fillRef idx="0">
+              <a:schemeClr val="accent1"/>
+            </a:fillRef>
+            <a:effectRef idx="0">
+              <a:schemeClr val="accent1"/>
+            </a:effectRef>
+            <a:fontRef idx="minor">
+              <a:schemeClr val="tx1"/>
+            </a:fontRef>
+          </p:style>
+        </p:cxnSp>
+        <p:cxnSp>
+          <p:nvCxnSpPr>
+            <p:cNvPr id="187" name="直接箭头连接符 186">
+              <a:extLst>
+                <a:ext uri="{FF2B5EF4-FFF2-40B4-BE49-F238E27FC236}">
+                  <a16:creationId xmlns:a16="http://schemas.microsoft.com/office/drawing/2014/main" id="{2126D9EE-F987-4382-A91D-FF1D655FA748}"/>
+                </a:ext>
+              </a:extLst>
+            </p:cNvPr>
+            <p:cNvCxnSpPr>
+              <a:cxnSpLocks/>
+              <a:endCxn id="141" idx="3"/>
+            </p:cNvCxnSpPr>
+            <p:nvPr/>
+          </p:nvCxnSpPr>
+          <p:spPr>
+            <a:xfrm flipH="1">
+              <a:off x="6207541" y="6167823"/>
+              <a:ext cx="280028" cy="3550"/>
+            </a:xfrm>
+            <a:prstGeom prst="straightConnector1">
+              <a:avLst/>
+            </a:prstGeom>
+            <a:ln w="12700">
+              <a:solidFill>
+                <a:schemeClr val="tx1"/>
+              </a:solidFill>
+              <a:tailEnd type="triangle"/>
+            </a:ln>
+          </p:spPr>
+          <p:style>
+            <a:lnRef idx="1">
+              <a:schemeClr val="accent1"/>
+            </a:lnRef>
+            <a:fillRef idx="0">
+              <a:schemeClr val="accent1"/>
+            </a:fillRef>
+            <a:effectRef idx="0">
+              <a:schemeClr val="accent1"/>
+            </a:effectRef>
+            <a:fontRef idx="minor">
+              <a:schemeClr val="tx1"/>
+            </a:fontRef>
+          </p:style>
+        </p:cxnSp>
+        <p:sp>
+          <p:nvSpPr>
+            <p:cNvPr id="212" name="矩形: 圆角 211">
+              <a:extLst>
+                <a:ext uri="{FF2B5EF4-FFF2-40B4-BE49-F238E27FC236}">
+                  <a16:creationId xmlns:a16="http://schemas.microsoft.com/office/drawing/2014/main" id="{04C457C0-1FF8-498A-9EC9-2D40D50D0765}"/>
+                </a:ext>
+              </a:extLst>
+            </p:cNvPr>
+            <p:cNvSpPr/>
+            <p:nvPr/>
+          </p:nvSpPr>
+          <p:spPr>
+            <a:xfrm>
+              <a:off x="-1313504" y="7443245"/>
+              <a:ext cx="8994463" cy="1540335"/>
+            </a:xfrm>
+            <a:prstGeom prst="roundRect">
+              <a:avLst>
+                <a:gd name="adj" fmla="val 7229"/>
+              </a:avLst>
+            </a:prstGeom>
+            <a:noFill/>
+            <a:ln>
+              <a:solidFill>
+                <a:schemeClr val="tx1"/>
+              </a:solidFill>
+            </a:ln>
+          </p:spPr>
+          <p:style>
+            <a:lnRef idx="2">
+              <a:schemeClr val="accent1">
+                <a:shade val="50000"/>
+              </a:schemeClr>
+            </a:lnRef>
+            <a:fillRef idx="1">
+              <a:schemeClr val="accent1"/>
+            </a:fillRef>
+            <a:effectRef idx="0">
+              <a:schemeClr val="accent1"/>
+            </a:effectRef>
+            <a:fontRef idx="minor">
+              <a:schemeClr val="lt1"/>
+            </a:fontRef>
+          </p:style>
+          <p:txBody>
+            <a:bodyPr rtlCol="0" anchor="ctr"/>
+            <a:lstStyle/>
+            <a:p>
+              <a:pPr algn="ctr"/>
+              <a:endParaRPr lang="zh-CN" altLang="en-US" sz="1154" dirty="0">
+                <a:solidFill>
+                  <a:schemeClr val="tx1"/>
+                </a:solidFill>
+                <a:latin typeface="宋体" panose="02010600030101010101" pitchFamily="2" charset="-122"/>
+                <a:ea typeface="宋体" panose="02010600030101010101" pitchFamily="2" charset="-122"/>
+              </a:endParaRPr>
+            </a:p>
+          </p:txBody>
+        </p:sp>
+        <p:sp>
+          <p:nvSpPr>
+            <p:cNvPr id="213" name="文本框 212">
+              <a:extLst>
+                <a:ext uri="{FF2B5EF4-FFF2-40B4-BE49-F238E27FC236}">
+                  <a16:creationId xmlns:a16="http://schemas.microsoft.com/office/drawing/2014/main" id="{5F92066D-1134-4D70-A0B0-F148B0C07FBB}"/>
+                </a:ext>
+              </a:extLst>
+            </p:cNvPr>
+            <p:cNvSpPr txBox="1"/>
+            <p:nvPr/>
+          </p:nvSpPr>
+          <p:spPr>
+            <a:xfrm>
+              <a:off x="2086068" y="7432604"/>
+              <a:ext cx="1935942" cy="342175"/>
+            </a:xfrm>
+            <a:prstGeom prst="rect">
+              <a:avLst/>
+            </a:prstGeom>
+            <a:noFill/>
+          </p:spPr>
+          <p:txBody>
+            <a:bodyPr wrap="none" rtlCol="0">
+              <a:spAutoFit/>
+            </a:bodyPr>
+            <a:lstStyle/>
+            <a:p>
+              <a:r>
+                <a:rPr lang="zh-CN" altLang="en-US" sz="1538" dirty="0">
+                  <a:latin typeface="宋体" panose="02010600030101010101" pitchFamily="2" charset="-122"/>
+                  <a:ea typeface="宋体" panose="02010600030101010101" pitchFamily="2" charset="-122"/>
+                </a:rPr>
+                <a:t>第六章 总结与展望</a:t>
+              </a:r>
+            </a:p>
+          </p:txBody>
+        </p:sp>
+        <p:cxnSp>
+          <p:nvCxnSpPr>
+            <p:cNvPr id="214" name="直接连接符 213">
+              <a:extLst>
+                <a:ext uri="{FF2B5EF4-FFF2-40B4-BE49-F238E27FC236}">
+                  <a16:creationId xmlns:a16="http://schemas.microsoft.com/office/drawing/2014/main" id="{11729AFA-44B8-4056-9B61-1F7168EA66FC}"/>
+                </a:ext>
+              </a:extLst>
+            </p:cNvPr>
+            <p:cNvCxnSpPr>
+              <a:cxnSpLocks/>
+            </p:cNvCxnSpPr>
+            <p:nvPr/>
+          </p:nvCxnSpPr>
+          <p:spPr>
+            <a:xfrm>
+              <a:off x="-1257931" y="7772759"/>
+              <a:ext cx="8832210" cy="0"/>
+            </a:xfrm>
+            <a:prstGeom prst="line">
+              <a:avLst/>
+            </a:prstGeom>
+            <a:ln w="9525"/>
+          </p:spPr>
+          <p:style>
+            <a:lnRef idx="1">
+              <a:schemeClr val="dk1"/>
+            </a:lnRef>
+            <a:fillRef idx="0">
+              <a:schemeClr val="dk1"/>
+            </a:fillRef>
+            <a:effectRef idx="0">
+              <a:schemeClr val="dk1"/>
+            </a:effectRef>
+            <a:fontRef idx="minor">
+              <a:schemeClr val="tx1"/>
+            </a:fontRef>
+          </p:style>
+        </p:cxnSp>
+        <p:sp>
+          <p:nvSpPr>
+            <p:cNvPr id="232" name="文本框 231">
+              <a:extLst>
+                <a:ext uri="{FF2B5EF4-FFF2-40B4-BE49-F238E27FC236}">
+                  <a16:creationId xmlns:a16="http://schemas.microsoft.com/office/drawing/2014/main" id="{15BFB098-E8A0-4B8E-A88E-B3D8FF757993}"/>
+                </a:ext>
+              </a:extLst>
+            </p:cNvPr>
+            <p:cNvSpPr txBox="1"/>
+            <p:nvPr/>
+          </p:nvSpPr>
+          <p:spPr>
+            <a:xfrm>
+              <a:off x="-1164461" y="7862884"/>
+              <a:ext cx="1741214" cy="311431"/>
+            </a:xfrm>
+            <a:prstGeom prst="rect">
+              <a:avLst/>
+            </a:prstGeom>
+            <a:noFill/>
+          </p:spPr>
+          <p:txBody>
+            <a:bodyPr wrap="none" rtlCol="0">
+              <a:spAutoFit/>
+            </a:bodyPr>
+            <a:lstStyle/>
+            <a:p>
+              <a:pPr marL="274749" indent="-274749">
+                <a:buFont typeface="Arial" panose="020B0604020202020204" pitchFamily="34" charset="0"/>
+                <a:buChar char="•"/>
+              </a:pPr>
+              <a:r>
+                <a:rPr lang="zh-CN" altLang="en-US" sz="1346" dirty="0">
+                  <a:latin typeface="宋体" panose="02010600030101010101" pitchFamily="2" charset="-122"/>
+                  <a:ea typeface="宋体" panose="02010600030101010101" pitchFamily="2" charset="-122"/>
+                </a:rPr>
+                <a:t>工作总结与展望</a:t>
+              </a:r>
+              <a:endParaRPr lang="en-US" altLang="zh-CN" sz="1346" dirty="0">
+                <a:latin typeface="宋体" panose="02010600030101010101" pitchFamily="2" charset="-122"/>
+                <a:ea typeface="宋体" panose="02010600030101010101" pitchFamily="2" charset="-122"/>
+              </a:endParaRPr>
+            </a:p>
+          </p:txBody>
+        </p:sp>
+        <p:sp>
+          <p:nvSpPr>
+            <p:cNvPr id="235" name="文本框 234">
+              <a:extLst>
+                <a:ext uri="{FF2B5EF4-FFF2-40B4-BE49-F238E27FC236}">
+                  <a16:creationId xmlns:a16="http://schemas.microsoft.com/office/drawing/2014/main" id="{FE862708-02FE-4256-8A35-558CA3E11EDD}"/>
+                </a:ext>
+              </a:extLst>
+            </p:cNvPr>
+            <p:cNvSpPr txBox="1"/>
+            <p:nvPr/>
+          </p:nvSpPr>
+          <p:spPr>
+            <a:xfrm>
+              <a:off x="-1153769" y="8148140"/>
+              <a:ext cx="5198859" cy="738664"/>
+            </a:xfrm>
+            <a:prstGeom prst="rect">
+              <a:avLst/>
+            </a:prstGeom>
+            <a:noFill/>
+          </p:spPr>
+          <p:txBody>
+            <a:bodyPr wrap="none" rtlCol="0">
+              <a:spAutoFit/>
+            </a:bodyPr>
+            <a:lstStyle/>
+            <a:p>
+              <a:pPr marL="329698" indent="-329698">
+                <a:buFont typeface="+mj-lt"/>
+                <a:buAutoNum type="arabicPeriod"/>
+              </a:pPr>
+              <a:r>
+                <a:rPr lang="zh-CN" altLang="en-US" sz="1346" dirty="0">
+                  <a:latin typeface="宋体" panose="02010600030101010101" pitchFamily="2" charset="-122"/>
+                  <a:ea typeface="宋体" panose="02010600030101010101" pitchFamily="2" charset="-122"/>
+                </a:rPr>
+                <a:t>提升对加密流量及复杂变种攻击的泛化检测能力。</a:t>
+              </a:r>
+              <a:endParaRPr lang="en-US" altLang="zh-CN" sz="1346" dirty="0">
+                <a:latin typeface="宋体" panose="02010600030101010101" pitchFamily="2" charset="-122"/>
+                <a:ea typeface="宋体" panose="02010600030101010101" pitchFamily="2" charset="-122"/>
+              </a:endParaRPr>
+            </a:p>
+            <a:p>
+              <a:pPr marL="329698" indent="-329698">
+                <a:buFont typeface="+mj-lt"/>
+                <a:buAutoNum type="arabicPeriod"/>
+              </a:pPr>
+              <a:r>
+                <a:rPr lang="zh-CN" altLang="en-US" sz="1346" dirty="0">
+                  <a:latin typeface="宋体" panose="02010600030101010101" pitchFamily="2" charset="-122"/>
+                  <a:ea typeface="宋体" panose="02010600030101010101" pitchFamily="2" charset="-122"/>
+                </a:rPr>
+                <a:t>推动检测算法在资源受限的边缘侧设备上实现高效部署。</a:t>
+              </a:r>
+              <a:endParaRPr lang="en-US" altLang="zh-CN" sz="1346" dirty="0">
+                <a:latin typeface="宋体" panose="02010600030101010101" pitchFamily="2" charset="-122"/>
+                <a:ea typeface="宋体" panose="02010600030101010101" pitchFamily="2" charset="-122"/>
+              </a:endParaRPr>
+            </a:p>
+            <a:p>
+              <a:pPr marL="329698" indent="-329698">
+                <a:buFont typeface="+mj-lt"/>
+                <a:buAutoNum type="arabicPeriod"/>
+              </a:pPr>
+              <a:r>
+                <a:rPr lang="zh-CN" altLang="en-US" sz="1346" dirty="0">
+                  <a:latin typeface="宋体" panose="02010600030101010101" pitchFamily="2" charset="-122"/>
+                  <a:ea typeface="宋体" panose="02010600030101010101" pitchFamily="2" charset="-122"/>
+                </a:rPr>
+                <a:t>将系统升级为“检测</a:t>
+              </a:r>
+              <a:r>
+                <a:rPr lang="en-US" altLang="zh-CN" sz="1346" dirty="0">
+                  <a:latin typeface="宋体" panose="02010600030101010101" pitchFamily="2" charset="-122"/>
+                  <a:ea typeface="宋体" panose="02010600030101010101" pitchFamily="2" charset="-122"/>
+                </a:rPr>
+                <a:t>-</a:t>
+              </a:r>
+              <a:r>
+                <a:rPr lang="zh-CN" altLang="en-US" sz="1346" dirty="0">
+                  <a:latin typeface="宋体" panose="02010600030101010101" pitchFamily="2" charset="-122"/>
+                  <a:ea typeface="宋体" panose="02010600030101010101" pitchFamily="2" charset="-122"/>
+                </a:rPr>
+                <a:t>分析</a:t>
+              </a:r>
+              <a:r>
+                <a:rPr lang="en-US" altLang="zh-CN" sz="1346" dirty="0">
+                  <a:latin typeface="宋体" panose="02010600030101010101" pitchFamily="2" charset="-122"/>
+                  <a:ea typeface="宋体" panose="02010600030101010101" pitchFamily="2" charset="-122"/>
+                </a:rPr>
+                <a:t>-</a:t>
+              </a:r>
+              <a:r>
+                <a:rPr lang="zh-CN" altLang="en-US" sz="1346" dirty="0">
+                  <a:latin typeface="宋体" panose="02010600030101010101" pitchFamily="2" charset="-122"/>
+                  <a:ea typeface="宋体" panose="02010600030101010101" pitchFamily="2" charset="-122"/>
+                </a:rPr>
+                <a:t>阻断”一体化的主动防御平台。</a:t>
+              </a:r>
+              <a:endParaRPr lang="en-US" altLang="zh-CN" sz="1346" dirty="0">
+                <a:latin typeface="宋体" panose="02010600030101010101" pitchFamily="2" charset="-122"/>
+                <a:ea typeface="宋体" panose="02010600030101010101" pitchFamily="2" charset="-122"/>
+              </a:endParaRPr>
+            </a:p>
+          </p:txBody>
+        </p:sp>
+      </p:grpSp>
     </p:spTree>
     <p:extLst>
       <p:ext uri="{BB962C8B-B14F-4D97-AF65-F5344CB8AC3E}">
@@ -3588,6 +8030,267 @@
 </file>
 
 <file path=ppt/theme/theme1.xml><?xml version="1.0" encoding="utf-8"?>
+<a:theme xmlns:a="http://schemas.openxmlformats.org/drawingml/2006/main" name="Office 主题​​">
+  <a:themeElements>
+    <a:clrScheme name="Office 主题​​">
+      <a:dk1>
+        <a:sysClr val="windowText" lastClr="000000"/>
+      </a:dk1>
+      <a:lt1>
+        <a:sysClr val="window" lastClr="FFFFFF"/>
+      </a:lt1>
+      <a:dk2>
+        <a:srgbClr val="44546A"/>
+      </a:dk2>
+      <a:lt2>
+        <a:srgbClr val="E7E6E6"/>
+      </a:lt2>
+      <a:accent1>
+        <a:srgbClr val="4472C4"/>
+      </a:accent1>
+      <a:accent2>
+        <a:srgbClr val="ED7D31"/>
+      </a:accent2>
+      <a:accent3>
+        <a:srgbClr val="A5A5A5"/>
+      </a:accent3>
+      <a:accent4>
+        <a:srgbClr val="FFC000"/>
+      </a:accent4>
+      <a:accent5>
+        <a:srgbClr val="5B9BD5"/>
+      </a:accent5>
+      <a:accent6>
+        <a:srgbClr val="70AD47"/>
+      </a:accent6>
+      <a:hlink>
+        <a:srgbClr val="0563C1"/>
+      </a:hlink>
+      <a:folHlink>
+        <a:srgbClr val="954F72"/>
+      </a:folHlink>
+    </a:clrScheme>
+    <a:fontScheme name="Office 主题​​">
+      <a:majorFont>
+        <a:latin typeface="Calibri Light" panose="020F0302020204030204"/>
+        <a:ea typeface=""/>
+        <a:cs typeface=""/>
+        <a:font script="Jpan" typeface="游ゴシック Light"/>
+        <a:font script="Hang" typeface="맑은 고딕"/>
+        <a:font script="Hans" typeface="等线 Light"/>
+        <a:font script="Hant" typeface="新細明體"/>
+        <a:font script="Arab" typeface="Times New Roman"/>
+        <a:font script="Hebr" typeface="Times New Roman"/>
+        <a:font script="Thai" typeface="Angsana New"/>
+        <a:font script="Ethi" typeface="Nyala"/>
+        <a:font script="Beng" typeface="Vrinda"/>
+        <a:font script="Gujr" typeface="Shruti"/>
+        <a:font script="Khmr" typeface="MoolBoran"/>
+        <a:font script="Knda" typeface="Tunga"/>
+        <a:font script="Guru" typeface="Raavi"/>
+        <a:font script="Cans" typeface="Euphemia"/>
+        <a:font script="Cher" typeface="Plantagenet Cherokee"/>
+        <a:font script="Yiii" typeface="Microsoft Yi Baiti"/>
+        <a:font script="Tibt" typeface="Microsoft Himalaya"/>
+        <a:font script="Thaa" typeface="MV Boli"/>
+        <a:font script="Deva" typeface="Mangal"/>
+        <a:font script="Telu" typeface="Gautami"/>
+        <a:font script="Taml" typeface="Latha"/>
+        <a:font script="Syrc" typeface="Estrangelo Edessa"/>
+        <a:font script="Orya" typeface="Kalinga"/>
+        <a:font script="Mlym" typeface="Kartika"/>
+        <a:font script="Laoo" typeface="DokChampa"/>
+        <a:font script="Sinh" typeface="Iskoola Pota"/>
+        <a:font script="Mong" typeface="Mongolian Baiti"/>
+        <a:font script="Viet" typeface="Times New Roman"/>
+        <a:font script="Uigh" typeface="Microsoft Uighur"/>
+        <a:font script="Geor" typeface="Sylfaen"/>
+      </a:majorFont>
+      <a:minorFont>
+        <a:latin typeface="Calibri" panose="020F0502020204030204"/>
+        <a:ea typeface=""/>
+        <a:cs typeface=""/>
+        <a:font script="Jpan" typeface="游ゴシック"/>
+        <a:font script="Hang" typeface="맑은 고딕"/>
+        <a:font script="Hans" typeface="等线"/>
+        <a:font script="Hant" typeface="新細明體"/>
+        <a:font script="Arab" typeface="Arial"/>
+        <a:font script="Hebr" typeface="Arial"/>
+        <a:font script="Thai" typeface="Cordia New"/>
+        <a:font script="Ethi" typeface="Nyala"/>
+        <a:font script="Beng" typeface="Vrinda"/>
+        <a:font script="Gujr" typeface="Shruti"/>
+        <a:font script="Khmr" typeface="DaunPenh"/>
+        <a:font script="Knda" typeface="Tunga"/>
+        <a:font script="Guru" typeface="Raavi"/>
+        <a:font script="Cans" typeface="Euphemia"/>
+        <a:font script="Cher" typeface="Plantagenet Cherokee"/>
+        <a:font script="Yiii" typeface="Microsoft Yi Baiti"/>
+        <a:font script="Tibt" typeface="Microsoft Himalaya"/>
+        <a:font script="Thaa" typeface="MV Boli"/>
+        <a:font script="Deva" typeface="Mangal"/>
+        <a:font script="Telu" typeface="Gautami"/>
+        <a:font script="Taml" typeface="Latha"/>
+        <a:font script="Syrc" typeface="Estrangelo Edessa"/>
+        <a:font script="Orya" typeface="Kalinga"/>
+        <a:font script="Mlym" typeface="Kartika"/>
+        <a:font script="Laoo" typeface="DokChampa"/>
+        <a:font script="Sinh" typeface="Iskoola Pota"/>
+        <a:font script="Mong" typeface="Mongolian Baiti"/>
+        <a:font script="Viet" typeface="Arial"/>
+        <a:font script="Uigh" typeface="Microsoft Uighur"/>
+        <a:font script="Geor" typeface="Sylfaen"/>
+      </a:minorFont>
+    </a:fontScheme>
+    <a:fmtScheme name="Office 主题​​">
+      <a:fillStyleLst>
+        <a:solidFill>
+          <a:schemeClr val="phClr"/>
+        </a:solidFill>
+        <a:gradFill rotWithShape="1">
+          <a:gsLst>
+            <a:gs pos="0">
+              <a:schemeClr val="phClr">
+                <a:lumMod val="110000"/>
+                <a:satMod val="105000"/>
+                <a:tint val="67000"/>
+              </a:schemeClr>
+            </a:gs>
+            <a:gs pos="50000">
+              <a:schemeClr val="phClr">
+                <a:lumMod val="105000"/>
+                <a:satMod val="103000"/>
+                <a:tint val="73000"/>
+              </a:schemeClr>
+            </a:gs>
+            <a:gs pos="100000">
+              <a:schemeClr val="phClr">
+                <a:lumMod val="105000"/>
+                <a:satMod val="109000"/>
+                <a:tint val="81000"/>
+              </a:schemeClr>
+            </a:gs>
+          </a:gsLst>
+          <a:lin ang="5400000" scaled="0"/>
+        </a:gradFill>
+        <a:gradFill rotWithShape="1">
+          <a:gsLst>
+            <a:gs pos="0">
+              <a:schemeClr val="phClr">
+                <a:satMod val="103000"/>
+                <a:lumMod val="102000"/>
+                <a:tint val="94000"/>
+              </a:schemeClr>
+            </a:gs>
+            <a:gs pos="50000">
+              <a:schemeClr val="phClr">
+                <a:satMod val="110000"/>
+                <a:lumMod val="100000"/>
+                <a:shade val="100000"/>
+              </a:schemeClr>
+            </a:gs>
+            <a:gs pos="100000">
+              <a:schemeClr val="phClr">
+                <a:lumMod val="99000"/>
+                <a:satMod val="120000"/>
+                <a:shade val="78000"/>
+              </a:schemeClr>
+            </a:gs>
+          </a:gsLst>
+          <a:lin ang="5400000" scaled="0"/>
+        </a:gradFill>
+      </a:fillStyleLst>
+      <a:lnStyleLst>
+        <a:ln w="6350" cap="flat" cmpd="sng" algn="ctr">
+          <a:solidFill>
+            <a:schemeClr val="phClr"/>
+          </a:solidFill>
+          <a:prstDash val="solid"/>
+          <a:miter lim="800000"/>
+        </a:ln>
+        <a:ln w="12700" cap="flat" cmpd="sng" algn="ctr">
+          <a:solidFill>
+            <a:schemeClr val="phClr"/>
+          </a:solidFill>
+          <a:prstDash val="solid"/>
+          <a:miter lim="800000"/>
+        </a:ln>
+        <a:ln w="19050" cap="flat" cmpd="sng" algn="ctr">
+          <a:solidFill>
+            <a:schemeClr val="phClr"/>
+          </a:solidFill>
+          <a:prstDash val="solid"/>
+          <a:miter lim="800000"/>
+        </a:ln>
+      </a:lnStyleLst>
+      <a:effectStyleLst>
+        <a:effectStyle>
+          <a:effectLst/>
+        </a:effectStyle>
+        <a:effectStyle>
+          <a:effectLst/>
+        </a:effectStyle>
+        <a:effectStyle>
+          <a:effectLst>
+            <a:outerShdw blurRad="57150" dist="19050" dir="5400000" algn="ctr" rotWithShape="0">
+              <a:srgbClr val="000000">
+                <a:alpha val="63000"/>
+              </a:srgbClr>
+            </a:outerShdw>
+          </a:effectLst>
+        </a:effectStyle>
+      </a:effectStyleLst>
+      <a:bgFillStyleLst>
+        <a:solidFill>
+          <a:schemeClr val="phClr"/>
+        </a:solidFill>
+        <a:solidFill>
+          <a:schemeClr val="phClr">
+            <a:tint val="95000"/>
+            <a:satMod val="170000"/>
+          </a:schemeClr>
+        </a:solidFill>
+        <a:gradFill rotWithShape="1">
+          <a:gsLst>
+            <a:gs pos="0">
+              <a:schemeClr val="phClr">
+                <a:tint val="93000"/>
+                <a:satMod val="150000"/>
+                <a:shade val="98000"/>
+                <a:lumMod val="102000"/>
+              </a:schemeClr>
+            </a:gs>
+            <a:gs pos="50000">
+              <a:schemeClr val="phClr">
+                <a:tint val="98000"/>
+                <a:satMod val="130000"/>
+                <a:shade val="90000"/>
+                <a:lumMod val="103000"/>
+              </a:schemeClr>
+            </a:gs>
+            <a:gs pos="100000">
+              <a:schemeClr val="phClr">
+                <a:shade val="63000"/>
+                <a:satMod val="120000"/>
+              </a:schemeClr>
+            </a:gs>
+          </a:gsLst>
+          <a:lin ang="5400000" scaled="0"/>
+        </a:gradFill>
+      </a:bgFillStyleLst>
+    </a:fmtScheme>
+  </a:themeElements>
+  <a:objectDefaults/>
+  <a:extraClrSchemeLst/>
+  <a:extLst>
+    <a:ext uri="{05A4C25C-085E-4340-85A3-A5531E510DB2}">
+      <thm15:themeFamily xmlns:thm15="http://schemas.microsoft.com/office/thememl/2012/main" name="Office Theme" id="{62F939B6-93AF-4DB8-9C6B-D6C7DFDC589F}" vid="{4A3C46E8-61CC-4603-A589-7422A47A8E4A}"/>
+    </a:ext>
+  </a:extLst>
+</a:theme>
+</file>
+
+<file path=ppt/theme/theme2.xml><?xml version="1.0" encoding="utf-8"?>
 <a:theme xmlns:a="http://schemas.openxmlformats.org/drawingml/2006/main" name="Office 主题​​">
   <a:themeElements>
     <a:clrScheme name="Office">
